--- a/S1-CL3-Cloud-Infrastructure-Improvement/delivery/topic_04/Topic_04_Slides.pptx
+++ b/S1-CL3-Cloud-Infrastructure-Improvement/delivery/topic_04/Topic_04_Slides.pptx
@@ -3382,7 +3382,7 @@
           <a:noFill/>
         </p:spPr>
         <p:txBody>
-          <a:bodyPr wrap="square" anchor="t" lIns="0" rIns="0" tIns="0" bIns="0">
+          <a:bodyPr wrap="square" anchor="ctr" lIns="0" rIns="0" tIns="0" bIns="0">
             <a:spAutoFit/>
           </a:bodyPr>
           <a:lstStyle/>
@@ -3399,7 +3399,7 @@
               </a:spcAft>
             </a:pPr>
             <a:r>
-              <a:rPr sz="1800" b="1" i="0">
+              <a:rPr sz="2400" b="1" i="0">
                 <a:solidFill>
                   <a:srgbClr val="EDAB0C"/>
                 </a:solidFill>
@@ -3408,7 +3408,7 @@
               <a:t>■  </a:t>
             </a:r>
             <a:r>
-              <a:rPr sz="1800" b="0" i="0">
+              <a:rPr sz="2400" b="0" i="0">
                 <a:solidFill>
                   <a:srgbClr val="2A2929"/>
                 </a:solidFill>
@@ -3430,7 +3430,7 @@
               </a:spcAft>
             </a:pPr>
             <a:r>
-              <a:rPr sz="1800" b="1" i="0">
+              <a:rPr sz="2400" b="1" i="0">
                 <a:solidFill>
                   <a:srgbClr val="EDAB0C"/>
                 </a:solidFill>
@@ -3439,7 +3439,7 @@
               <a:t>■  </a:t>
             </a:r>
             <a:r>
-              <a:rPr sz="1800" b="0" i="0">
+              <a:rPr sz="2400" b="0" i="0">
                 <a:solidFill>
                   <a:srgbClr val="2A2929"/>
                 </a:solidFill>
@@ -3461,7 +3461,7 @@
               </a:spcAft>
             </a:pPr>
             <a:r>
-              <a:rPr sz="1800" b="1" i="0">
+              <a:rPr sz="2400" b="1" i="0">
                 <a:solidFill>
                   <a:srgbClr val="EDAB0C"/>
                 </a:solidFill>
@@ -3470,7 +3470,7 @@
               <a:t>■  </a:t>
             </a:r>
             <a:r>
-              <a:rPr sz="1800" b="0" i="0">
+              <a:rPr sz="2400" b="0" i="0">
                 <a:solidFill>
                   <a:srgbClr val="2A2929"/>
                 </a:solidFill>
@@ -3724,7 +3724,7 @@
           <a:noFill/>
         </p:spPr>
         <p:txBody>
-          <a:bodyPr wrap="square" anchor="t" lIns="0" rIns="0" tIns="0" bIns="0">
+          <a:bodyPr wrap="square" anchor="ctr" lIns="0" rIns="0" tIns="0" bIns="0">
             <a:spAutoFit/>
           </a:bodyPr>
           <a:lstStyle/>
@@ -3741,7 +3741,7 @@
               </a:spcAft>
             </a:pPr>
             <a:r>
-              <a:rPr sz="1800" b="1" i="0">
+              <a:rPr sz="2400" b="1" i="0">
                 <a:solidFill>
                   <a:srgbClr val="EDAB0C"/>
                 </a:solidFill>
@@ -3750,7 +3750,7 @@
               <a:t>■  </a:t>
             </a:r>
             <a:r>
-              <a:rPr sz="1800" b="0" i="0">
+              <a:rPr sz="2400" b="0" i="0">
                 <a:solidFill>
                   <a:srgbClr val="2A2929"/>
                 </a:solidFill>
@@ -3772,7 +3772,7 @@
               </a:spcAft>
             </a:pPr>
             <a:r>
-              <a:rPr sz="1800" b="1" i="0">
+              <a:rPr sz="2400" b="1" i="0">
                 <a:solidFill>
                   <a:srgbClr val="EDAB0C"/>
                 </a:solidFill>
@@ -3781,7 +3781,7 @@
               <a:t>■  </a:t>
             </a:r>
             <a:r>
-              <a:rPr sz="1800" b="0" i="0">
+              <a:rPr sz="2400" b="0" i="0">
                 <a:solidFill>
                   <a:srgbClr val="2A2929"/>
                 </a:solidFill>
@@ -3803,7 +3803,7 @@
               </a:spcAft>
             </a:pPr>
             <a:r>
-              <a:rPr sz="1800" b="1" i="0">
+              <a:rPr sz="2400" b="1" i="0">
                 <a:solidFill>
                   <a:srgbClr val="EDAB0C"/>
                 </a:solidFill>
@@ -3812,7 +3812,7 @@
               <a:t>■  </a:t>
             </a:r>
             <a:r>
-              <a:rPr sz="1800" b="0" i="0">
+              <a:rPr sz="2400" b="0" i="0">
                 <a:solidFill>
                   <a:srgbClr val="2A2929"/>
                 </a:solidFill>
@@ -5655,7 +5655,7 @@
           <a:noFill/>
         </p:spPr>
         <p:txBody>
-          <a:bodyPr wrap="square" anchor="t" lIns="0" rIns="0" tIns="0" bIns="0">
+          <a:bodyPr wrap="square" anchor="ctr" lIns="0" rIns="0" tIns="0" bIns="0">
             <a:spAutoFit/>
           </a:bodyPr>
           <a:lstStyle/>
@@ -5672,7 +5672,7 @@
               </a:spcAft>
             </a:pPr>
             <a:r>
-              <a:rPr sz="1800" b="1" i="0">
+              <a:rPr sz="2400" b="1" i="0">
                 <a:solidFill>
                   <a:srgbClr val="EDAB0C"/>
                 </a:solidFill>
@@ -5681,7 +5681,7 @@
               <a:t>■  </a:t>
             </a:r>
             <a:r>
-              <a:rPr sz="1800" b="0" i="0">
+              <a:rPr sz="2400" b="0" i="0">
                 <a:solidFill>
                   <a:srgbClr val="2A2929"/>
                 </a:solidFill>
@@ -5703,7 +5703,7 @@
               </a:spcAft>
             </a:pPr>
             <a:r>
-              <a:rPr sz="1800" b="1" i="0">
+              <a:rPr sz="2400" b="1" i="0">
                 <a:solidFill>
                   <a:srgbClr val="EDAB0C"/>
                 </a:solidFill>
@@ -5712,7 +5712,7 @@
               <a:t>■  </a:t>
             </a:r>
             <a:r>
-              <a:rPr sz="1800" b="0" i="0">
+              <a:rPr sz="2400" b="0" i="0">
                 <a:solidFill>
                   <a:srgbClr val="2A2929"/>
                 </a:solidFill>
@@ -5734,7 +5734,7 @@
               </a:spcAft>
             </a:pPr>
             <a:r>
-              <a:rPr sz="1800" b="1" i="0">
+              <a:rPr sz="2400" b="1" i="0">
                 <a:solidFill>
                   <a:srgbClr val="EDAB0C"/>
                 </a:solidFill>
@@ -5743,7 +5743,7 @@
               <a:t>■  </a:t>
             </a:r>
             <a:r>
-              <a:rPr sz="1800" b="0" i="0">
+              <a:rPr sz="2400" b="0" i="0">
                 <a:solidFill>
                   <a:srgbClr val="2A2929"/>
                 </a:solidFill>
@@ -5997,7 +5997,7 @@
           <a:noFill/>
         </p:spPr>
         <p:txBody>
-          <a:bodyPr wrap="square" anchor="t" lIns="0" rIns="0" tIns="0" bIns="0">
+          <a:bodyPr wrap="square" anchor="ctr" lIns="0" rIns="0" tIns="0" bIns="0">
             <a:spAutoFit/>
           </a:bodyPr>
           <a:lstStyle/>
@@ -6014,7 +6014,7 @@
               </a:spcAft>
             </a:pPr>
             <a:r>
-              <a:rPr sz="1800" b="1" i="0">
+              <a:rPr sz="2400" b="1" i="0">
                 <a:solidFill>
                   <a:srgbClr val="EDAB0C"/>
                 </a:solidFill>
@@ -6023,7 +6023,7 @@
               <a:t>■  </a:t>
             </a:r>
             <a:r>
-              <a:rPr sz="1800" b="0" i="0">
+              <a:rPr sz="2400" b="0" i="0">
                 <a:solidFill>
                   <a:srgbClr val="2A2929"/>
                 </a:solidFill>
@@ -6045,7 +6045,7 @@
               </a:spcAft>
             </a:pPr>
             <a:r>
-              <a:rPr sz="1800" b="1" i="0">
+              <a:rPr sz="2400" b="1" i="0">
                 <a:solidFill>
                   <a:srgbClr val="EDAB0C"/>
                 </a:solidFill>
@@ -6054,7 +6054,7 @@
               <a:t>■  </a:t>
             </a:r>
             <a:r>
-              <a:rPr sz="1800" b="0" i="0">
+              <a:rPr sz="2400" b="0" i="0">
                 <a:solidFill>
                   <a:srgbClr val="2A2929"/>
                 </a:solidFill>
@@ -6076,7 +6076,7 @@
               </a:spcAft>
             </a:pPr>
             <a:r>
-              <a:rPr sz="1800" b="1" i="0">
+              <a:rPr sz="2400" b="1" i="0">
                 <a:solidFill>
                   <a:srgbClr val="EDAB0C"/>
                 </a:solidFill>
@@ -6085,7 +6085,7 @@
               <a:t>■  </a:t>
             </a:r>
             <a:r>
-              <a:rPr sz="1800" b="0" i="0">
+              <a:rPr sz="2400" b="0" i="0">
                 <a:solidFill>
                   <a:srgbClr val="2A2929"/>
                 </a:solidFill>
@@ -6901,7 +6901,7 @@
           <a:noFill/>
         </p:spPr>
         <p:txBody>
-          <a:bodyPr wrap="square" anchor="t" lIns="0" rIns="0" tIns="0" bIns="0">
+          <a:bodyPr wrap="square" anchor="ctr" lIns="0" rIns="0" tIns="0" bIns="0">
             <a:spAutoFit/>
           </a:bodyPr>
           <a:lstStyle/>
@@ -6918,7 +6918,7 @@
               </a:spcAft>
             </a:pPr>
             <a:r>
-              <a:rPr sz="1800" b="1" i="0">
+              <a:rPr sz="2400" b="1" i="0">
                 <a:solidFill>
                   <a:srgbClr val="EDAB0C"/>
                 </a:solidFill>
@@ -6927,7 +6927,7 @@
               <a:t>■  </a:t>
             </a:r>
             <a:r>
-              <a:rPr sz="1800" b="0" i="0">
+              <a:rPr sz="2400" b="0" i="0">
                 <a:solidFill>
                   <a:srgbClr val="2A2929"/>
                 </a:solidFill>
@@ -6949,7 +6949,7 @@
               </a:spcAft>
             </a:pPr>
             <a:r>
-              <a:rPr sz="1800" b="1" i="0">
+              <a:rPr sz="2400" b="1" i="0">
                 <a:solidFill>
                   <a:srgbClr val="EDAB0C"/>
                 </a:solidFill>
@@ -6958,7 +6958,7 @@
               <a:t>■  </a:t>
             </a:r>
             <a:r>
-              <a:rPr sz="1800" b="0" i="0">
+              <a:rPr sz="2400" b="0" i="0">
                 <a:solidFill>
                   <a:srgbClr val="2A2929"/>
                 </a:solidFill>
@@ -6980,7 +6980,7 @@
               </a:spcAft>
             </a:pPr>
             <a:r>
-              <a:rPr sz="1800" b="1" i="0">
+              <a:rPr sz="2400" b="1" i="0">
                 <a:solidFill>
                   <a:srgbClr val="EDAB0C"/>
                 </a:solidFill>
@@ -6989,7 +6989,7 @@
               <a:t>■  </a:t>
             </a:r>
             <a:r>
-              <a:rPr sz="1800" b="0" i="0">
+              <a:rPr sz="2400" b="0" i="0">
                 <a:solidFill>
                   <a:srgbClr val="2A2929"/>
                 </a:solidFill>

--- a/S1-CL3-Cloud-Infrastructure-Improvement/delivery/topic_04/Topic_04_Slides.pptx
+++ b/S1-CL3-Cloud-Infrastructure-Improvement/delivery/topic_04/Topic_04_Slides.pptx
@@ -7,17 +7,17 @@
   <p:sldIdLst>
     <p:sldId id="256" r:id="rId7"/>
     <p:sldId id="257" r:id="rId8"/>
-    <p:sldId id="258" r:id="rId9"/>
-    <p:sldId id="259" r:id="rId10"/>
-    <p:sldId id="260" r:id="rId11"/>
-    <p:sldId id="261" r:id="rId12"/>
-    <p:sldId id="262" r:id="rId13"/>
-    <p:sldId id="263" r:id="rId14"/>
-    <p:sldId id="264" r:id="rId15"/>
-    <p:sldId id="265" r:id="rId16"/>
-    <p:sldId id="266" r:id="rId17"/>
-    <p:sldId id="267" r:id="rId18"/>
-    <p:sldId id="268" r:id="rId19"/>
+    <p:sldId id="258" r:id="rId10"/>
+    <p:sldId id="259" r:id="rId11"/>
+    <p:sldId id="260" r:id="rId12"/>
+    <p:sldId id="261" r:id="rId13"/>
+    <p:sldId id="262" r:id="rId14"/>
+    <p:sldId id="263" r:id="rId15"/>
+    <p:sldId id="264" r:id="rId16"/>
+    <p:sldId id="265" r:id="rId17"/>
+    <p:sldId id="266" r:id="rId18"/>
+    <p:sldId id="267" r:id="rId19"/>
+    <p:sldId id="268" r:id="rId20"/>
   </p:sldIdLst>
   <p:sldSz cx="12191695" cy="6858000" type="screen4x3"/>
   <p:notesSz cx="6858000" cy="9144000"/>
@@ -117,6 +117,1321 @@
     </a:lvl9pPr>
   </p:defaultTextStyle>
 </p:presentation>
+</file>
+
+<file path=ppt/notesMasters/notesMaster1.xml><?xml version="1.0" encoding="utf-8"?>
+<p:notesMaster xmlns:a="http://schemas.openxmlformats.org/drawingml/2006/main" xmlns:p="http://schemas.openxmlformats.org/presentationml/2006/main" xmlns:r="http://schemas.openxmlformats.org/officeDocument/2006/relationships">
+  <p:cSld>
+    <p:bg>
+      <p:bgRef idx="1001">
+        <a:schemeClr val="bg1"/>
+      </p:bgRef>
+    </p:bg>
+    <p:spTree>
+      <p:nvGrpSpPr>
+        <p:cNvPr id="1" name=""/>
+        <p:cNvGrpSpPr/>
+        <p:nvPr/>
+      </p:nvGrpSpPr>
+      <p:grpSpPr>
+        <a:xfrm>
+          <a:off x="0" y="0"/>
+          <a:ext cx="0" cy="0"/>
+          <a:chOff x="0" y="0"/>
+          <a:chExt cx="0" cy="0"/>
+        </a:xfrm>
+      </p:grpSpPr>
+      <p:sp>
+        <p:nvSpPr>
+          <p:cNvPr id="2" name="Header Placeholder 1"/>
+          <p:cNvSpPr>
+            <a:spLocks noGrp="1"/>
+          </p:cNvSpPr>
+          <p:nvPr>
+            <p:ph type="hdr" sz="quarter"/>
+          </p:nvPr>
+        </p:nvSpPr>
+        <p:spPr>
+          <a:xfrm>
+            <a:off x="0" y="0"/>
+            <a:ext cx="2971800" cy="457200"/>
+          </a:xfrm>
+          <a:prstGeom prst="rect">
+            <a:avLst/>
+          </a:prstGeom>
+        </p:spPr>
+        <p:txBody>
+          <a:bodyPr vert="horz" lIns="91440" tIns="45720" rIns="91440" bIns="45720" rtlCol="0"/>
+          <a:lstStyle>
+            <a:lvl1pPr algn="l">
+              <a:defRPr sz="1200"/>
+            </a:lvl1pPr>
+          </a:lstStyle>
+          <a:p>
+            <a:endParaRPr lang="en-US"/>
+          </a:p>
+        </p:txBody>
+      </p:sp>
+      <p:sp>
+        <p:nvSpPr>
+          <p:cNvPr id="3" name="Date Placeholder 2"/>
+          <p:cNvSpPr>
+            <a:spLocks noGrp="1"/>
+          </p:cNvSpPr>
+          <p:nvPr>
+            <p:ph type="dt" idx="1"/>
+          </p:nvPr>
+        </p:nvSpPr>
+        <p:spPr>
+          <a:xfrm>
+            <a:off x="3884613" y="0"/>
+            <a:ext cx="2971800" cy="457200"/>
+          </a:xfrm>
+          <a:prstGeom prst="rect">
+            <a:avLst/>
+          </a:prstGeom>
+        </p:spPr>
+        <p:txBody>
+          <a:bodyPr vert="horz" lIns="91440" tIns="45720" rIns="91440" bIns="45720" rtlCol="0"/>
+          <a:lstStyle>
+            <a:lvl1pPr algn="r">
+              <a:defRPr sz="1200"/>
+            </a:lvl1pPr>
+          </a:lstStyle>
+          <a:p>
+            <a:fld id="{0F89C1C7-3DCD-1040-A9CF-14679D8B5DDD}" type="datetimeFigureOut">
+              <a:rPr lang="en-US" smtClean="0"/>
+              <a:t>10/17/16</a:t>
+            </a:fld>
+            <a:endParaRPr lang="en-US"/>
+          </a:p>
+        </p:txBody>
+      </p:sp>
+      <p:sp>
+        <p:nvSpPr>
+          <p:cNvPr id="4" name="Slide Image Placeholder 3"/>
+          <p:cNvSpPr>
+            <a:spLocks noGrp="1" noRot="1" noChangeAspect="1"/>
+          </p:cNvSpPr>
+          <p:nvPr>
+            <p:ph type="sldImg" idx="2"/>
+          </p:nvPr>
+        </p:nvSpPr>
+        <p:spPr>
+          <a:xfrm>
+            <a:off x="1143000" y="685800"/>
+            <a:ext cx="4572000" cy="3429000"/>
+          </a:xfrm>
+          <a:prstGeom prst="rect">
+            <a:avLst/>
+          </a:prstGeom>
+          <a:noFill/>
+          <a:ln w="12700">
+            <a:solidFill>
+              <a:prstClr val="black"/>
+            </a:solidFill>
+          </a:ln>
+        </p:spPr>
+        <p:txBody>
+          <a:bodyPr vert="horz" lIns="91440" tIns="45720" rIns="91440" bIns="45720" rtlCol="0" anchor="ctr"/>
+          <a:lstStyle/>
+          <a:p>
+            <a:endParaRPr lang="en-US"/>
+          </a:p>
+        </p:txBody>
+      </p:sp>
+      <p:sp>
+        <p:nvSpPr>
+          <p:cNvPr id="5" name="Notes Placeholder 4"/>
+          <p:cNvSpPr>
+            <a:spLocks noGrp="1"/>
+          </p:cNvSpPr>
+          <p:nvPr>
+            <p:ph type="body" sz="quarter" idx="3"/>
+          </p:nvPr>
+        </p:nvSpPr>
+        <p:spPr>
+          <a:xfrm>
+            <a:off x="685800" y="4343400"/>
+            <a:ext cx="5486400" cy="4114800"/>
+          </a:xfrm>
+          <a:prstGeom prst="rect">
+            <a:avLst/>
+          </a:prstGeom>
+        </p:spPr>
+        <p:txBody>
+          <a:bodyPr vert="horz" lIns="91440" tIns="45720" rIns="91440" bIns="45720" rtlCol="0"/>
+          <a:lstStyle/>
+          <a:p>
+            <a:pPr lvl="0"/>
+            <a:r>
+              <a:rPr lang="en-US" smtClean="0"/>
+              <a:t>Click to edit Master text styles</a:t>
+            </a:r>
+          </a:p>
+          <a:p>
+            <a:pPr lvl="1"/>
+            <a:r>
+              <a:rPr lang="en-US" smtClean="0"/>
+              <a:t>Second level</a:t>
+            </a:r>
+          </a:p>
+          <a:p>
+            <a:pPr lvl="2"/>
+            <a:r>
+              <a:rPr lang="en-US" smtClean="0"/>
+              <a:t>Third level</a:t>
+            </a:r>
+          </a:p>
+          <a:p>
+            <a:pPr lvl="3"/>
+            <a:r>
+              <a:rPr lang="en-US" smtClean="0"/>
+              <a:t>Fourth level</a:t>
+            </a:r>
+          </a:p>
+          <a:p>
+            <a:pPr lvl="4"/>
+            <a:r>
+              <a:rPr lang="en-US" smtClean="0"/>
+              <a:t>Fifth level</a:t>
+            </a:r>
+            <a:endParaRPr lang="en-US"/>
+          </a:p>
+        </p:txBody>
+      </p:sp>
+      <p:sp>
+        <p:nvSpPr>
+          <p:cNvPr id="6" name="Footer Placeholder 5"/>
+          <p:cNvSpPr>
+            <a:spLocks noGrp="1"/>
+          </p:cNvSpPr>
+          <p:nvPr>
+            <p:ph type="ftr" sz="quarter" idx="4"/>
+          </p:nvPr>
+        </p:nvSpPr>
+        <p:spPr>
+          <a:xfrm>
+            <a:off x="0" y="8685213"/>
+            <a:ext cx="2971800" cy="457200"/>
+          </a:xfrm>
+          <a:prstGeom prst="rect">
+            <a:avLst/>
+          </a:prstGeom>
+        </p:spPr>
+        <p:txBody>
+          <a:bodyPr vert="horz" lIns="91440" tIns="45720" rIns="91440" bIns="45720" rtlCol="0" anchor="b"/>
+          <a:lstStyle>
+            <a:lvl1pPr algn="l">
+              <a:defRPr sz="1200"/>
+            </a:lvl1pPr>
+          </a:lstStyle>
+          <a:p>
+            <a:endParaRPr lang="en-US"/>
+          </a:p>
+        </p:txBody>
+      </p:sp>
+      <p:sp>
+        <p:nvSpPr>
+          <p:cNvPr id="7" name="Slide Number Placeholder 6"/>
+          <p:cNvSpPr>
+            <a:spLocks noGrp="1"/>
+          </p:cNvSpPr>
+          <p:nvPr>
+            <p:ph type="sldNum" sz="quarter" idx="5"/>
+          </p:nvPr>
+        </p:nvSpPr>
+        <p:spPr>
+          <a:xfrm>
+            <a:off x="3884613" y="8685213"/>
+            <a:ext cx="2971800" cy="457200"/>
+          </a:xfrm>
+          <a:prstGeom prst="rect">
+            <a:avLst/>
+          </a:prstGeom>
+        </p:spPr>
+        <p:txBody>
+          <a:bodyPr vert="horz" lIns="91440" tIns="45720" rIns="91440" bIns="45720" rtlCol="0" anchor="b"/>
+          <a:lstStyle>
+            <a:lvl1pPr algn="r">
+              <a:defRPr sz="1200"/>
+            </a:lvl1pPr>
+          </a:lstStyle>
+          <a:p>
+            <a:fld id="{BB5E49A5-4136-284D-997B-48E1D791AD67}" type="slidenum">
+              <a:rPr lang="en-US" smtClean="0"/>
+              <a:t>‹#›</a:t>
+            </a:fld>
+            <a:endParaRPr lang="en-US"/>
+          </a:p>
+        </p:txBody>
+      </p:sp>
+    </p:spTree>
+    <p:extLst>
+      <p:ext uri="{BB962C8B-B14F-4D97-AF65-F5344CB8AC3E}">
+        <p14:creationId xmlns:p14="http://schemas.microsoft.com/office/powerpoint/2010/main" val="2623252185"/>
+      </p:ext>
+    </p:extLst>
+  </p:cSld>
+  <p:clrMap bg1="lt1" tx1="dk1" bg2="lt2" tx2="dk2" accent1="accent1" accent2="accent2" accent3="accent3" accent4="accent4" accent5="accent5" accent6="accent6" hlink="hlink" folHlink="folHlink"/>
+  <p:notesStyle>
+    <a:lvl1pPr marL="0" algn="l" defTabSz="457200" rtl="0" eaLnBrk="1" latinLnBrk="0" hangingPunct="1">
+      <a:defRPr sz="1200" kern="1200">
+        <a:solidFill>
+          <a:schemeClr val="tx1"/>
+        </a:solidFill>
+        <a:latin typeface="+mn-lt"/>
+        <a:ea typeface="+mn-ea"/>
+        <a:cs typeface="+mn-cs"/>
+      </a:defRPr>
+    </a:lvl1pPr>
+    <a:lvl2pPr marL="457200" algn="l" defTabSz="457200" rtl="0" eaLnBrk="1" latinLnBrk="0" hangingPunct="1">
+      <a:defRPr sz="1200" kern="1200">
+        <a:solidFill>
+          <a:schemeClr val="tx1"/>
+        </a:solidFill>
+        <a:latin typeface="+mn-lt"/>
+        <a:ea typeface="+mn-ea"/>
+        <a:cs typeface="+mn-cs"/>
+      </a:defRPr>
+    </a:lvl2pPr>
+    <a:lvl3pPr marL="914400" algn="l" defTabSz="457200" rtl="0" eaLnBrk="1" latinLnBrk="0" hangingPunct="1">
+      <a:defRPr sz="1200" kern="1200">
+        <a:solidFill>
+          <a:schemeClr val="tx1"/>
+        </a:solidFill>
+        <a:latin typeface="+mn-lt"/>
+        <a:ea typeface="+mn-ea"/>
+        <a:cs typeface="+mn-cs"/>
+      </a:defRPr>
+    </a:lvl3pPr>
+    <a:lvl4pPr marL="1371600" algn="l" defTabSz="457200" rtl="0" eaLnBrk="1" latinLnBrk="0" hangingPunct="1">
+      <a:defRPr sz="1200" kern="1200">
+        <a:solidFill>
+          <a:schemeClr val="tx1"/>
+        </a:solidFill>
+        <a:latin typeface="+mn-lt"/>
+        <a:ea typeface="+mn-ea"/>
+        <a:cs typeface="+mn-cs"/>
+      </a:defRPr>
+    </a:lvl4pPr>
+    <a:lvl5pPr marL="1828800" algn="l" defTabSz="457200" rtl="0" eaLnBrk="1" latinLnBrk="0" hangingPunct="1">
+      <a:defRPr sz="1200" kern="1200">
+        <a:solidFill>
+          <a:schemeClr val="tx1"/>
+        </a:solidFill>
+        <a:latin typeface="+mn-lt"/>
+        <a:ea typeface="+mn-ea"/>
+        <a:cs typeface="+mn-cs"/>
+      </a:defRPr>
+    </a:lvl5pPr>
+    <a:lvl6pPr marL="2286000" algn="l" defTabSz="457200" rtl="0" eaLnBrk="1" latinLnBrk="0" hangingPunct="1">
+      <a:defRPr sz="1200" kern="1200">
+        <a:solidFill>
+          <a:schemeClr val="tx1"/>
+        </a:solidFill>
+        <a:latin typeface="+mn-lt"/>
+        <a:ea typeface="+mn-ea"/>
+        <a:cs typeface="+mn-cs"/>
+      </a:defRPr>
+    </a:lvl6pPr>
+    <a:lvl7pPr marL="2743200" algn="l" defTabSz="457200" rtl="0" eaLnBrk="1" latinLnBrk="0" hangingPunct="1">
+      <a:defRPr sz="1200" kern="1200">
+        <a:solidFill>
+          <a:schemeClr val="tx1"/>
+        </a:solidFill>
+        <a:latin typeface="+mn-lt"/>
+        <a:ea typeface="+mn-ea"/>
+        <a:cs typeface="+mn-cs"/>
+      </a:defRPr>
+    </a:lvl7pPr>
+    <a:lvl8pPr marL="3200400" algn="l" defTabSz="457200" rtl="0" eaLnBrk="1" latinLnBrk="0" hangingPunct="1">
+      <a:defRPr sz="1200" kern="1200">
+        <a:solidFill>
+          <a:schemeClr val="tx1"/>
+        </a:solidFill>
+        <a:latin typeface="+mn-lt"/>
+        <a:ea typeface="+mn-ea"/>
+        <a:cs typeface="+mn-cs"/>
+      </a:defRPr>
+    </a:lvl8pPr>
+    <a:lvl9pPr marL="3657600" algn="l" defTabSz="457200" rtl="0" eaLnBrk="1" latinLnBrk="0" hangingPunct="1">
+      <a:defRPr sz="1200" kern="1200">
+        <a:solidFill>
+          <a:schemeClr val="tx1"/>
+        </a:solidFill>
+        <a:latin typeface="+mn-lt"/>
+        <a:ea typeface="+mn-ea"/>
+        <a:cs typeface="+mn-cs"/>
+      </a:defRPr>
+    </a:lvl9pPr>
+  </p:notesStyle>
+</p:notesMaster>
+</file>
+
+<file path=ppt/notesSlides/notesSlide1.xml><?xml version="1.0" encoding="utf-8"?>
+<p:notes xmlns:a="http://schemas.openxmlformats.org/drawingml/2006/main" xmlns:p="http://schemas.openxmlformats.org/presentationml/2006/main" xmlns:r="http://schemas.openxmlformats.org/officeDocument/2006/relationships">
+  <p:cSld>
+    <p:spTree>
+      <p:nvGrpSpPr>
+        <p:cNvPr id="1" name=""/>
+        <p:cNvGrpSpPr/>
+        <p:nvPr/>
+      </p:nvGrpSpPr>
+      <p:grpSpPr>
+        <a:xfrm>
+          <a:off x="0" y="0"/>
+          <a:ext cx="0" cy="0"/>
+          <a:chOff x="0" y="0"/>
+          <a:chExt cx="0" cy="0"/>
+        </a:xfrm>
+      </p:grpSpPr>
+      <p:sp>
+        <p:nvSpPr>
+          <p:cNvPr id="2" name="Slide Image Placeholder 1"/>
+          <p:cNvSpPr>
+            <a:spLocks noGrp="1"/>
+          </p:cNvSpPr>
+          <p:nvPr>
+            <p:ph type="sldImg" idx="2"/>
+          </p:nvPr>
+        </p:nvSpPr>
+        <p:spPr/>
+      </p:sp>
+      <p:sp>
+        <p:nvSpPr>
+          <p:cNvPr id="3" name="Notes Placeholder 2"/>
+          <p:cNvSpPr>
+            <a:spLocks noGrp="1"/>
+          </p:cNvSpPr>
+          <p:nvPr>
+            <p:ph type="body" idx="3" sz="quarter"/>
+          </p:nvPr>
+        </p:nvSpPr>
+        <p:spPr/>
+        <p:txBody>
+          <a:bodyPr/>
+          <a:lstStyle/>
+          <a:p>
+            <a:r>
+              <a:t>Frame the CLOSE of AT1 — Topics 1–3 produced the design; Topic 4 turns it into one reviewable Solution</a:t>
+            </a:r>
+          </a:p>
+          <a:p>
+            <a:r>
+              <a:t>Design and gets it approved. Two moves: document/present, then obtain sign-off.</a:t>
+            </a:r>
+          </a:p>
+          <a:p>
+            <a:r>
+              <a:t>• First two bullets: Topics 1–3 produced the design; today you assemble it into one reviewable Solution</a:t>
+            </a:r>
+          </a:p>
+          <a:p>
+            <a:r>
+              <a:t>Design and get it approved — document and present, then obtain the sign-off to proceed to deployment.</a:t>
+            </a:r>
+          </a:p>
+          <a:p>
+            <a:r>
+              <a:t>• Third bullet: the cost-benefit reasoning rides INSIDE the Solution Design — there is no separate</a:t>
+            </a:r>
+          </a:p>
+          <a:p>
+            <a:r>
+              <a:t>business case. Say this clearly; students expect a standalone business case.</a:t>
+            </a:r>
+          </a:p>
+          <a:p>
+            <a:r>
+              <a:t>• Fourth bullet (the discipline): design only — this is the AT1 deliverable and its approval gate; the</a:t>
+            </a:r>
+          </a:p>
+          <a:p>
+            <a:r>
+              <a:t>build is AT2/AT3.</a:t>
+            </a:r>
+          </a:p>
+          <a:p>
+            <a:r>
+              <a:t>Misconception to pre-empt: "we write a separate business case for the cost-benefit." No — in this cluster</a:t>
+            </a:r>
+          </a:p>
+          <a:p>
+            <a:r>
+              <a:t>the cost-benefit is a SECTION of the Solution Design; one document carries the design, the rationale and</a:t>
+            </a:r>
+          </a:p>
+          <a:p>
+            <a:r>
+              <a:t>the trade-offs.</a:t>
+            </a:r>
+          </a:p>
+          <a:p>
+            <a:r>
+              <a:t>Question to pose: "Where does the no-Multi-AZ-database argument live in the deliverable?" (inside the</a:t>
+            </a:r>
+          </a:p>
+          <a:p>
+            <a:r>
+              <a:t>Solution Design's cost-benefit section — not a separate document).</a:t>
+            </a:r>
+          </a:p>
+          <a:p>
+            <a:r>
+              <a:t>UoC/AT1 tie: this Topic develops ICTCLD504 PC 2.4 (document &amp; present) and PC 2.5 (obtain sign-off); the</a:t>
+            </a:r>
+          </a:p>
+          <a:p>
+            <a:r>
+              <a:t>output is the assembled AT1 Solution Design + the observed presentation and sign-off record.</a:t>
+            </a:r>
+          </a:p>
+        </p:txBody>
+      </p:sp>
+      <p:sp>
+        <p:nvSpPr>
+          <p:cNvPr id="4" name="Slide Number Placeholder 3"/>
+          <p:cNvSpPr>
+            <a:spLocks noGrp="1"/>
+          </p:cNvSpPr>
+          <p:nvPr>
+            <p:ph type="sldNum" idx="5" sz="quarter"/>
+          </p:nvPr>
+        </p:nvSpPr>
+        <p:spPr/>
+      </p:sp>
+    </p:spTree>
+  </p:cSld>
+  <p:clrMapOvr>
+    <a:masterClrMapping/>
+  </p:clrMapOvr>
+</p:notes>
+</file>
+
+<file path=ppt/notesSlides/notesSlide2.xml><?xml version="1.0" encoding="utf-8"?>
+<p:notes xmlns:a="http://schemas.openxmlformats.org/drawingml/2006/main" xmlns:p="http://schemas.openxmlformats.org/presentationml/2006/main" xmlns:r="http://schemas.openxmlformats.org/officeDocument/2006/relationships">
+  <p:cSld>
+    <p:spTree>
+      <p:nvGrpSpPr>
+        <p:cNvPr id="1" name=""/>
+        <p:cNvGrpSpPr/>
+        <p:nvPr/>
+      </p:nvGrpSpPr>
+      <p:grpSpPr>
+        <a:xfrm>
+          <a:off x="0" y="0"/>
+          <a:ext cx="0" cy="0"/>
+          <a:chOff x="0" y="0"/>
+          <a:chExt cx="0" cy="0"/>
+        </a:xfrm>
+      </p:grpSpPr>
+      <p:sp>
+        <p:nvSpPr>
+          <p:cNvPr id="2" name="Slide Image Placeholder 1"/>
+          <p:cNvSpPr>
+            <a:spLocks noGrp="1"/>
+          </p:cNvSpPr>
+          <p:nvPr>
+            <p:ph type="sldImg" idx="2"/>
+          </p:nvPr>
+        </p:nvSpPr>
+        <p:spPr/>
+      </p:sp>
+      <p:sp>
+        <p:nvSpPr>
+          <p:cNvPr id="3" name="Notes Placeholder 2"/>
+          <p:cNvSpPr>
+            <a:spLocks noGrp="1"/>
+          </p:cNvSpPr>
+          <p:nvPr>
+            <p:ph type="body" idx="3" sz="quarter"/>
+          </p:nvPr>
+        </p:nvSpPr>
+        <p:spPr/>
+        <p:txBody>
+          <a:bodyPr/>
+          <a:lstStyle/>
+          <a:p>
+            <a:r>
+              <a:t>Open Section 1 — what a Solution Design document IS: a professional artefact a reviewer who wasn't in</a:t>
+            </a:r>
+          </a:p>
+          <a:p>
+            <a:r>
+              <a:t>the room can read and decide on. Teach the standard before they assemble theirs.</a:t>
+            </a:r>
+          </a:p>
+          <a:p>
+            <a:r>
+              <a:t>• First bullet: a Solution Design is a professional artefact — the proposed architecture, the rationale,</a:t>
+            </a:r>
+          </a:p>
+          <a:p>
+            <a:r>
+              <a:t>and the trade-offs — complete and readable by a reviewer who wasn't in the room.</a:t>
+            </a:r>
+          </a:p>
+          <a:p>
+            <a:r>
+              <a:t>• Second bullet: it documents the improved architecture with clear DIAGRAMS, decision RATIONALE, and the</a:t>
+            </a:r>
+          </a:p>
+          <a:p>
+            <a:r>
+              <a:t>METRICS behind each call. Three things, not just diagrams.</a:t>
+            </a:r>
+          </a:p>
+          <a:p>
+            <a:r>
+              <a:t>• Third bullet: it's pitched for a REVIEW audience — the required personnel who decide whether to</a:t>
+            </a:r>
+          </a:p>
+          <a:p>
+            <a:r>
+              <a:t>proceed. Write for the decider, not the builder.</a:t>
+            </a:r>
+          </a:p>
+          <a:p>
+            <a:r>
+              <a:t>Misconception to pre-empt: "a diagram is the design." No — the diagram is one part; without the rationale</a:t>
+            </a:r>
+          </a:p>
+          <a:p>
+            <a:r>
+              <a:t>and the metrics a reviewer can't judge WHY, only WHAT. All three are marked.</a:t>
+            </a:r>
+          </a:p>
+          <a:p>
+            <a:r>
+              <a:t>Question to pose: "A reviewer who wasn't in your design sessions opens the document — what must be there</a:t>
+            </a:r>
+          </a:p>
+          <a:p>
+            <a:r>
+              <a:t>for them to approve it?" (architecture + rationale + metrics/trade-offs, readable cold).</a:t>
+            </a:r>
+          </a:p>
+          <a:p>
+            <a:r>
+              <a:t>UoC/AT1 tie: ICTCLD504 PC 2.4 (document &amp; present proposed architecture for review) → the AT1 Solution</a:t>
+            </a:r>
+          </a:p>
+          <a:p>
+            <a:r>
+              <a:t>Design document.</a:t>
+            </a:r>
+          </a:p>
+        </p:txBody>
+      </p:sp>
+      <p:sp>
+        <p:nvSpPr>
+          <p:cNvPr id="4" name="Slide Number Placeholder 3"/>
+          <p:cNvSpPr>
+            <a:spLocks noGrp="1"/>
+          </p:cNvSpPr>
+          <p:nvPr>
+            <p:ph type="sldNum" idx="5" sz="quarter"/>
+          </p:nvPr>
+        </p:nvSpPr>
+        <p:spPr/>
+      </p:sp>
+    </p:spTree>
+  </p:cSld>
+  <p:clrMapOvr>
+    <a:masterClrMapping/>
+  </p:clrMapOvr>
+</p:notes>
+</file>
+
+<file path=ppt/notesSlides/notesSlide3.xml><?xml version="1.0" encoding="utf-8"?>
+<p:notes xmlns:a="http://schemas.openxmlformats.org/drawingml/2006/main" xmlns:p="http://schemas.openxmlformats.org/presentationml/2006/main" xmlns:r="http://schemas.openxmlformats.org/officeDocument/2006/relationships">
+  <p:cSld>
+    <p:spTree>
+      <p:nvGrpSpPr>
+        <p:cNvPr id="1" name=""/>
+        <p:cNvGrpSpPr/>
+        <p:nvPr/>
+      </p:nvGrpSpPr>
+      <p:grpSpPr>
+        <a:xfrm>
+          <a:off x="0" y="0"/>
+          <a:ext cx="0" cy="0"/>
+          <a:chOff x="0" y="0"/>
+          <a:chExt cx="0" cy="0"/>
+        </a:xfrm>
+      </p:grpSpPr>
+      <p:sp>
+        <p:nvSpPr>
+          <p:cNvPr id="2" name="Slide Image Placeholder 1"/>
+          <p:cNvSpPr>
+            <a:spLocks noGrp="1"/>
+          </p:cNvSpPr>
+          <p:nvPr>
+            <p:ph type="sldImg" idx="2"/>
+          </p:nvPr>
+        </p:nvSpPr>
+        <p:spPr/>
+      </p:sp>
+      <p:sp>
+        <p:nvSpPr>
+          <p:cNvPr id="3" name="Notes Placeholder 2"/>
+          <p:cNvSpPr>
+            <a:spLocks noGrp="1"/>
+          </p:cNvSpPr>
+          <p:nvPr>
+            <p:ph type="body" idx="3" sz="quarter"/>
+          </p:nvPr>
+        </p:nvSpPr>
+        <p:spPr/>
+        <p:txBody>
+          <a:bodyPr/>
+          <a:lstStyle/>
+          <a:p>
+            <a:r>
+              <a:t>The assembly slide — bring Topics 1–3 together into one coherent document where every part agrees. This</a:t>
+            </a:r>
+          </a:p>
+          <a:p>
+            <a:r>
+              <a:t>is where scattered design work becomes a single deliverable.</a:t>
+            </a:r>
+          </a:p>
+          <a:p>
+            <a:r>
+              <a:t>• First bullet: bring together the baseline analysis (Topic 1) and the four design concerns —</a:t>
+            </a:r>
+          </a:p>
+          <a:p>
+            <a:r>
+              <a:t>reliability and scalability (Topics 2–3) — into ONE document.</a:t>
+            </a:r>
+          </a:p>
+          <a:p>
+            <a:r>
+              <a:t>• Second bullet: each proposed change traces back to a named requirement or gap; the diagrams, tables and</a:t>
+            </a:r>
+          </a:p>
+          <a:p>
+            <a:r>
+              <a:t>prose AGREE. Consistency is a marked quality.</a:t>
+            </a:r>
+          </a:p>
+          <a:p>
+            <a:r>
+              <a:t>• Third bullet: fold in the cost-benefit reasoning — what each change costs and the improvement it buys</a:t>
+            </a:r>
+          </a:p>
+          <a:p>
+            <a:r>
+              <a:t>(including the no-Multi-AZ-database call).</a:t>
+            </a:r>
+          </a:p>
+          <a:p>
+            <a:r>
+              <a:t>Misconception to pre-empt: "assemble = staple the topic outputs together." No — assembly means making</a:t>
+            </a:r>
+          </a:p>
+          <a:p>
+            <a:r>
+              <a:t>them agree and traceable; contradictions between the diagram and the prose are exactly what a reviewer</a:t>
+            </a:r>
+          </a:p>
+          <a:p>
+            <a:r>
+              <a:t>catches.</a:t>
+            </a:r>
+          </a:p>
+          <a:p>
+            <a:r>
+              <a:t>Question to pose: "Your reliability diagram shows a single-AZ DB but your prose says 'highly available</a:t>
+            </a:r>
+          </a:p>
+          <a:p>
+            <a:r>
+              <a:t>database' — what's wrong, and which is right?" (they must agree; the design is single-AZ DB by the</a:t>
+            </a:r>
+          </a:p>
+          <a:p>
+            <a:r>
+              <a:t>cost-benefit call).</a:t>
+            </a:r>
+          </a:p>
+          <a:p>
+            <a:r>
+              <a:t>UoC/AT1 tie: ICTCLD504 PC 2.4 → the assembled AT1 Solution Design document.</a:t>
+            </a:r>
+          </a:p>
+        </p:txBody>
+      </p:sp>
+      <p:sp>
+        <p:nvSpPr>
+          <p:cNvPr id="4" name="Slide Number Placeholder 3"/>
+          <p:cNvSpPr>
+            <a:spLocks noGrp="1"/>
+          </p:cNvSpPr>
+          <p:nvPr>
+            <p:ph type="sldNum" idx="5" sz="quarter"/>
+          </p:nvPr>
+        </p:nvSpPr>
+        <p:spPr/>
+      </p:sp>
+    </p:spTree>
+  </p:cSld>
+  <p:clrMapOvr>
+    <a:masterClrMapping/>
+  </p:clrMapOvr>
+</p:notes>
+</file>
+
+<file path=ppt/notesSlides/notesSlide4.xml><?xml version="1.0" encoding="utf-8"?>
+<p:notes xmlns:a="http://schemas.openxmlformats.org/drawingml/2006/main" xmlns:p="http://schemas.openxmlformats.org/presentationml/2006/main" xmlns:r="http://schemas.openxmlformats.org/officeDocument/2006/relationships">
+  <p:cSld>
+    <p:spTree>
+      <p:nvGrpSpPr>
+        <p:cNvPr id="1" name=""/>
+        <p:cNvGrpSpPr/>
+        <p:nvPr/>
+      </p:nvGrpSpPr>
+      <p:grpSpPr>
+        <a:xfrm>
+          <a:off x="0" y="0"/>
+          <a:ext cx="0" cy="0"/>
+          <a:chOff x="0" y="0"/>
+          <a:chExt cx="0" cy="0"/>
+        </a:xfrm>
+      </p:grpSpPr>
+      <p:sp>
+        <p:nvSpPr>
+          <p:cNvPr id="2" name="Slide Image Placeholder 1"/>
+          <p:cNvSpPr>
+            <a:spLocks noGrp="1"/>
+          </p:cNvSpPr>
+          <p:nvPr>
+            <p:ph type="sldImg" idx="2"/>
+          </p:nvPr>
+        </p:nvSpPr>
+        <p:spPr/>
+      </p:sp>
+      <p:sp>
+        <p:nvSpPr>
+          <p:cNvPr id="3" name="Notes Placeholder 2"/>
+          <p:cNvSpPr>
+            <a:spLocks noGrp="1"/>
+          </p:cNvSpPr>
+          <p:nvPr>
+            <p:ph type="body" idx="3" sz="quarter"/>
+          </p:nvPr>
+        </p:nvSpPr>
+        <p:spPr/>
+        <p:txBody>
+          <a:bodyPr/>
+          <a:lstStyle/>
+          <a:p>
+            <a:r>
+              <a:t>Teach the PRESENTATION — walking a reviewer through the design and defending the key call. Note this is</a:t>
+            </a:r>
+          </a:p>
+          <a:p>
+            <a:r>
+              <a:t>an observed individual oral (AT1 Part B), so the skill is spoken, not written.</a:t>
+            </a:r>
+          </a:p>
+          <a:p>
+            <a:r>
+              <a:t>• First bullet: present the proposed architecture to the required personnel — walk the DECISIONS that</a:t>
+            </a:r>
+          </a:p>
+          <a:p>
+            <a:r>
+              <a:t>matter, not every line. Curate for the audience.</a:t>
+            </a:r>
+          </a:p>
+          <a:p>
+            <a:r>
+              <a:t>• Second bullet: be ready to DEFEND the reliability cost-benefit call — why the database stays single-AZ</a:t>
+            </a:r>
+          </a:p>
+          <a:p>
+            <a:r>
+              <a:t>rather than Multi-AZ. This is the question a reviewer will press.</a:t>
+            </a:r>
+          </a:p>
+          <a:p>
+            <a:r>
+              <a:t>• Third bullet: seek feedback and respond — accept, adjust, or defend with reasons. This is an observed</a:t>
+            </a:r>
+          </a:p>
+          <a:p>
+            <a:r>
+              <a:t>individual oral in AT1 Part B; responding well is assessed.</a:t>
+            </a:r>
+          </a:p>
+          <a:p>
+            <a:r>
+              <a:t>Misconception to pre-empt: "presenting = reading every slide." No — you walk the decisions that matter</a:t>
+            </a:r>
+          </a:p>
+          <a:p>
+            <a:r>
+              <a:t>and can defend them under questioning; reading the document aloud isn't presenting it.</a:t>
+            </a:r>
+          </a:p>
+          <a:p>
+            <a:r>
+              <a:t>Question to pose: "A reviewer says 'a real accounting system should have a Multi-AZ database' — what's</a:t>
+            </a:r>
+          </a:p>
+          <a:p>
+            <a:r>
+              <a:t>your response?" (defend the cost-benefit: vendor single-instance, product-replacement cost</a:t>
+            </a:r>
+          </a:p>
+          <a:p>
+            <a:r>
+              <a:t>disproportionate to the goal).</a:t>
+            </a:r>
+          </a:p>
+          <a:p>
+            <a:r>
+              <a:t>UoC/AT1 tie: ICTCLD504 PC 2.4 (present for review to required personnel) → AT1 Part B observed</a:t>
+            </a:r>
+          </a:p>
+          <a:p>
+            <a:r>
+              <a:t>presentation.</a:t>
+            </a:r>
+          </a:p>
+        </p:txBody>
+      </p:sp>
+      <p:sp>
+        <p:nvSpPr>
+          <p:cNvPr id="4" name="Slide Number Placeholder 3"/>
+          <p:cNvSpPr>
+            <a:spLocks noGrp="1"/>
+          </p:cNvSpPr>
+          <p:nvPr>
+            <p:ph type="sldNum" idx="5" sz="quarter"/>
+          </p:nvPr>
+        </p:nvSpPr>
+        <p:spPr/>
+      </p:sp>
+    </p:spTree>
+  </p:cSld>
+  <p:clrMapOvr>
+    <a:masterClrMapping/>
+  </p:clrMapOvr>
+</p:notes>
+</file>
+
+<file path=ppt/notesSlides/notesSlide5.xml><?xml version="1.0" encoding="utf-8"?>
+<p:notes xmlns:a="http://schemas.openxmlformats.org/drawingml/2006/main" xmlns:p="http://schemas.openxmlformats.org/presentationml/2006/main" xmlns:r="http://schemas.openxmlformats.org/officeDocument/2006/relationships">
+  <p:cSld>
+    <p:spTree>
+      <p:nvGrpSpPr>
+        <p:cNvPr id="1" name=""/>
+        <p:cNvGrpSpPr/>
+        <p:nvPr/>
+      </p:nvGrpSpPr>
+      <p:grpSpPr>
+        <a:xfrm>
+          <a:off x="0" y="0"/>
+          <a:ext cx="0" cy="0"/>
+          <a:chOff x="0" y="0"/>
+          <a:chExt cx="0" cy="0"/>
+        </a:xfrm>
+      </p:grpSpPr>
+      <p:sp>
+        <p:nvSpPr>
+          <p:cNvPr id="2" name="Slide Image Placeholder 1"/>
+          <p:cNvSpPr>
+            <a:spLocks noGrp="1"/>
+          </p:cNvSpPr>
+          <p:nvPr>
+            <p:ph type="sldImg" idx="2"/>
+          </p:nvPr>
+        </p:nvSpPr>
+        <p:spPr/>
+      </p:sp>
+      <p:sp>
+        <p:nvSpPr>
+          <p:cNvPr id="3" name="Notes Placeholder 2"/>
+          <p:cNvSpPr>
+            <a:spLocks noGrp="1"/>
+          </p:cNvSpPr>
+          <p:nvPr>
+            <p:ph type="body" idx="3" sz="quarter"/>
+          </p:nvPr>
+        </p:nvSpPr>
+        <p:spPr/>
+        <p:txBody>
+          <a:bodyPr/>
+          <a:lstStyle/>
+          <a:p>
+            <a:r>
+              <a:t>Facilitation — the Section 1 practice; students present their assembled practice Solution Design to a</a:t>
+            </a:r>
+          </a:p>
+          <a:p>
+            <a:r>
+              <a:t>mock review panel — a live rehearsal of the AT1 Part B oral.</a:t>
+            </a:r>
+          </a:p>
+          <a:p>
+            <a:r>
+              <a:t>Tell students: "For the practice engagement — the website vehicle — present your assembled Solution</a:t>
+            </a:r>
+          </a:p>
+          <a:p>
+            <a:r>
+              <a:t>Design to a mock review panel. Walk the key decisions, defend your cost-benefit trade-offs, and seek and</a:t>
+            </a:r>
+          </a:p>
+          <a:p>
+            <a:r>
+              <a:t>respond to feedback."</a:t>
+            </a:r>
+          </a:p>
+          <a:p>
+            <a:r>
+              <a:t>Run it (put on the board):</a:t>
+            </a:r>
+          </a:p>
+          <a:p>
+            <a:r>
+              <a:t>1. Pair or small-group: one presents, the others are the review panel.</a:t>
+            </a:r>
+          </a:p>
+          <a:p>
+            <a:r>
+              <a:t>2. Presenter walks the decisions that matter (not every line) and defends at least one cost-benefit</a:t>
+            </a:r>
+          </a:p>
+          <a:p>
+            <a:r>
+              <a:t>trade-off.</a:t>
+            </a:r>
+          </a:p>
+          <a:p>
+            <a:r>
+              <a:t>3. Panel gives feedback; presenter responds — accept, adjust, or defend with reasons. Then swap.</a:t>
+            </a:r>
+          </a:p>
+          <a:p>
+            <a:r>
+              <a:t>Must produce: each student has presented once and fielded at least one challenge on a trade-off.</a:t>
+            </a:r>
+          </a:p>
+          <a:p>
+            <a:r>
+              <a:t>Timing: ~25 min. Where they get stuck: they read the document instead of presenting, and they crumble on</a:t>
+            </a:r>
+          </a:p>
+          <a:p>
+            <a:r>
+              <a:t>the first challenge instead of defending with the cost-benefit reasoning — coach both.</a:t>
+            </a:r>
+          </a:p>
+          <a:p>
+            <a:r>
+              <a:t>Share-back prompt: ask a panel which defence they found most convincing, and why.</a:t>
+            </a:r>
+          </a:p>
+          <a:p>
+            <a:r>
+              <a:t>No-leakage note: the website is the practice vehicle; AT1 assesses the presentation on Ledgerline —</a:t>
+            </a:r>
+          </a:p>
+          <a:p>
+            <a:r>
+              <a:t>comparable, not identical.</a:t>
+            </a:r>
+          </a:p>
+        </p:txBody>
+      </p:sp>
+      <p:sp>
+        <p:nvSpPr>
+          <p:cNvPr id="4" name="Slide Number Placeholder 3"/>
+          <p:cNvSpPr>
+            <a:spLocks noGrp="1"/>
+          </p:cNvSpPr>
+          <p:nvPr>
+            <p:ph type="sldNum" idx="5" sz="quarter"/>
+          </p:nvPr>
+        </p:nvSpPr>
+        <p:spPr/>
+      </p:sp>
+    </p:spTree>
+  </p:cSld>
+  <p:clrMapOvr>
+    <a:masterClrMapping/>
+  </p:clrMapOvr>
+</p:notes>
+</file>
+
+<file path=ppt/notesSlides/notesSlide6.xml><?xml version="1.0" encoding="utf-8"?>
+<p:notes xmlns:a="http://schemas.openxmlformats.org/drawingml/2006/main" xmlns:p="http://schemas.openxmlformats.org/presentationml/2006/main" xmlns:r="http://schemas.openxmlformats.org/officeDocument/2006/relationships">
+  <p:cSld>
+    <p:spTree>
+      <p:nvGrpSpPr>
+        <p:cNvPr id="1" name=""/>
+        <p:cNvGrpSpPr/>
+        <p:nvPr/>
+      </p:nvGrpSpPr>
+      <p:grpSpPr>
+        <a:xfrm>
+          <a:off x="0" y="0"/>
+          <a:ext cx="0" cy="0"/>
+          <a:chOff x="0" y="0"/>
+          <a:chExt cx="0" cy="0"/>
+        </a:xfrm>
+      </p:grpSpPr>
+      <p:sp>
+        <p:nvSpPr>
+          <p:cNvPr id="2" name="Slide Image Placeholder 1"/>
+          <p:cNvSpPr>
+            <a:spLocks noGrp="1"/>
+          </p:cNvSpPr>
+          <p:nvPr>
+            <p:ph type="sldImg" idx="2"/>
+          </p:nvPr>
+        </p:nvSpPr>
+        <p:spPr/>
+      </p:sp>
+      <p:sp>
+        <p:nvSpPr>
+          <p:cNvPr id="3" name="Notes Placeholder 2"/>
+          <p:cNvSpPr>
+            <a:spLocks noGrp="1"/>
+          </p:cNvSpPr>
+          <p:nvPr>
+            <p:ph type="body" idx="3" sz="quarter"/>
+          </p:nvPr>
+        </p:nvSpPr>
+        <p:spPr/>
+        <p:txBody>
+          <a:bodyPr/>
+          <a:lstStyle/>
+          <a:p>
+            <a:r>
+              <a:t>Open Section 2 — the deploy sign-off, the formal authorisation that gates the build. Teach it as a real</a:t>
+            </a:r>
+          </a:p>
+          <a:p>
+            <a:r>
+              <a:t>gate with a record, not a formality.</a:t>
+            </a:r>
+          </a:p>
+          <a:p>
+            <a:r>
+              <a:t>• First bullet: obtain sign-off to proceed to deployment from the required personnel — the formal</a:t>
+            </a:r>
+          </a:p>
+          <a:p>
+            <a:r>
+              <a:t>AUTHORISATION to build.</a:t>
+            </a:r>
+          </a:p>
+          <a:p>
+            <a:r>
+              <a:t>• Second bullet: sign-off is the GATE — no AT2/AT3 work starts until the design is approved. It has</a:t>
+            </a:r>
+          </a:p>
+          <a:p>
+            <a:r>
+              <a:t>consequences.</a:t>
+            </a:r>
+          </a:p>
+          <a:p>
+            <a:r>
+              <a:t>• Third bullet: RECORD it — who approved, on what, when — as part of the Solution Design. An unrecorded</a:t>
+            </a:r>
+          </a:p>
+          <a:p>
+            <a:r>
+              <a:t>approval is no approval.</a:t>
+            </a:r>
+          </a:p>
+          <a:p>
+            <a:r>
+              <a:t>Misconception to pre-empt: "sign-off is just a signature at the end." No — it's the authorisation that</a:t>
+            </a:r>
+          </a:p>
+          <a:p>
+            <a:r>
+              <a:t>lets the build begin, and it must be recorded (who/what/when) to be evidence.</a:t>
+            </a:r>
+          </a:p>
+          <a:p>
+            <a:r>
+              <a:t>Question to pose: "What can't happen until this sign-off is obtained and recorded?" (the AT2/AT3 build —</a:t>
+            </a:r>
+          </a:p>
+          <a:p>
+            <a:r>
+              <a:t>sign-off gates deployment).</a:t>
+            </a:r>
+          </a:p>
+          <a:p>
+            <a:r>
+              <a:t>UoC/AT1 tie: ICTCLD504 PC 2.5 (obtain sign-off to proceed to deployment) → the AT1 sign-off record.</a:t>
+            </a:r>
+          </a:p>
+        </p:txBody>
+      </p:sp>
+      <p:sp>
+        <p:nvSpPr>
+          <p:cNvPr id="4" name="Slide Number Placeholder 3"/>
+          <p:cNvSpPr>
+            <a:spLocks noGrp="1"/>
+          </p:cNvSpPr>
+          <p:nvPr>
+            <p:ph type="sldNum" idx="5" sz="quarter"/>
+          </p:nvPr>
+        </p:nvSpPr>
+        <p:spPr/>
+      </p:sp>
+    </p:spTree>
+  </p:cSld>
+  <p:clrMapOvr>
+    <a:masterClrMapping/>
+  </p:clrMapOvr>
+</p:notes>
+</file>
+
+<file path=ppt/notesSlides/notesSlide7.xml><?xml version="1.0" encoding="utf-8"?>
+<p:notes xmlns:a="http://schemas.openxmlformats.org/drawingml/2006/main" xmlns:p="http://schemas.openxmlformats.org/presentationml/2006/main" xmlns:r="http://schemas.openxmlformats.org/officeDocument/2006/relationships">
+  <p:cSld>
+    <p:spTree>
+      <p:nvGrpSpPr>
+        <p:cNvPr id="1" name=""/>
+        <p:cNvGrpSpPr/>
+        <p:nvPr/>
+      </p:nvGrpSpPr>
+      <p:grpSpPr>
+        <a:xfrm>
+          <a:off x="0" y="0"/>
+          <a:ext cx="0" cy="0"/>
+          <a:chOff x="0" y="0"/>
+          <a:chExt cx="0" cy="0"/>
+        </a:xfrm>
+      </p:grpSpPr>
+      <p:sp>
+        <p:nvSpPr>
+          <p:cNvPr id="2" name="Slide Image Placeholder 1"/>
+          <p:cNvSpPr>
+            <a:spLocks noGrp="1"/>
+          </p:cNvSpPr>
+          <p:nvPr>
+            <p:ph type="sldImg" idx="2"/>
+          </p:nvPr>
+        </p:nvSpPr>
+        <p:spPr/>
+      </p:sp>
+      <p:sp>
+        <p:nvSpPr>
+          <p:cNvPr id="3" name="Notes Placeholder 2"/>
+          <p:cNvSpPr>
+            <a:spLocks noGrp="1"/>
+          </p:cNvSpPr>
+          <p:nvPr>
+            <p:ph type="body" idx="3" sz="quarter"/>
+          </p:nvPr>
+        </p:nvSpPr>
+        <p:spPr/>
+        <p:txBody>
+          <a:bodyPr/>
+          <a:lstStyle/>
+          <a:p>
+            <a:r>
+              <a:t>Distinguish the cluster's TWO approval moments so students don't conflate them — a common exam error.</a:t>
+            </a:r>
+          </a:p>
+          <a:p>
+            <a:r>
+              <a:t>This slide exists purely to separate them cleanly.</a:t>
+            </a:r>
+          </a:p>
+          <a:p>
+            <a:r>
+              <a:t>• First bullet: THIS is the cluster's first approval — sign-off to proceed to deployment, on the DESIGN.</a:t>
+            </a:r>
+          </a:p>
+          <a:p>
+            <a:r>
+              <a:t>It authorises work that hasn't happened yet.</a:t>
+            </a:r>
+          </a:p>
+          <a:p>
+            <a:r>
+              <a:t>• Second bullet: the SECOND is the final sign-off at AT3 — on the deployed and tested improvement. It</a:t>
+            </a:r>
+          </a:p>
+          <a:p>
+            <a:r>
+              <a:t>accepts work that has happened.</a:t>
+            </a:r>
+          </a:p>
+          <a:p>
+            <a:r>
+              <a:t>• Third bullet: this gate authorises the build; the AT3 gate accepts the result. Different moment,</a:t>
+            </a:r>
+          </a:p>
+          <a:p>
+            <a:r>
+              <a:t>different object, different question.</a:t>
+            </a:r>
+          </a:p>
+          <a:p>
+            <a:r>
+              <a:t>Misconception to pre-empt: "sign-off is sign-off." No — the AT1 sign-off approves a PLAN to build; the</a:t>
+            </a:r>
+          </a:p>
+          <a:p>
+            <a:r>
+              <a:t>AT3 sign-off accepts a BUILT-and-tested result. Confusing them muddles what each is evidence of.</a:t>
+            </a:r>
+          </a:p>
+          <a:p>
+            <a:r>
+              <a:t>Question to pose: "The AT1 sign-off and the AT3 sign-off — what does each one approve?" (AT1: proceed to</a:t>
+            </a:r>
+          </a:p>
+          <a:p>
+            <a:r>
+              <a:t>deploy, on the design; AT3: accept the deployed &amp; tested improvement).</a:t>
+            </a:r>
+          </a:p>
+          <a:p>
+            <a:r>
+              <a:t>UoC/AT1 tie: ICTCLD504 PC 2.5 (obtain sign-off to proceed) — the first of the cluster's two approval</a:t>
+            </a:r>
+          </a:p>
+          <a:p>
+            <a:r>
+              <a:t>moments; the second is evidenced at AT3.</a:t>
+            </a:r>
+          </a:p>
+        </p:txBody>
+      </p:sp>
+      <p:sp>
+        <p:nvSpPr>
+          <p:cNvPr id="4" name="Slide Number Placeholder 3"/>
+          <p:cNvSpPr>
+            <a:spLocks noGrp="1"/>
+          </p:cNvSpPr>
+          <p:nvPr>
+            <p:ph type="sldNum" idx="5" sz="quarter"/>
+          </p:nvPr>
+        </p:nvSpPr>
+        <p:spPr/>
+      </p:sp>
+    </p:spTree>
+  </p:cSld>
+  <p:clrMapOvr>
+    <a:masterClrMapping/>
+  </p:clrMapOvr>
+</p:notes>
 </file>
 
 <file path=ppt/slideLayouts/slideLayout1.xml><?xml version="1.0" encoding="utf-8"?>
@@ -8184,4 +9499,324 @@
   </a:objectDefaults>
   <a:extraClrSchemeLst/>
 </a:theme>
+</file>
+
+<file path=ppt/theme/theme2.xml><?xml version="1.0" encoding="utf-8"?>
+<a:theme xmlns:a="http://schemas.openxmlformats.org/drawingml/2006/main" name="Office Theme">
+  <a:themeElements>
+    <a:clrScheme name="Office">
+      <a:dk1>
+        <a:sysClr val="windowText" lastClr="000000"/>
+      </a:dk1>
+      <a:lt1>
+        <a:sysClr val="window" lastClr="FFFFFF"/>
+      </a:lt1>
+      <a:dk2>
+        <a:srgbClr val="1F497D"/>
+      </a:dk2>
+      <a:lt2>
+        <a:srgbClr val="EEECE1"/>
+      </a:lt2>
+      <a:accent1>
+        <a:srgbClr val="4F81BD"/>
+      </a:accent1>
+      <a:accent2>
+        <a:srgbClr val="C0504D"/>
+      </a:accent2>
+      <a:accent3>
+        <a:srgbClr val="9BBB59"/>
+      </a:accent3>
+      <a:accent4>
+        <a:srgbClr val="8064A2"/>
+      </a:accent4>
+      <a:accent5>
+        <a:srgbClr val="4BACC6"/>
+      </a:accent5>
+      <a:accent6>
+        <a:srgbClr val="F79646"/>
+      </a:accent6>
+      <a:hlink>
+        <a:srgbClr val="0000FF"/>
+      </a:hlink>
+      <a:folHlink>
+        <a:srgbClr val="800080"/>
+      </a:folHlink>
+    </a:clrScheme>
+    <a:fontScheme name="Office">
+      <a:majorFont>
+        <a:latin typeface="Calibri"/>
+        <a:ea typeface=""/>
+        <a:cs typeface=""/>
+        <a:font script="Jpan" typeface="ＭＳ Ｐゴシック"/>
+        <a:font script="Hang" typeface="맑은 고딕"/>
+        <a:font script="Hans" typeface="宋体"/>
+        <a:font script="Hant" typeface="新細明體"/>
+        <a:font script="Arab" typeface="Times New Roman"/>
+        <a:font script="Hebr" typeface="Times New Roman"/>
+        <a:font script="Thai" typeface="Angsana New"/>
+        <a:font script="Ethi" typeface="Nyala"/>
+        <a:font script="Beng" typeface="Vrinda"/>
+        <a:font script="Gujr" typeface="Shruti"/>
+        <a:font script="Khmr" typeface="MoolBoran"/>
+        <a:font script="Knda" typeface="Tunga"/>
+        <a:font script="Guru" typeface="Raavi"/>
+        <a:font script="Cans" typeface="Euphemia"/>
+        <a:font script="Cher" typeface="Plantagenet Cherokee"/>
+        <a:font script="Yiii" typeface="Microsoft Yi Baiti"/>
+        <a:font script="Tibt" typeface="Microsoft Himalaya"/>
+        <a:font script="Thaa" typeface="MV Boli"/>
+        <a:font script="Deva" typeface="Mangal"/>
+        <a:font script="Telu" typeface="Gautami"/>
+        <a:font script="Taml" typeface="Latha"/>
+        <a:font script="Syrc" typeface="Estrangelo Edessa"/>
+        <a:font script="Orya" typeface="Kalinga"/>
+        <a:font script="Mlym" typeface="Kartika"/>
+        <a:font script="Laoo" typeface="DokChampa"/>
+        <a:font script="Sinh" typeface="Iskoola Pota"/>
+        <a:font script="Mong" typeface="Mongolian Baiti"/>
+        <a:font script="Viet" typeface="Times New Roman"/>
+        <a:font script="Uigh" typeface="Microsoft Uighur"/>
+        <a:font script="Geor" typeface="Sylfaen"/>
+      </a:majorFont>
+      <a:minorFont>
+        <a:latin typeface="Calibri"/>
+        <a:ea typeface=""/>
+        <a:cs typeface=""/>
+        <a:font script="Jpan" typeface="ＭＳ Ｐゴシック"/>
+        <a:font script="Hang" typeface="맑은 고딕"/>
+        <a:font script="Hans" typeface="宋体"/>
+        <a:font script="Hant" typeface="新細明體"/>
+        <a:font script="Arab" typeface="Arial"/>
+        <a:font script="Hebr" typeface="Arial"/>
+        <a:font script="Thai" typeface="Cordia New"/>
+        <a:font script="Ethi" typeface="Nyala"/>
+        <a:font script="Beng" typeface="Vrinda"/>
+        <a:font script="Gujr" typeface="Shruti"/>
+        <a:font script="Khmr" typeface="DaunPenh"/>
+        <a:font script="Knda" typeface="Tunga"/>
+        <a:font script="Guru" typeface="Raavi"/>
+        <a:font script="Cans" typeface="Euphemia"/>
+        <a:font script="Cher" typeface="Plantagenet Cherokee"/>
+        <a:font script="Yiii" typeface="Microsoft Yi Baiti"/>
+        <a:font script="Tibt" typeface="Microsoft Himalaya"/>
+        <a:font script="Thaa" typeface="MV Boli"/>
+        <a:font script="Deva" typeface="Mangal"/>
+        <a:font script="Telu" typeface="Gautami"/>
+        <a:font script="Taml" typeface="Latha"/>
+        <a:font script="Syrc" typeface="Estrangelo Edessa"/>
+        <a:font script="Orya" typeface="Kalinga"/>
+        <a:font script="Mlym" typeface="Kartika"/>
+        <a:font script="Laoo" typeface="DokChampa"/>
+        <a:font script="Sinh" typeface="Iskoola Pota"/>
+        <a:font script="Mong" typeface="Mongolian Baiti"/>
+        <a:font script="Viet" typeface="Arial"/>
+        <a:font script="Uigh" typeface="Microsoft Uighur"/>
+        <a:font script="Geor" typeface="Sylfaen"/>
+      </a:minorFont>
+    </a:fontScheme>
+    <a:fmtScheme name="Office">
+      <a:fillStyleLst>
+        <a:solidFill>
+          <a:schemeClr val="phClr"/>
+        </a:solidFill>
+        <a:gradFill rotWithShape="1">
+          <a:gsLst>
+            <a:gs pos="0">
+              <a:schemeClr val="phClr">
+                <a:tint val="50000"/>
+                <a:satMod val="300000"/>
+              </a:schemeClr>
+            </a:gs>
+            <a:gs pos="35000">
+              <a:schemeClr val="phClr">
+                <a:tint val="37000"/>
+                <a:satMod val="300000"/>
+              </a:schemeClr>
+            </a:gs>
+            <a:gs pos="100000">
+              <a:schemeClr val="phClr">
+                <a:tint val="15000"/>
+                <a:satMod val="350000"/>
+              </a:schemeClr>
+            </a:gs>
+          </a:gsLst>
+          <a:lin ang="16200000" scaled="1"/>
+        </a:gradFill>
+        <a:gradFill rotWithShape="1">
+          <a:gsLst>
+            <a:gs pos="0">
+              <a:schemeClr val="phClr">
+                <a:tint val="100000"/>
+                <a:shade val="100000"/>
+                <a:satMod val="130000"/>
+              </a:schemeClr>
+            </a:gs>
+            <a:gs pos="100000">
+              <a:schemeClr val="phClr">
+                <a:tint val="50000"/>
+                <a:shade val="100000"/>
+                <a:satMod val="350000"/>
+              </a:schemeClr>
+            </a:gs>
+          </a:gsLst>
+          <a:lin ang="16200000" scaled="0"/>
+        </a:gradFill>
+      </a:fillStyleLst>
+      <a:lnStyleLst>
+        <a:ln w="9525" cap="flat" cmpd="sng" algn="ctr">
+          <a:solidFill>
+            <a:schemeClr val="phClr">
+              <a:shade val="95000"/>
+              <a:satMod val="105000"/>
+            </a:schemeClr>
+          </a:solidFill>
+          <a:prstDash val="solid"/>
+        </a:ln>
+        <a:ln w="25400" cap="flat" cmpd="sng" algn="ctr">
+          <a:solidFill>
+            <a:schemeClr val="phClr"/>
+          </a:solidFill>
+          <a:prstDash val="solid"/>
+        </a:ln>
+        <a:ln w="38100" cap="flat" cmpd="sng" algn="ctr">
+          <a:solidFill>
+            <a:schemeClr val="phClr"/>
+          </a:solidFill>
+          <a:prstDash val="solid"/>
+        </a:ln>
+      </a:lnStyleLst>
+      <a:effectStyleLst>
+        <a:effectStyle>
+          <a:effectLst>
+            <a:outerShdw blurRad="40000" dist="20000" dir="5400000" rotWithShape="0">
+              <a:srgbClr val="000000">
+                <a:alpha val="38000"/>
+              </a:srgbClr>
+            </a:outerShdw>
+          </a:effectLst>
+        </a:effectStyle>
+        <a:effectStyle>
+          <a:effectLst>
+            <a:outerShdw blurRad="40000" dist="23000" dir="5400000" rotWithShape="0">
+              <a:srgbClr val="000000">
+                <a:alpha val="35000"/>
+              </a:srgbClr>
+            </a:outerShdw>
+          </a:effectLst>
+        </a:effectStyle>
+        <a:effectStyle>
+          <a:effectLst>
+            <a:outerShdw blurRad="40000" dist="23000" dir="5400000" rotWithShape="0">
+              <a:srgbClr val="000000">
+                <a:alpha val="35000"/>
+              </a:srgbClr>
+            </a:outerShdw>
+          </a:effectLst>
+          <a:scene3d>
+            <a:camera prst="orthographicFront">
+              <a:rot lat="0" lon="0" rev="0"/>
+            </a:camera>
+            <a:lightRig rig="threePt" dir="t">
+              <a:rot lat="0" lon="0" rev="1200000"/>
+            </a:lightRig>
+          </a:scene3d>
+          <a:sp3d>
+            <a:bevelT w="63500" h="25400"/>
+          </a:sp3d>
+        </a:effectStyle>
+      </a:effectStyleLst>
+      <a:bgFillStyleLst>
+        <a:solidFill>
+          <a:schemeClr val="phClr"/>
+        </a:solidFill>
+        <a:gradFill rotWithShape="1">
+          <a:gsLst>
+            <a:gs pos="0">
+              <a:schemeClr val="phClr">
+                <a:tint val="40000"/>
+                <a:satMod val="350000"/>
+              </a:schemeClr>
+            </a:gs>
+            <a:gs pos="40000">
+              <a:schemeClr val="phClr">
+                <a:tint val="45000"/>
+                <a:shade val="99000"/>
+                <a:satMod val="350000"/>
+              </a:schemeClr>
+            </a:gs>
+            <a:gs pos="100000">
+              <a:schemeClr val="phClr">
+                <a:shade val="20000"/>
+                <a:satMod val="255000"/>
+              </a:schemeClr>
+            </a:gs>
+          </a:gsLst>
+          <a:path path="circle">
+            <a:fillToRect l="50000" t="-80000" r="50000" b="180000"/>
+          </a:path>
+        </a:gradFill>
+        <a:gradFill rotWithShape="1">
+          <a:gsLst>
+            <a:gs pos="0">
+              <a:schemeClr val="phClr">
+                <a:tint val="80000"/>
+                <a:satMod val="300000"/>
+              </a:schemeClr>
+            </a:gs>
+            <a:gs pos="100000">
+              <a:schemeClr val="phClr">
+                <a:shade val="30000"/>
+                <a:satMod val="200000"/>
+              </a:schemeClr>
+            </a:gs>
+          </a:gsLst>
+          <a:path path="circle">
+            <a:fillToRect l="50000" t="50000" r="50000" b="50000"/>
+          </a:path>
+        </a:gradFill>
+      </a:bgFillStyleLst>
+    </a:fmtScheme>
+  </a:themeElements>
+  <a:objectDefaults>
+    <a:spDef>
+      <a:spPr/>
+      <a:bodyPr/>
+      <a:lstStyle/>
+      <a:style>
+        <a:lnRef idx="1">
+          <a:schemeClr val="accent1"/>
+        </a:lnRef>
+        <a:fillRef idx="3">
+          <a:schemeClr val="accent1"/>
+        </a:fillRef>
+        <a:effectRef idx="2">
+          <a:schemeClr val="accent1"/>
+        </a:effectRef>
+        <a:fontRef idx="minor">
+          <a:schemeClr val="lt1"/>
+        </a:fontRef>
+      </a:style>
+    </a:spDef>
+    <a:lnDef>
+      <a:spPr/>
+      <a:bodyPr/>
+      <a:lstStyle/>
+      <a:style>
+        <a:lnRef idx="2">
+          <a:schemeClr val="accent1"/>
+        </a:lnRef>
+        <a:fillRef idx="0">
+          <a:schemeClr val="accent1"/>
+        </a:fillRef>
+        <a:effectRef idx="1">
+          <a:schemeClr val="accent1"/>
+        </a:effectRef>
+        <a:fontRef idx="minor">
+          <a:schemeClr val="tx1"/>
+        </a:fontRef>
+      </a:style>
+    </a:lnDef>
+  </a:objectDefaults>
+  <a:extraClrSchemeLst/>
+</a:theme>
 </file>
--- a/S1-CL3-Cloud-Infrastructure-Improvement/delivery/topic_04/Topic_04_Slides.pptx
+++ b/S1-CL3-Cloud-Infrastructure-Improvement/delivery/topic_04/Topic_04_Slides.pptx
@@ -18,6 +18,15 @@
     <p:sldId id="266" r:id="rId18"/>
     <p:sldId id="267" r:id="rId19"/>
     <p:sldId id="268" r:id="rId20"/>
+    <p:sldId id="269" r:id="rId21"/>
+    <p:sldId id="270" r:id="rId22"/>
+    <p:sldId id="271" r:id="rId23"/>
+    <p:sldId id="272" r:id="rId24"/>
+    <p:sldId id="273" r:id="rId25"/>
+    <p:sldId id="274" r:id="rId26"/>
+    <p:sldId id="275" r:id="rId27"/>
+    <p:sldId id="276" r:id="rId28"/>
+    <p:sldId id="277" r:id="rId29"/>
   </p:sldIdLst>
   <p:sldSz cx="12191695" cy="6858000" type="screen4x3"/>
   <p:notesSz cx="6858000" cy="9144000"/>
@@ -514,77 +523,162 @@
           <a:lstStyle/>
           <a:p>
             <a:r>
-              <a:t>Frame the CLOSE of AT1 — Topics 1–3 produced the design; Topic 4 turns it into one reviewable Solution</a:t>
-            </a:r>
-          </a:p>
-          <a:p>
-            <a:r>
-              <a:t>Design and gets it approved. Two moves: document/present, then obtain sign-off.</a:t>
-            </a:r>
-          </a:p>
-          <a:p>
-            <a:r>
-              <a:t>• First two bullets: Topics 1–3 produced the design; today you assemble it into one reviewable Solution</a:t>
-            </a:r>
-          </a:p>
-          <a:p>
-            <a:r>
-              <a:t>Design and get it approved — document and present, then obtain the sign-off to proceed to deployment.</a:t>
-            </a:r>
-          </a:p>
-          <a:p>
-            <a:r>
-              <a:t>• Third bullet: the cost-benefit reasoning rides INSIDE the Solution Design — there is no separate</a:t>
-            </a:r>
-          </a:p>
-          <a:p>
-            <a:r>
-              <a:t>business case. Say this clearly; students expect a standalone business case.</a:t>
-            </a:r>
-          </a:p>
-          <a:p>
-            <a:r>
-              <a:t>• Fourth bullet (the discipline): design only — this is the AT1 deliverable and its approval gate; the</a:t>
-            </a:r>
-          </a:p>
-          <a:p>
-            <a:r>
-              <a:t>build is AT2/AT3.</a:t>
-            </a:r>
-          </a:p>
-          <a:p>
-            <a:r>
-              <a:t>Misconception to pre-empt: "we write a separate business case for the cost-benefit." No — in this cluster</a:t>
-            </a:r>
-          </a:p>
-          <a:p>
-            <a:r>
-              <a:t>the cost-benefit is a SECTION of the Solution Design; one document carries the design, the rationale and</a:t>
-            </a:r>
-          </a:p>
-          <a:p>
-            <a:r>
-              <a:t>the trade-offs.</a:t>
-            </a:r>
-          </a:p>
-          <a:p>
-            <a:r>
-              <a:t>Question to pose: "Where does the no-Multi-AZ-database argument live in the deliverable?" (inside the</a:t>
-            </a:r>
-          </a:p>
-          <a:p>
-            <a:r>
-              <a:t>Solution Design's cost-benefit section — not a separate document).</a:t>
-            </a:r>
-          </a:p>
-          <a:p>
-            <a:r>
-              <a:t>UoC/AT1 tie: this Topic develops ICTCLD504 PC 2.4 (document &amp; present) and PC 2.5 (obtain sign-off); the</a:t>
-            </a:r>
-          </a:p>
-          <a:p>
-            <a:r>
-              <a:t>output is the assembled AT1 Solution Design + the observed presentation and sign-off record.</a:t>
+              <a:t>Workbook tasks 14 to 18, then the remaining written questions.</a:t>
+            </a:r>
+          </a:p>
+          <a:p>
+            <a:r>
+              <a:t>Students expect a standalone business case — say clearly the cost-benefit is a section of the one document.</a:t>
+            </a:r>
+          </a:p>
+        </p:txBody>
+      </p:sp>
+      <p:sp>
+        <p:nvSpPr>
+          <p:cNvPr id="4" name="Slide Number Placeholder 3"/>
+          <p:cNvSpPr>
+            <a:spLocks noGrp="1"/>
+          </p:cNvSpPr>
+          <p:nvPr>
+            <p:ph type="sldNum" idx="5" sz="quarter"/>
+          </p:nvPr>
+        </p:nvSpPr>
+        <p:spPr/>
+      </p:sp>
+    </p:spTree>
+  </p:cSld>
+  <p:clrMapOvr>
+    <a:masterClrMapping/>
+  </p:clrMapOvr>
+</p:notes>
+</file>
+
+<file path=ppt/notesSlides/notesSlide10.xml><?xml version="1.0" encoding="utf-8"?>
+<p:notes xmlns:a="http://schemas.openxmlformats.org/drawingml/2006/main" xmlns:p="http://schemas.openxmlformats.org/presentationml/2006/main" xmlns:r="http://schemas.openxmlformats.org/officeDocument/2006/relationships">
+  <p:cSld>
+    <p:spTree>
+      <p:nvGrpSpPr>
+        <p:cNvPr id="1" name=""/>
+        <p:cNvGrpSpPr/>
+        <p:nvPr/>
+      </p:nvGrpSpPr>
+      <p:grpSpPr>
+        <a:xfrm>
+          <a:off x="0" y="0"/>
+          <a:ext cx="0" cy="0"/>
+          <a:chOff x="0" y="0"/>
+          <a:chExt cx="0" cy="0"/>
+        </a:xfrm>
+      </p:grpSpPr>
+      <p:sp>
+        <p:nvSpPr>
+          <p:cNvPr id="2" name="Slide Image Placeholder 1"/>
+          <p:cNvSpPr>
+            <a:spLocks noGrp="1"/>
+          </p:cNvSpPr>
+          <p:nvPr>
+            <p:ph type="sldImg" idx="2"/>
+          </p:nvPr>
+        </p:nvSpPr>
+        <p:spPr/>
+      </p:sp>
+      <p:sp>
+        <p:nvSpPr>
+          <p:cNvPr id="3" name="Notes Placeholder 2"/>
+          <p:cNvSpPr>
+            <a:spLocks noGrp="1"/>
+          </p:cNvSpPr>
+          <p:nvPr>
+            <p:ph type="body" idx="3" sz="quarter"/>
+          </p:nvPr>
+        </p:nvSpPr>
+        <p:spPr/>
+        <p:txBody>
+          <a:bodyPr/>
+          <a:lstStyle/>
+          <a:p>
+            <a:r>
+              <a:t>The assessment carries Q1–Q3; Q2 was rehearsed in Topic 2. The practice workbook carries none — rehearse with the assessment's.</a:t>
+            </a:r>
+          </a:p>
+          <a:p>
+            <a:r>
+              <a:t>Push each answer back to their own workbook: the standards their review used, the migration path their options assessment weighed.</a:t>
+            </a:r>
+          </a:p>
+        </p:txBody>
+      </p:sp>
+      <p:sp>
+        <p:nvSpPr>
+          <p:cNvPr id="4" name="Slide Number Placeholder 3"/>
+          <p:cNvSpPr>
+            <a:spLocks noGrp="1"/>
+          </p:cNvSpPr>
+          <p:nvPr>
+            <p:ph type="sldNum" idx="5" sz="quarter"/>
+          </p:nvPr>
+        </p:nvSpPr>
+        <p:spPr/>
+      </p:sp>
+    </p:spTree>
+  </p:cSld>
+  <p:clrMapOvr>
+    <a:masterClrMapping/>
+  </p:clrMapOvr>
+</p:notes>
+</file>
+
+<file path=ppt/notesSlides/notesSlide11.xml><?xml version="1.0" encoding="utf-8"?>
+<p:notes xmlns:a="http://schemas.openxmlformats.org/drawingml/2006/main" xmlns:p="http://schemas.openxmlformats.org/presentationml/2006/main" xmlns:r="http://schemas.openxmlformats.org/officeDocument/2006/relationships">
+  <p:cSld>
+    <p:spTree>
+      <p:nvGrpSpPr>
+        <p:cNvPr id="1" name=""/>
+        <p:cNvGrpSpPr/>
+        <p:nvPr/>
+      </p:nvGrpSpPr>
+      <p:grpSpPr>
+        <a:xfrm>
+          <a:off x="0" y="0"/>
+          <a:ext cx="0" cy="0"/>
+          <a:chOff x="0" y="0"/>
+          <a:chExt cx="0" cy="0"/>
+        </a:xfrm>
+      </p:grpSpPr>
+      <p:sp>
+        <p:nvSpPr>
+          <p:cNvPr id="2" name="Slide Image Placeholder 1"/>
+          <p:cNvSpPr>
+            <a:spLocks noGrp="1"/>
+          </p:cNvSpPr>
+          <p:nvPr>
+            <p:ph type="sldImg" idx="2"/>
+          </p:nvPr>
+        </p:nvSpPr>
+        <p:spPr/>
+      </p:sp>
+      <p:sp>
+        <p:nvSpPr>
+          <p:cNvPr id="3" name="Notes Placeholder 2"/>
+          <p:cNvSpPr>
+            <a:spLocks noGrp="1"/>
+          </p:cNvSpPr>
+          <p:nvPr>
+            <p:ph type="body" idx="3" sz="quarter"/>
+          </p:nvPr>
+        </p:nvSpPr>
+        <p:spPr/>
+        <p:txBody>
+          <a:bodyPr/>
+          <a:lstStyle/>
+          <a:p>
+            <a:r>
+              <a:t>Activity = assessment Q1 + Q3 rehearsed on the practice design.</a:t>
+            </a:r>
+          </a:p>
+          <a:p>
+            <a:r>
+              <a:t>Listen for citations of their own analysis rather than recited definitions.</a:t>
             </a:r>
           </a:p>
         </p:txBody>
@@ -654,72 +748,12 @@
           <a:lstStyle/>
           <a:p>
             <a:r>
-              <a:t>Open Section 1 — what a Solution Design document IS: a professional artefact a reviewer who wasn't in</a:t>
-            </a:r>
-          </a:p>
-          <a:p>
-            <a:r>
-              <a:t>the room can read and decide on. Teach the standard before they assemble theirs.</a:t>
-            </a:r>
-          </a:p>
-          <a:p>
-            <a:r>
-              <a:t>• First bullet: a Solution Design is a professional artefact — the proposed architecture, the rationale,</a:t>
-            </a:r>
-          </a:p>
-          <a:p>
-            <a:r>
-              <a:t>and the trade-offs — complete and readable by a reviewer who wasn't in the room.</a:t>
-            </a:r>
-          </a:p>
-          <a:p>
-            <a:r>
-              <a:t>• Second bullet: it documents the improved architecture with clear DIAGRAMS, decision RATIONALE, and the</a:t>
-            </a:r>
-          </a:p>
-          <a:p>
-            <a:r>
-              <a:t>METRICS behind each call. Three things, not just diagrams.</a:t>
-            </a:r>
-          </a:p>
-          <a:p>
-            <a:r>
-              <a:t>• Third bullet: it's pitched for a REVIEW audience — the required personnel who decide whether to</a:t>
-            </a:r>
-          </a:p>
-          <a:p>
-            <a:r>
-              <a:t>proceed. Write for the decider, not the builder.</a:t>
-            </a:r>
-          </a:p>
-          <a:p>
-            <a:r>
-              <a:t>Misconception to pre-empt: "a diagram is the design." No — the diagram is one part; without the rationale</a:t>
-            </a:r>
-          </a:p>
-          <a:p>
-            <a:r>
-              <a:t>and the metrics a reviewer can't judge WHY, only WHAT. All three are marked.</a:t>
-            </a:r>
-          </a:p>
-          <a:p>
-            <a:r>
-              <a:t>Question to pose: "A reviewer who wasn't in your design sessions opens the document — what must be there</a:t>
-            </a:r>
-          </a:p>
-          <a:p>
-            <a:r>
-              <a:t>for them to approve it?" (architecture + rationale + metrics/trade-offs, readable cold).</a:t>
-            </a:r>
-          </a:p>
-          <a:p>
-            <a:r>
-              <a:t>UoC/AT1 tie: ICTCLD504 PC 2.4 (document &amp; present proposed architecture for review) → the AT1 Solution</a:t>
-            </a:r>
-          </a:p>
-          <a:p>
-            <a:r>
-              <a:t>Design document.</a:t>
+              <a:t>Workbook task 14. Any drawing tool is fine; agreement with the design beats prettiness.</a:t>
+            </a:r>
+          </a:p>
+          <a:p>
+            <a:r>
+              <a:t>The single-instance database should be visibly single-instance — the diagram states the design honestly, rejection included.</a:t>
             </a:r>
           </a:p>
         </p:txBody>
@@ -789,77 +823,12 @@
           <a:lstStyle/>
           <a:p>
             <a:r>
-              <a:t>The assembly slide — bring Topics 1–3 together into one coherent document where every part agrees. This</a:t>
-            </a:r>
-          </a:p>
-          <a:p>
-            <a:r>
-              <a:t>is where scattered design work becomes a single deliverable.</a:t>
-            </a:r>
-          </a:p>
-          <a:p>
-            <a:r>
-              <a:t>• First bullet: bring together the baseline analysis (Topic 1) and the four design concerns —</a:t>
-            </a:r>
-          </a:p>
-          <a:p>
-            <a:r>
-              <a:t>reliability and scalability (Topics 2–3) — into ONE document.</a:t>
-            </a:r>
-          </a:p>
-          <a:p>
-            <a:r>
-              <a:t>• Second bullet: each proposed change traces back to a named requirement or gap; the diagrams, tables and</a:t>
-            </a:r>
-          </a:p>
-          <a:p>
-            <a:r>
-              <a:t>prose AGREE. Consistency is a marked quality.</a:t>
-            </a:r>
-          </a:p>
-          <a:p>
-            <a:r>
-              <a:t>• Third bullet: fold in the cost-benefit reasoning — what each change costs and the improvement it buys</a:t>
-            </a:r>
-          </a:p>
-          <a:p>
-            <a:r>
-              <a:t>(including the no-Multi-AZ-database call).</a:t>
-            </a:r>
-          </a:p>
-          <a:p>
-            <a:r>
-              <a:t>Misconception to pre-empt: "assemble = staple the topic outputs together." No — assembly means making</a:t>
-            </a:r>
-          </a:p>
-          <a:p>
-            <a:r>
-              <a:t>them agree and traceable; contradictions between the diagram and the prose are exactly what a reviewer</a:t>
-            </a:r>
-          </a:p>
-          <a:p>
-            <a:r>
-              <a:t>catches.</a:t>
-            </a:r>
-          </a:p>
-          <a:p>
-            <a:r>
-              <a:t>Question to pose: "Your reliability diagram shows a single-AZ DB but your prose says 'highly available</a:t>
-            </a:r>
-          </a:p>
-          <a:p>
-            <a:r>
-              <a:t>database' — what's wrong, and which is right?" (they must agree; the design is single-AZ DB by the</a:t>
-            </a:r>
-          </a:p>
-          <a:p>
-            <a:r>
-              <a:t>cost-benefit call).</a:t>
-            </a:r>
-          </a:p>
-          <a:p>
-            <a:r>
-              <a:t>UoC/AT1 tie: ICTCLD504 PC 2.4 → the assembled AT1 Solution Design document.</a:t>
+              <a:t>Activity = practice workbook task 14.</a:t>
+            </a:r>
+          </a:p>
+          <a:p>
+            <a:r>
+              <a:t>Pair-swap works: if a partner can't read a box's job, it needs a better label.</a:t>
             </a:r>
           </a:p>
         </p:txBody>
@@ -929,77 +898,7 @@
           <a:lstStyle/>
           <a:p>
             <a:r>
-              <a:t>Teach the PRESENTATION — walking a reviewer through the design and defending the key call. Note this is</a:t>
-            </a:r>
-          </a:p>
-          <a:p>
-            <a:r>
-              <a:t>an observed individual oral (AT1 Part B), so the skill is spoken, not written.</a:t>
-            </a:r>
-          </a:p>
-          <a:p>
-            <a:r>
-              <a:t>• First bullet: present the proposed architecture to the required personnel — walk the DECISIONS that</a:t>
-            </a:r>
-          </a:p>
-          <a:p>
-            <a:r>
-              <a:t>matter, not every line. Curate for the audience.</a:t>
-            </a:r>
-          </a:p>
-          <a:p>
-            <a:r>
-              <a:t>• Second bullet: be ready to DEFEND the reliability cost-benefit call — why the database stays single-AZ</a:t>
-            </a:r>
-          </a:p>
-          <a:p>
-            <a:r>
-              <a:t>rather than Multi-AZ. This is the question a reviewer will press.</a:t>
-            </a:r>
-          </a:p>
-          <a:p>
-            <a:r>
-              <a:t>• Third bullet: seek feedback and respond — accept, adjust, or defend with reasons. This is an observed</a:t>
-            </a:r>
-          </a:p>
-          <a:p>
-            <a:r>
-              <a:t>individual oral in AT1 Part B; responding well is assessed.</a:t>
-            </a:r>
-          </a:p>
-          <a:p>
-            <a:r>
-              <a:t>Misconception to pre-empt: "presenting = reading every slide." No — you walk the decisions that matter</a:t>
-            </a:r>
-          </a:p>
-          <a:p>
-            <a:r>
-              <a:t>and can defend them under questioning; reading the document aloud isn't presenting it.</a:t>
-            </a:r>
-          </a:p>
-          <a:p>
-            <a:r>
-              <a:t>Question to pose: "A reviewer says 'a real accounting system should have a Multi-AZ database' — what's</a:t>
-            </a:r>
-          </a:p>
-          <a:p>
-            <a:r>
-              <a:t>your response?" (defend the cost-benefit: vendor single-instance, product-replacement cost</a:t>
-            </a:r>
-          </a:p>
-          <a:p>
-            <a:r>
-              <a:t>disproportionate to the goal).</a:t>
-            </a:r>
-          </a:p>
-          <a:p>
-            <a:r>
-              <a:t>UoC/AT1 tie: ICTCLD504 PC 2.4 (present for review to required personnel) → AT1 Part B observed</a:t>
-            </a:r>
-          </a:p>
-          <a:p>
-            <a:r>
-              <a:t>presentation.</a:t>
+              <a:t>Without rationale and metrics a reviewer can judge what, but not why — and why is what gets approved.</a:t>
             </a:r>
           </a:p>
         </p:txBody>
@@ -1069,82 +968,12 @@
           <a:lstStyle/>
           <a:p>
             <a:r>
-              <a:t>Facilitation — the Section 1 practice; students present their assembled practice Solution Design to a</a:t>
-            </a:r>
-          </a:p>
-          <a:p>
-            <a:r>
-              <a:t>mock review panel — a live rehearsal of the AT1 Part B oral.</a:t>
-            </a:r>
-          </a:p>
-          <a:p>
-            <a:r>
-              <a:t>Tell students: "For the practice engagement — the website vehicle — present your assembled Solution</a:t>
-            </a:r>
-          </a:p>
-          <a:p>
-            <a:r>
-              <a:t>Design to a mock review panel. Walk the key decisions, defend your cost-benefit trade-offs, and seek and</a:t>
-            </a:r>
-          </a:p>
-          <a:p>
-            <a:r>
-              <a:t>respond to feedback."</a:t>
-            </a:r>
-          </a:p>
-          <a:p>
-            <a:r>
-              <a:t>Run it (put on the board):</a:t>
-            </a:r>
-          </a:p>
-          <a:p>
-            <a:r>
-              <a:t>1. Pair or small-group: one presents, the others are the review panel.</a:t>
-            </a:r>
-          </a:p>
-          <a:p>
-            <a:r>
-              <a:t>2. Presenter walks the decisions that matter (not every line) and defends at least one cost-benefit</a:t>
-            </a:r>
-          </a:p>
-          <a:p>
-            <a:r>
-              <a:t>trade-off.</a:t>
-            </a:r>
-          </a:p>
-          <a:p>
-            <a:r>
-              <a:t>3. Panel gives feedback; presenter responds — accept, adjust, or defend with reasons. Then swap.</a:t>
-            </a:r>
-          </a:p>
-          <a:p>
-            <a:r>
-              <a:t>Must produce: each student has presented once and fielded at least one challenge on a trade-off.</a:t>
-            </a:r>
-          </a:p>
-          <a:p>
-            <a:r>
-              <a:t>Timing: ~25 min. Where they get stuck: they read the document instead of presenting, and they crumble on</a:t>
-            </a:r>
-          </a:p>
-          <a:p>
-            <a:r>
-              <a:t>the first challenge instead of defending with the cost-benefit reasoning — coach both.</a:t>
-            </a:r>
-          </a:p>
-          <a:p>
-            <a:r>
-              <a:t>Share-back prompt: ask a panel which defence they found most convincing, and why.</a:t>
-            </a:r>
-          </a:p>
-          <a:p>
-            <a:r>
-              <a:t>No-leakage note: the website is the practice vehicle; AT1 assesses the presentation on Ledgerline —</a:t>
-            </a:r>
-          </a:p>
-          <a:p>
-            <a:r>
-              <a:t>comparable, not identical.</a:t>
+              <a:t>Workbook task 15. Assembly means making the parts agree, not stapling them together.</a:t>
+            </a:r>
+          </a:p>
+          <a:p>
+            <a:r>
+              <a:t>The classic catch: a diagram showing one thing and prose claiming another — have them self-check for it.</a:t>
             </a:r>
           </a:p>
         </p:txBody>
@@ -1214,67 +1043,12 @@
           <a:lstStyle/>
           <a:p>
             <a:r>
-              <a:t>Open Section 2 — the deploy sign-off, the formal authorisation that gates the build. Teach it as a real</a:t>
-            </a:r>
-          </a:p>
-          <a:p>
-            <a:r>
-              <a:t>gate with a record, not a formality.</a:t>
-            </a:r>
-          </a:p>
-          <a:p>
-            <a:r>
-              <a:t>• First bullet: obtain sign-off to proceed to deployment from the required personnel — the formal</a:t>
-            </a:r>
-          </a:p>
-          <a:p>
-            <a:r>
-              <a:t>AUTHORISATION to build.</a:t>
-            </a:r>
-          </a:p>
-          <a:p>
-            <a:r>
-              <a:t>• Second bullet: sign-off is the GATE — no AT2/AT3 work starts until the design is approved. It has</a:t>
-            </a:r>
-          </a:p>
-          <a:p>
-            <a:r>
-              <a:t>consequences.</a:t>
-            </a:r>
-          </a:p>
-          <a:p>
-            <a:r>
-              <a:t>• Third bullet: RECORD it — who approved, on what, when — as part of the Solution Design. An unrecorded</a:t>
-            </a:r>
-          </a:p>
-          <a:p>
-            <a:r>
-              <a:t>approval is no approval.</a:t>
-            </a:r>
-          </a:p>
-          <a:p>
-            <a:r>
-              <a:t>Misconception to pre-empt: "sign-off is just a signature at the end." No — it's the authorisation that</a:t>
-            </a:r>
-          </a:p>
-          <a:p>
-            <a:r>
-              <a:t>lets the build begin, and it must be recorded (who/what/when) to be evidence.</a:t>
-            </a:r>
-          </a:p>
-          <a:p>
-            <a:r>
-              <a:t>Question to pose: "What can't happen until this sign-off is obtained and recorded?" (the AT2/AT3 build —</a:t>
-            </a:r>
-          </a:p>
-          <a:p>
-            <a:r>
-              <a:t>sign-off gates deployment).</a:t>
-            </a:r>
-          </a:p>
-          <a:p>
-            <a:r>
-              <a:t>UoC/AT1 tie: ICTCLD504 PC 2.5 (obtain sign-off to proceed to deployment) → the AT1 sign-off record.</a:t>
+              <a:t>Activity = practice workbook task 15.</a:t>
+            </a:r>
+          </a:p>
+          <a:p>
+            <a:r>
+              <a:t>Press traceability: any change picked at random leads back to a requirement, or it doesn't belong.</a:t>
             </a:r>
           </a:p>
         </p:txBody>
@@ -1344,72 +1118,162 @@
           <a:lstStyle/>
           <a:p>
             <a:r>
-              <a:t>Distinguish the cluster's TWO approval moments so students don't conflate them — a common exam error.</a:t>
-            </a:r>
-          </a:p>
-          <a:p>
-            <a:r>
-              <a:t>This slide exists purely to separate them cleanly.</a:t>
-            </a:r>
-          </a:p>
-          <a:p>
-            <a:r>
-              <a:t>• First bullet: THIS is the cluster's first approval — sign-off to proceed to deployment, on the DESIGN.</a:t>
-            </a:r>
-          </a:p>
-          <a:p>
-            <a:r>
-              <a:t>It authorises work that hasn't happened yet.</a:t>
-            </a:r>
-          </a:p>
-          <a:p>
-            <a:r>
-              <a:t>• Second bullet: the SECOND is the final sign-off at AT3 — on the deployed and tested improvement. It</a:t>
-            </a:r>
-          </a:p>
-          <a:p>
-            <a:r>
-              <a:t>accepts work that has happened.</a:t>
-            </a:r>
-          </a:p>
-          <a:p>
-            <a:r>
-              <a:t>• Third bullet: this gate authorises the build; the AT3 gate accepts the result. Different moment,</a:t>
-            </a:r>
-          </a:p>
-          <a:p>
-            <a:r>
-              <a:t>different object, different question.</a:t>
-            </a:r>
-          </a:p>
-          <a:p>
-            <a:r>
-              <a:t>Misconception to pre-empt: "sign-off is sign-off." No — the AT1 sign-off approves a PLAN to build; the</a:t>
-            </a:r>
-          </a:p>
-          <a:p>
-            <a:r>
-              <a:t>AT3 sign-off accepts a BUILT-and-tested result. Confusing them muddles what each is evidence of.</a:t>
-            </a:r>
-          </a:p>
-          <a:p>
-            <a:r>
-              <a:t>Question to pose: "The AT1 sign-off and the AT3 sign-off — what does each one approve?" (AT1: proceed to</a:t>
-            </a:r>
-          </a:p>
-          <a:p>
-            <a:r>
-              <a:t>deploy, on the design; AT3: accept the deployed &amp; tested improvement).</a:t>
-            </a:r>
-          </a:p>
-          <a:p>
-            <a:r>
-              <a:t>UoC/AT1 tie: ICTCLD504 PC 2.5 (obtain sign-off to proceed) — the first of the cluster's two approval</a:t>
-            </a:r>
-          </a:p>
-          <a:p>
-            <a:r>
-              <a:t>moments; the second is evidenced at AT3.</a:t>
+              <a:t>Workbook task 16 — the preparation is its own task, and the one-point-per-part discipline stops a page-turn.</a:t>
+            </a:r>
+          </a:p>
+          <a:p>
+            <a:r>
+              <a:t>The cost-benefit rejection is the challenge to expect; the C2 argument is the prepared answer.</a:t>
+            </a:r>
+          </a:p>
+        </p:txBody>
+      </p:sp>
+      <p:sp>
+        <p:nvSpPr>
+          <p:cNvPr id="4" name="Slide Number Placeholder 3"/>
+          <p:cNvSpPr>
+            <a:spLocks noGrp="1"/>
+          </p:cNvSpPr>
+          <p:nvPr>
+            <p:ph type="sldNum" idx="5" sz="quarter"/>
+          </p:nvPr>
+        </p:nvSpPr>
+        <p:spPr/>
+      </p:sp>
+    </p:spTree>
+  </p:cSld>
+  <p:clrMapOvr>
+    <a:masterClrMapping/>
+  </p:clrMapOvr>
+</p:notes>
+</file>
+
+<file path=ppt/notesSlides/notesSlide8.xml><?xml version="1.0" encoding="utf-8"?>
+<p:notes xmlns:a="http://schemas.openxmlformats.org/drawingml/2006/main" xmlns:p="http://schemas.openxmlformats.org/presentationml/2006/main" xmlns:r="http://schemas.openxmlformats.org/officeDocument/2006/relationships">
+  <p:cSld>
+    <p:spTree>
+      <p:nvGrpSpPr>
+        <p:cNvPr id="1" name=""/>
+        <p:cNvGrpSpPr/>
+        <p:nvPr/>
+      </p:nvGrpSpPr>
+      <p:grpSpPr>
+        <a:xfrm>
+          <a:off x="0" y="0"/>
+          <a:ext cx="0" cy="0"/>
+          <a:chOff x="0" y="0"/>
+          <a:chExt cx="0" cy="0"/>
+        </a:xfrm>
+      </p:grpSpPr>
+      <p:sp>
+        <p:nvSpPr>
+          <p:cNvPr id="2" name="Slide Image Placeholder 1"/>
+          <p:cNvSpPr>
+            <a:spLocks noGrp="1"/>
+          </p:cNvSpPr>
+          <p:nvPr>
+            <p:ph type="sldImg" idx="2"/>
+          </p:nvPr>
+        </p:nvSpPr>
+        <p:spPr/>
+      </p:sp>
+      <p:sp>
+        <p:nvSpPr>
+          <p:cNvPr id="3" name="Notes Placeholder 2"/>
+          <p:cNvSpPr>
+            <a:spLocks noGrp="1"/>
+          </p:cNvSpPr>
+          <p:nvPr>
+            <p:ph type="body" idx="3" sz="quarter"/>
+          </p:nvPr>
+        </p:nvSpPr>
+        <p:spPr/>
+        <p:txBody>
+          <a:bodyPr/>
+          <a:lstStyle/>
+          <a:p>
+            <a:r>
+              <a:t>Workbook tasks 17 and 18. The presentation is observed; responding to challenge is assessed, not just surviving it.</a:t>
+            </a:r>
+          </a:p>
+          <a:p>
+            <a:r>
+              <a:t>The two-approvals distinction matters — this one approves a plan; the final one accepts a result.</a:t>
+            </a:r>
+          </a:p>
+        </p:txBody>
+      </p:sp>
+      <p:sp>
+        <p:nvSpPr>
+          <p:cNvPr id="4" name="Slide Number Placeholder 3"/>
+          <p:cNvSpPr>
+            <a:spLocks noGrp="1"/>
+          </p:cNvSpPr>
+          <p:nvPr>
+            <p:ph type="sldNum" idx="5" sz="quarter"/>
+          </p:nvPr>
+        </p:nvSpPr>
+        <p:spPr/>
+      </p:sp>
+    </p:spTree>
+  </p:cSld>
+  <p:clrMapOvr>
+    <a:masterClrMapping/>
+  </p:clrMapOvr>
+</p:notes>
+</file>
+
+<file path=ppt/notesSlides/notesSlide9.xml><?xml version="1.0" encoding="utf-8"?>
+<p:notes xmlns:a="http://schemas.openxmlformats.org/drawingml/2006/main" xmlns:p="http://schemas.openxmlformats.org/presentationml/2006/main" xmlns:r="http://schemas.openxmlformats.org/officeDocument/2006/relationships">
+  <p:cSld>
+    <p:spTree>
+      <p:nvGrpSpPr>
+        <p:cNvPr id="1" name=""/>
+        <p:cNvGrpSpPr/>
+        <p:nvPr/>
+      </p:nvGrpSpPr>
+      <p:grpSpPr>
+        <a:xfrm>
+          <a:off x="0" y="0"/>
+          <a:ext cx="0" cy="0"/>
+          <a:chOff x="0" y="0"/>
+          <a:chExt cx="0" cy="0"/>
+        </a:xfrm>
+      </p:grpSpPr>
+      <p:sp>
+        <p:nvSpPr>
+          <p:cNvPr id="2" name="Slide Image Placeholder 1"/>
+          <p:cNvSpPr>
+            <a:spLocks noGrp="1"/>
+          </p:cNvSpPr>
+          <p:nvPr>
+            <p:ph type="sldImg" idx="2"/>
+          </p:nvPr>
+        </p:nvSpPr>
+        <p:spPr/>
+      </p:sp>
+      <p:sp>
+        <p:nvSpPr>
+          <p:cNvPr id="3" name="Notes Placeholder 2"/>
+          <p:cNvSpPr>
+            <a:spLocks noGrp="1"/>
+          </p:cNvSpPr>
+          <p:nvPr>
+            <p:ph type="body" idx="3" sz="quarter"/>
+          </p:nvPr>
+        </p:nvSpPr>
+        <p:spPr/>
+        <p:txBody>
+          <a:bodyPr/>
+          <a:lstStyle/>
+          <a:p>
+            <a:r>
+              <a:t>Activity = practice workbook tasks 16–18, in pairs or small groups, roles swapped.</a:t>
+            </a:r>
+          </a:p>
+          <a:p>
+            <a:r>
+              <a:t>The panel challenges at least one trade-off; the presenter answers from their own document.</a:t>
             </a:r>
           </a:p>
         </p:txBody>
@@ -4512,7 +4376,7 @@
                 </a:solidFill>
                 <a:latin typeface="Roboto"/>
               </a:rPr>
-              <a:t>Documenting and presenting the Solution Design</a:t>
+              <a:t>Drawing, documenting and presenting the design</a:t>
             </a:r>
           </a:p>
           <a:p>
@@ -4528,7 +4392,7 @@
                 </a:solidFill>
                 <a:latin typeface="Roboto Light"/>
               </a:rPr>
-              <a:t>Assemble the whole Solution Design, present it for review, and obtain sign-off to proceed</a:t>
+              <a:t>Draw the improved architecture, document and justify it, present it, and get sign-off to build</a:t>
             </a:r>
           </a:p>
         </p:txBody>
@@ -4631,7 +4495,7 @@
                 </a:solidFill>
                 <a:latin typeface="Roboto"/>
               </a:rPr>
-              <a:t>The deploy sign-off — the approval gate</a:t>
+              <a:t>Document and justify</a:t>
             </a:r>
           </a:p>
         </p:txBody>
@@ -4729,7 +4593,7 @@
                 </a:solidFill>
                 <a:latin typeface="Roboto"/>
               </a:rPr>
-              <a:t>Obtain sign-off to proceed to deployment from the required personnel — the formal authorisation to build.</a:t>
+              <a:t>Bring the analysis, the designs and the drawing into one document where the diagrams, tables and prose agree.</a:t>
             </a:r>
           </a:p>
           <a:p>
@@ -4760,7 +4624,7 @@
                 </a:solidFill>
                 <a:latin typeface="Roboto"/>
               </a:rPr>
-              <a:t>Sign-off is the gate: no AT2/AT3 work starts until the design is approved.</a:t>
+              <a:t>Each proposed change traces to a named requirement or gap; each rejection carries its argument.</a:t>
             </a:r>
           </a:p>
           <a:p>
@@ -4791,7 +4655,7 @@
                 </a:solidFill>
                 <a:latin typeface="Roboto"/>
               </a:rPr>
-              <a:t>Record it — who approved, on what, when — as part of the Solution Design.</a:t>
+              <a:t>Internal consistency is a marked quality — contradictions between diagram and prose are what reviewers catch.</a:t>
             </a:r>
           </a:p>
         </p:txBody>
@@ -4946,48 +4810,14 @@
       <p:grpSpPr/>
       <p:sp>
         <p:nvSpPr>
-          <p:cNvPr id="2" name="TextBox 1"/>
-          <p:cNvSpPr txBox="1"/>
-          <p:nvPr/>
-        </p:nvSpPr>
-        <p:spPr>
-          <a:xfrm>
-            <a:off x="640080" y="457200"/>
-            <a:ext cx="10881360" cy="960120"/>
-          </a:xfrm>
-          <a:prstGeom prst="rect">
-            <a:avLst/>
-          </a:prstGeom>
-          <a:noFill/>
-        </p:spPr>
-        <p:txBody>
-          <a:bodyPr wrap="square" anchor="t" lIns="0" rIns="0" tIns="0" bIns="0">
-            <a:spAutoFit/>
-          </a:bodyPr>
-          <a:lstStyle/>
-          <a:p>
-            <a:r>
-              <a:rPr sz="2800" b="1" i="0">
-                <a:solidFill>
-                  <a:srgbClr val="2A2929"/>
-                </a:solidFill>
-                <a:latin typeface="Roboto"/>
-              </a:rPr>
-              <a:t>Two approval moments — don't confuse them</a:t>
-            </a:r>
-          </a:p>
-        </p:txBody>
-      </p:sp>
-      <p:sp>
-        <p:nvSpPr>
-          <p:cNvPr id="3" name="Rectangle 2"/>
+          <p:cNvPr id="2" name="Rectangle 1"/>
           <p:cNvSpPr/>
           <p:nvPr/>
         </p:nvSpPr>
         <p:spPr>
           <a:xfrm>
-            <a:off x="658368" y="1371600"/>
-            <a:ext cx="1463040" cy="50800"/>
+            <a:off x="0" y="0"/>
+            <a:ext cx="12191695" cy="1234440"/>
           </a:xfrm>
           <a:prstGeom prst="rect">
             <a:avLst/>
@@ -5024,14 +4854,67 @@
       </p:sp>
       <p:sp>
         <p:nvSpPr>
+          <p:cNvPr id="3" name="Rounded Rectangle 2"/>
+          <p:cNvSpPr/>
+          <p:nvPr/>
+        </p:nvSpPr>
+        <p:spPr>
+          <a:xfrm>
+            <a:off x="640080" y="384048"/>
+            <a:ext cx="1691640" cy="457200"/>
+          </a:xfrm>
+          <a:prstGeom prst="roundRect">
+            <a:avLst/>
+          </a:prstGeom>
+          <a:solidFill>
+            <a:srgbClr val="2A2929"/>
+          </a:solidFill>
+          <a:ln>
+            <a:noFill/>
+          </a:ln>
+          <a:effectLst/>
+        </p:spPr>
+        <p:style>
+          <a:lnRef idx="1">
+            <a:schemeClr val="accent1"/>
+          </a:lnRef>
+          <a:fillRef idx="3">
+            <a:schemeClr val="accent1"/>
+          </a:fillRef>
+          <a:effectRef idx="2">
+            <a:schemeClr val="accent1"/>
+          </a:effectRef>
+          <a:fontRef idx="minor">
+            <a:schemeClr val="lt1"/>
+          </a:fontRef>
+        </p:style>
+        <p:txBody>
+          <a:bodyPr rtlCol="0" anchor="ctr"/>
+          <a:lstStyle/>
+          <a:p>
+            <a:pPr algn="ctr"/>
+            <a:r>
+              <a:rPr sz="1400" b="1" i="0">
+                <a:solidFill>
+                  <a:srgbClr val="FBB900"/>
+                </a:solidFill>
+                <a:latin typeface="Roboto"/>
+              </a:rPr>
+              <a:t>ACTIVITY</a:t>
+            </a:r>
+          </a:p>
+        </p:txBody>
+      </p:sp>
+      <p:sp>
+        <p:nvSpPr>
           <p:cNvPr id="4" name="TextBox 3"/>
           <p:cNvSpPr txBox="1"/>
           <p:nvPr/>
         </p:nvSpPr>
         <p:spPr>
           <a:xfrm>
-            <a:off x="658368" y="1691640"/>
-            <a:ext cx="10881360" cy="4480560"/>
+            <a:off x="2560320" y="310896"/>
+            <a:ext cx="8961120" cy="685800"/>
           </a:xfrm>
           <a:prstGeom prst="rect">
             <a:avLst/>
@@ -5040,6 +4923,40 @@
         </p:spPr>
         <p:txBody>
           <a:bodyPr wrap="square" anchor="ctr" lIns="0" rIns="0" tIns="0" bIns="0">
+            <a:spAutoFit/>
+          </a:bodyPr>
+          <a:lstStyle/>
+          <a:p>
+            <a:r>
+              <a:rPr sz="2600" b="1" i="0">
+                <a:solidFill>
+                  <a:srgbClr val="FFFFFF"/>
+                </a:solidFill>
+                <a:latin typeface="Roboto"/>
+              </a:rPr>
+              <a:t>Document the proposal</a:t>
+            </a:r>
+          </a:p>
+        </p:txBody>
+      </p:sp>
+      <p:sp>
+        <p:nvSpPr>
+          <p:cNvPr id="5" name="TextBox 4"/>
+          <p:cNvSpPr txBox="1"/>
+          <p:nvPr/>
+        </p:nvSpPr>
+        <p:spPr>
+          <a:xfrm>
+            <a:off x="658368" y="1554480"/>
+            <a:ext cx="10881360" cy="4297680"/>
+          </a:xfrm>
+          <a:prstGeom prst="rect">
+            <a:avLst/>
+          </a:prstGeom>
+          <a:noFill/>
+        </p:spPr>
+        <p:txBody>
+          <a:bodyPr wrap="square" anchor="t" lIns="0" rIns="0" tIns="0" bIns="0">
             <a:spAutoFit/>
           </a:bodyPr>
           <a:lstStyle/>
@@ -5056,7 +4973,7 @@
               </a:spcAft>
             </a:pPr>
             <a:r>
-              <a:rPr sz="2400" b="1" i="0">
+              <a:rPr sz="1700" b="1" i="0">
                 <a:solidFill>
                   <a:srgbClr val="EDAB0C"/>
                 </a:solidFill>
@@ -5065,13 +4982,13 @@
               <a:t>■  </a:t>
             </a:r>
             <a:r>
-              <a:rPr sz="2400" b="0" i="0">
+              <a:rPr sz="1700" b="0" i="0">
                 <a:solidFill>
                   <a:srgbClr val="2A2929"/>
                 </a:solidFill>
                 <a:latin typeface="Roboto"/>
               </a:rPr>
-              <a:t>This is the cluster's first approval: sign-off to proceed to deployment, on the design.</a:t>
+              <a:t>Workbook — task 15.</a:t>
             </a:r>
           </a:p>
           <a:p>
@@ -5087,7 +5004,7 @@
               </a:spcAft>
             </a:pPr>
             <a:r>
-              <a:rPr sz="2400" b="1" i="0">
+              <a:rPr sz="1700" b="1" i="0">
                 <a:solidFill>
                   <a:srgbClr val="EDAB0C"/>
                 </a:solidFill>
@@ -5096,51 +5013,100 @@
               <a:t>■  </a:t>
             </a:r>
             <a:r>
-              <a:rPr sz="2400" b="0" i="0">
+              <a:rPr sz="1700" b="0" i="0">
                 <a:solidFill>
                   <a:srgbClr val="2A2929"/>
                 </a:solidFill>
                 <a:latin typeface="Roboto"/>
               </a:rPr>
-              <a:t>The second is the final sign-off at AT3, on the deployed and tested improvement.</a:t>
-            </a:r>
-          </a:p>
-          <a:p>
-            <a:pPr marL="0" indent="0">
-              <a:lnSpc>
-                <a:spcPct val="105000"/>
-              </a:lnSpc>
-              <a:spcBef>
-                <a:spcPts val="0"/>
-              </a:spcBef>
-              <a:spcAft>
-                <a:spcPts val="1000"/>
-              </a:spcAft>
-            </a:pPr>
-            <a:r>
-              <a:rPr sz="2400" b="1" i="0">
-                <a:solidFill>
-                  <a:srgbClr val="EDAB0C"/>
-                </a:solidFill>
-                <a:latin typeface="Roboto"/>
-              </a:rPr>
-              <a:t>■  </a:t>
-            </a:r>
-            <a:r>
-              <a:rPr sz="2400" b="0" i="0">
+              <a:t>Document and justify the proposed architecture for the practice engagement, to the proposal structure.</a:t>
+            </a:r>
+          </a:p>
+        </p:txBody>
+      </p:sp>
+      <p:sp>
+        <p:nvSpPr>
+          <p:cNvPr id="6" name="Rounded Rectangle 5"/>
+          <p:cNvSpPr/>
+          <p:nvPr/>
+        </p:nvSpPr>
+        <p:spPr>
+          <a:xfrm>
+            <a:off x="640080" y="5897880"/>
+            <a:ext cx="4023360" cy="457200"/>
+          </a:xfrm>
+          <a:prstGeom prst="roundRect">
+            <a:avLst/>
+          </a:prstGeom>
+          <a:solidFill>
+            <a:srgbClr val="F9F9F9"/>
+          </a:solidFill>
+          <a:ln w="12700">
+            <a:solidFill>
+              <a:srgbClr val="CCCCCC"/>
+            </a:solidFill>
+          </a:ln>
+          <a:effectLst/>
+        </p:spPr>
+        <p:style>
+          <a:lnRef idx="1">
+            <a:schemeClr val="accent1"/>
+          </a:lnRef>
+          <a:fillRef idx="3">
+            <a:schemeClr val="accent1"/>
+          </a:fillRef>
+          <a:effectRef idx="2">
+            <a:schemeClr val="accent1"/>
+          </a:effectRef>
+          <a:fontRef idx="minor">
+            <a:schemeClr val="lt1"/>
+          </a:fontRef>
+        </p:style>
+        <p:txBody>
+          <a:bodyPr rtlCol="0" anchor="ctr"/>
+          <a:lstStyle/>
+          <a:p>
+            <a:pPr algn="ctr"/>
+          </a:p>
+        </p:txBody>
+      </p:sp>
+      <p:sp>
+        <p:nvSpPr>
+          <p:cNvPr id="7" name="TextBox 6"/>
+          <p:cNvSpPr txBox="1"/>
+          <p:nvPr/>
+        </p:nvSpPr>
+        <p:spPr>
+          <a:xfrm>
+            <a:off x="822960" y="5943600"/>
+            <a:ext cx="3657600" cy="365760"/>
+          </a:xfrm>
+          <a:prstGeom prst="rect">
+            <a:avLst/>
+          </a:prstGeom>
+          <a:noFill/>
+        </p:spPr>
+        <p:txBody>
+          <a:bodyPr wrap="square" anchor="ctr" lIns="0" rIns="0" tIns="0" bIns="0">
+            <a:spAutoFit/>
+          </a:bodyPr>
+          <a:lstStyle/>
+          <a:p>
+            <a:r>
+              <a:rPr sz="1500" b="1" i="0">
                 <a:solidFill>
                   <a:srgbClr val="2A2929"/>
                 </a:solidFill>
                 <a:latin typeface="Roboto"/>
               </a:rPr>
-              <a:t>This gate authorises the build; the AT3 gate accepts the result.</a:t>
-            </a:r>
-          </a:p>
-        </p:txBody>
-      </p:sp>
-      <p:sp>
-        <p:nvSpPr>
-          <p:cNvPr id="5" name="Rectangle 4"/>
+              <a:t>⏱  ~35 min</a:t>
+            </a:r>
+          </a:p>
+        </p:txBody>
+      </p:sp>
+      <p:sp>
+        <p:nvSpPr>
+          <p:cNvPr id="8" name="Rectangle 7"/>
           <p:cNvSpPr/>
           <p:nvPr/>
         </p:nvSpPr>
@@ -5184,7 +5150,7 @@
       </p:sp>
       <p:sp>
         <p:nvSpPr>
-          <p:cNvPr id="6" name="TextBox 5"/>
+          <p:cNvPr id="9" name="TextBox 8"/>
           <p:cNvSpPr txBox="1"/>
           <p:nvPr/>
         </p:nvSpPr>
@@ -5227,7 +5193,7 @@
       </p:sp>
       <p:sp>
         <p:nvSpPr>
-          <p:cNvPr id="7" name="TextBox 6"/>
+          <p:cNvPr id="10" name="TextBox 9"/>
           <p:cNvSpPr txBox="1"/>
           <p:nvPr/>
         </p:nvSpPr>
@@ -5331,7 +5297,7 @@
                 </a:solidFill>
                 <a:latin typeface="Roboto"/>
               </a:rPr>
-              <a:t>Topic 4 · Key takeaways</a:t>
+              <a:t>Section 2 · The document</a:t>
             </a:r>
           </a:p>
         </p:txBody>
@@ -5504,7 +5470,7 @@
                 </a:solidFill>
                 <a:latin typeface="Roboto"/>
               </a:rPr>
-              <a:t>Assemble the baseline analysis and the four design concerns into one reviewable Solution Design.</a:t>
+              <a:t>Architecture, rationale, metrics — readable cold.</a:t>
             </a:r>
           </a:p>
         </p:txBody>
@@ -5633,7 +5599,7 @@
                 </a:solidFill>
                 <a:latin typeface="Roboto"/>
               </a:rPr>
-              <a:t>The cost-benefit rides inside the document — no separate business case; be ready to defend the no-Multi-AZ call.</a:t>
+              <a:t>Every change traces; every rejection argues.</a:t>
             </a:r>
           </a:p>
         </p:txBody>
@@ -5646,54 +5612,8 @@
         </p:nvSpPr>
         <p:spPr>
           <a:xfrm>
-            <a:off x="640080" y="3867912"/>
-            <a:ext cx="10927080" cy="841248"/>
-          </a:xfrm>
-          <a:prstGeom prst="rect">
-            <a:avLst/>
-          </a:prstGeom>
-          <a:solidFill>
-            <a:srgbClr val="FFFFFF"/>
-          </a:solidFill>
-          <a:ln w="12700">
-            <a:solidFill>
-              <a:srgbClr val="CCCCCC"/>
-            </a:solidFill>
-          </a:ln>
-          <a:effectLst/>
-        </p:spPr>
-        <p:style>
-          <a:lnRef idx="1">
-            <a:schemeClr val="accent1"/>
-          </a:lnRef>
-          <a:fillRef idx="3">
-            <a:schemeClr val="accent1"/>
-          </a:fillRef>
-          <a:effectRef idx="2">
-            <a:schemeClr val="accent1"/>
-          </a:effectRef>
-          <a:fontRef idx="minor">
-            <a:schemeClr val="lt1"/>
-          </a:fontRef>
-        </p:style>
-        <p:txBody>
-          <a:bodyPr rtlCol="0" anchor="ctr"/>
-          <a:lstStyle/>
-          <a:p>
-            <a:pPr algn="ctr"/>
-          </a:p>
-        </p:txBody>
-      </p:sp>
-      <p:sp>
-        <p:nvSpPr>
-          <p:cNvPr id="11" name="Rectangle 10"/>
-          <p:cNvSpPr/>
-          <p:nvPr/>
-        </p:nvSpPr>
-        <p:spPr>
-          <a:xfrm>
-            <a:off x="640080" y="3867912"/>
-            <a:ext cx="109728" cy="841248"/>
+            <a:off x="0" y="6565392"/>
+            <a:ext cx="12191695" cy="38100"/>
           </a:xfrm>
           <a:prstGeom prst="rect">
             <a:avLst/>
@@ -5730,219 +5650,7 @@
       </p:sp>
       <p:sp>
         <p:nvSpPr>
-          <p:cNvPr id="12" name="TextBox 11"/>
-          <p:cNvSpPr txBox="1"/>
-          <p:nvPr/>
-        </p:nvSpPr>
-        <p:spPr>
-          <a:xfrm>
-            <a:off x="960120" y="3867912"/>
-            <a:ext cx="10424160" cy="841248"/>
-          </a:xfrm>
-          <a:prstGeom prst="rect">
-            <a:avLst/>
-          </a:prstGeom>
-          <a:noFill/>
-        </p:spPr>
-        <p:txBody>
-          <a:bodyPr wrap="square" anchor="ctr" lIns="0" rIns="0" tIns="0" bIns="0">
-            <a:spAutoFit/>
-          </a:bodyPr>
-          <a:lstStyle/>
-          <a:p>
-            <a:pPr>
-              <a:lnSpc>
-                <a:spcPct val="100000"/>
-              </a:lnSpc>
-            </a:pPr>
-            <a:r>
-              <a:rPr sz="1700" b="0" i="0">
-                <a:solidFill>
-                  <a:srgbClr val="2A2929"/>
-                </a:solidFill>
-                <a:latin typeface="Roboto"/>
-              </a:rPr>
-              <a:t>Present the proposed architecture to the required personnel and respond to feedback.</a:t>
-            </a:r>
-          </a:p>
-        </p:txBody>
-      </p:sp>
-      <p:sp>
-        <p:nvSpPr>
-          <p:cNvPr id="13" name="Rectangle 12"/>
-          <p:cNvSpPr/>
-          <p:nvPr/>
-        </p:nvSpPr>
-        <p:spPr>
-          <a:xfrm>
-            <a:off x="640080" y="4818888"/>
-            <a:ext cx="10927080" cy="841248"/>
-          </a:xfrm>
-          <a:prstGeom prst="rect">
-            <a:avLst/>
-          </a:prstGeom>
-          <a:solidFill>
-            <a:srgbClr val="FFFFFF"/>
-          </a:solidFill>
-          <a:ln w="12700">
-            <a:solidFill>
-              <a:srgbClr val="CCCCCC"/>
-            </a:solidFill>
-          </a:ln>
-          <a:effectLst/>
-        </p:spPr>
-        <p:style>
-          <a:lnRef idx="1">
-            <a:schemeClr val="accent1"/>
-          </a:lnRef>
-          <a:fillRef idx="3">
-            <a:schemeClr val="accent1"/>
-          </a:fillRef>
-          <a:effectRef idx="2">
-            <a:schemeClr val="accent1"/>
-          </a:effectRef>
-          <a:fontRef idx="minor">
-            <a:schemeClr val="lt1"/>
-          </a:fontRef>
-        </p:style>
-        <p:txBody>
-          <a:bodyPr rtlCol="0" anchor="ctr"/>
-          <a:lstStyle/>
-          <a:p>
-            <a:pPr algn="ctr"/>
-          </a:p>
-        </p:txBody>
-      </p:sp>
-      <p:sp>
-        <p:nvSpPr>
-          <p:cNvPr id="14" name="Rectangle 13"/>
-          <p:cNvSpPr/>
-          <p:nvPr/>
-        </p:nvSpPr>
-        <p:spPr>
-          <a:xfrm>
-            <a:off x="640080" y="4818888"/>
-            <a:ext cx="109728" cy="841248"/>
-          </a:xfrm>
-          <a:prstGeom prst="rect">
-            <a:avLst/>
-          </a:prstGeom>
-          <a:solidFill>
-            <a:srgbClr val="27B5CE"/>
-          </a:solidFill>
-          <a:ln>
-            <a:noFill/>
-          </a:ln>
-          <a:effectLst/>
-        </p:spPr>
-        <p:style>
-          <a:lnRef idx="1">
-            <a:schemeClr val="accent1"/>
-          </a:lnRef>
-          <a:fillRef idx="3">
-            <a:schemeClr val="accent1"/>
-          </a:fillRef>
-          <a:effectRef idx="2">
-            <a:schemeClr val="accent1"/>
-          </a:effectRef>
-          <a:fontRef idx="minor">
-            <a:schemeClr val="lt1"/>
-          </a:fontRef>
-        </p:style>
-        <p:txBody>
-          <a:bodyPr rtlCol="0" anchor="ctr"/>
-          <a:lstStyle/>
-          <a:p>
-            <a:pPr algn="ctr"/>
-          </a:p>
-        </p:txBody>
-      </p:sp>
-      <p:sp>
-        <p:nvSpPr>
-          <p:cNvPr id="15" name="TextBox 14"/>
-          <p:cNvSpPr txBox="1"/>
-          <p:nvPr/>
-        </p:nvSpPr>
-        <p:spPr>
-          <a:xfrm>
-            <a:off x="960120" y="4818888"/>
-            <a:ext cx="10424160" cy="841248"/>
-          </a:xfrm>
-          <a:prstGeom prst="rect">
-            <a:avLst/>
-          </a:prstGeom>
-          <a:noFill/>
-        </p:spPr>
-        <p:txBody>
-          <a:bodyPr wrap="square" anchor="ctr" lIns="0" rIns="0" tIns="0" bIns="0">
-            <a:spAutoFit/>
-          </a:bodyPr>
-          <a:lstStyle/>
-          <a:p>
-            <a:pPr>
-              <a:lnSpc>
-                <a:spcPct val="100000"/>
-              </a:lnSpc>
-            </a:pPr>
-            <a:r>
-              <a:rPr sz="1700" b="0" i="0">
-                <a:solidFill>
-                  <a:srgbClr val="2A2929"/>
-                </a:solidFill>
-                <a:latin typeface="Roboto"/>
-              </a:rPr>
-              <a:t>Obtain and record the sign-off to proceed — the deploy gate, distinct from the AT3 final sign-off.</a:t>
-            </a:r>
-          </a:p>
-        </p:txBody>
-      </p:sp>
-      <p:sp>
-        <p:nvSpPr>
-          <p:cNvPr id="16" name="Rectangle 15"/>
-          <p:cNvSpPr/>
-          <p:nvPr/>
-        </p:nvSpPr>
-        <p:spPr>
-          <a:xfrm>
-            <a:off x="0" y="6565392"/>
-            <a:ext cx="12191695" cy="38100"/>
-          </a:xfrm>
-          <a:prstGeom prst="rect">
-            <a:avLst/>
-          </a:prstGeom>
-          <a:solidFill>
-            <a:srgbClr val="27B5CE"/>
-          </a:solidFill>
-          <a:ln>
-            <a:noFill/>
-          </a:ln>
-          <a:effectLst/>
-        </p:spPr>
-        <p:style>
-          <a:lnRef idx="1">
-            <a:schemeClr val="accent1"/>
-          </a:lnRef>
-          <a:fillRef idx="3">
-            <a:schemeClr val="accent1"/>
-          </a:fillRef>
-          <a:effectRef idx="2">
-            <a:schemeClr val="accent1"/>
-          </a:effectRef>
-          <a:fontRef idx="minor">
-            <a:schemeClr val="lt1"/>
-          </a:fontRef>
-        </p:style>
-        <p:txBody>
-          <a:bodyPr rtlCol="0" anchor="ctr"/>
-          <a:lstStyle/>
-          <a:p>
-            <a:pPr algn="ctr"/>
-          </a:p>
-        </p:txBody>
-      </p:sp>
-      <p:sp>
-        <p:nvSpPr>
-          <p:cNvPr id="17" name="TextBox 16"/>
+          <p:cNvPr id="11" name="TextBox 10"/>
           <p:cNvSpPr txBox="1"/>
           <p:nvPr/>
         </p:nvSpPr>
@@ -5985,7 +5693,7 @@
       </p:sp>
       <p:sp>
         <p:nvSpPr>
-          <p:cNvPr id="18" name="TextBox 17"/>
+          <p:cNvPr id="12" name="TextBox 11"/>
           <p:cNvSpPr txBox="1"/>
           <p:nvPr/>
         </p:nvSpPr>
@@ -6032,7 +5740,7 @@
     <p:bg>
       <p:bgPr>
         <a:solidFill>
-          <a:srgbClr val="2A2929"/>
+          <a:srgbClr val="FFFFFF"/>
         </a:solidFill>
         <a:effectLst/>
       </p:bgPr>
@@ -6053,13 +5761,13 @@
         <p:spPr>
           <a:xfrm>
             <a:off x="0" y="0"/>
-            <a:ext cx="411480" cy="6858000"/>
+            <a:ext cx="3931920" cy="6858000"/>
           </a:xfrm>
           <a:prstGeom prst="rect">
             <a:avLst/>
           </a:prstGeom>
           <a:solidFill>
-            <a:srgbClr val="EDAB0C"/>
+            <a:srgbClr val="205F61"/>
           </a:solidFill>
           <a:ln>
             <a:noFill/>
@@ -6096,8 +5804,8 @@
         </p:nvSpPr>
         <p:spPr>
           <a:xfrm>
-            <a:off x="914400" y="1463040"/>
-            <a:ext cx="10515600" cy="4023360"/>
+            <a:off x="365760" y="2103120"/>
+            <a:ext cx="3291840" cy="2194560"/>
           </a:xfrm>
           <a:prstGeom prst="rect">
             <a:avLst/>
@@ -6111,51 +5819,2592 @@
           <a:lstStyle/>
           <a:p>
             <a:r>
-              <a:rPr sz="4000" b="1" i="0">
+              <a:rPr sz="13000" b="1" i="0">
                 <a:solidFill>
                   <a:srgbClr val="FFFFFF"/>
                 </a:solidFill>
                 <a:latin typeface="Roboto"/>
               </a:rPr>
-              <a:t>Next: Topic 5 — leading the AT2 build</a:t>
+              <a:t>03</a:t>
+            </a:r>
+          </a:p>
+        </p:txBody>
+      </p:sp>
+      <p:sp>
+        <p:nvSpPr>
+          <p:cNvPr id="4" name="TextBox 3"/>
+          <p:cNvSpPr txBox="1"/>
+          <p:nvPr/>
+        </p:nvSpPr>
+        <p:spPr>
+          <a:xfrm>
+            <a:off x="4480560" y="2468880"/>
+            <a:ext cx="7132320" cy="2194560"/>
+          </a:xfrm>
+          <a:prstGeom prst="rect">
+            <a:avLst/>
+          </a:prstGeom>
+          <a:noFill/>
+        </p:spPr>
+        <p:txBody>
+          <a:bodyPr wrap="square" anchor="t" lIns="0" rIns="0" tIns="0" bIns="0">
+            <a:spAutoFit/>
+          </a:bodyPr>
+          <a:lstStyle/>
+          <a:p>
+            <a:r>
+              <a:rPr sz="1600" b="1" i="0">
+                <a:solidFill>
+                  <a:srgbClr val="205F61"/>
+                </a:solidFill>
+                <a:latin typeface="Roboto"/>
+              </a:rPr>
+              <a:t>SECTION</a:t>
             </a:r>
           </a:p>
           <a:p>
             <a:pPr>
+              <a:spcBef>
+                <a:spcPts val="600"/>
+              </a:spcBef>
+            </a:pPr>
+            <a:r>
+              <a:rPr sz="3800" b="1" i="0">
+                <a:solidFill>
+                  <a:srgbClr val="2A2929"/>
+                </a:solidFill>
+                <a:latin typeface="Roboto"/>
+              </a:rPr>
+              <a:t>Present it, and get the sign-off</a:t>
+            </a:r>
+          </a:p>
+          <a:p>
+            <a:pPr>
+              <a:spcBef>
+                <a:spcPts val="1000"/>
+              </a:spcBef>
+            </a:pPr>
+            <a:r>
+              <a:rPr sz="2000" b="0" i="1">
+                <a:solidFill>
+                  <a:srgbClr val="484848"/>
+                </a:solidFill>
+                <a:latin typeface="Roboto Light"/>
+              </a:rPr>
+              <a:t>walk the decisions, record the approval</a:t>
+            </a:r>
+          </a:p>
+        </p:txBody>
+      </p:sp>
+      <p:sp>
+        <p:nvSpPr>
+          <p:cNvPr id="5" name="Rectangle 4"/>
+          <p:cNvSpPr/>
+          <p:nvPr/>
+        </p:nvSpPr>
+        <p:spPr>
+          <a:xfrm>
+            <a:off x="0" y="6565392"/>
+            <a:ext cx="12191695" cy="38100"/>
+          </a:xfrm>
+          <a:prstGeom prst="rect">
+            <a:avLst/>
+          </a:prstGeom>
+          <a:solidFill>
+            <a:srgbClr val="205F61"/>
+          </a:solidFill>
+          <a:ln>
+            <a:noFill/>
+          </a:ln>
+          <a:effectLst/>
+        </p:spPr>
+        <p:style>
+          <a:lnRef idx="1">
+            <a:schemeClr val="accent1"/>
+          </a:lnRef>
+          <a:fillRef idx="3">
+            <a:schemeClr val="accent1"/>
+          </a:fillRef>
+          <a:effectRef idx="2">
+            <a:schemeClr val="accent1"/>
+          </a:effectRef>
+          <a:fontRef idx="minor">
+            <a:schemeClr val="lt1"/>
+          </a:fontRef>
+        </p:style>
+        <p:txBody>
+          <a:bodyPr rtlCol="0" anchor="ctr"/>
+          <a:lstStyle/>
+          <a:p>
+            <a:pPr algn="ctr"/>
+          </a:p>
+        </p:txBody>
+      </p:sp>
+      <p:sp>
+        <p:nvSpPr>
+          <p:cNvPr id="6" name="TextBox 5"/>
+          <p:cNvSpPr txBox="1"/>
+          <p:nvPr/>
+        </p:nvSpPr>
+        <p:spPr>
+          <a:xfrm>
+            <a:off x="502920" y="6400800"/>
+            <a:ext cx="5486400" cy="320040"/>
+          </a:xfrm>
+          <a:prstGeom prst="rect">
+            <a:avLst/>
+          </a:prstGeom>
+          <a:noFill/>
+        </p:spPr>
+        <p:txBody>
+          <a:bodyPr wrap="square" anchor="t" lIns="0" rIns="0" tIns="0" bIns="0">
+            <a:spAutoFit/>
+          </a:bodyPr>
+          <a:lstStyle/>
+          <a:p>
+            <a:r>
+              <a:rPr sz="1100" b="1" i="0">
+                <a:solidFill>
+                  <a:srgbClr val="2A2929"/>
+                </a:solidFill>
+                <a:latin typeface="Roboto"/>
+              </a:rPr>
+              <a:t>Kangan </a:t>
+            </a:r>
+            <a:r>
+              <a:rPr sz="1100" b="1" i="0">
+                <a:solidFill>
+                  <a:srgbClr val="D68E10"/>
+                </a:solidFill>
+                <a:latin typeface="Roboto"/>
+              </a:rPr>
+              <a:t>Institute</a:t>
+            </a:r>
+          </a:p>
+        </p:txBody>
+      </p:sp>
+      <p:sp>
+        <p:nvSpPr>
+          <p:cNvPr id="7" name="TextBox 6"/>
+          <p:cNvSpPr txBox="1"/>
+          <p:nvPr/>
+        </p:nvSpPr>
+        <p:spPr>
+          <a:xfrm>
+            <a:off x="10515600" y="6400800"/>
+            <a:ext cx="1188720" cy="320040"/>
+          </a:xfrm>
+          <a:prstGeom prst="rect">
+            <a:avLst/>
+          </a:prstGeom>
+          <a:noFill/>
+        </p:spPr>
+        <p:txBody>
+          <a:bodyPr wrap="square" anchor="t" lIns="0" rIns="0" tIns="0" bIns="0">
+            <a:spAutoFit/>
+          </a:bodyPr>
+          <a:lstStyle/>
+          <a:p>
+            <a:pPr algn="r"/>
+            <a:r>
+              <a:rPr sz="1100" b="0" i="0">
+                <a:solidFill>
+                  <a:srgbClr val="7A7A7A"/>
+                </a:solidFill>
+                <a:latin typeface="Roboto"/>
+              </a:rPr>
+              <a:t/>
+            </a:r>
+          </a:p>
+        </p:txBody>
+      </p:sp>
+    </p:spTree>
+  </p:cSld>
+  <p:clrMapOvr>
+    <a:masterClrMapping/>
+  </p:clrMapOvr>
+</p:sld>
+</file>
+
+<file path=ppt/slides/slide14.xml><?xml version="1.0" encoding="utf-8"?>
+<p:sld xmlns:a="http://schemas.openxmlformats.org/drawingml/2006/main" xmlns:p="http://schemas.openxmlformats.org/presentationml/2006/main" xmlns:r="http://schemas.openxmlformats.org/officeDocument/2006/relationships">
+  <p:cSld>
+    <p:bg>
+      <p:bgPr>
+        <a:solidFill>
+          <a:srgbClr val="FFFFFF"/>
+        </a:solidFill>
+        <a:effectLst/>
+      </p:bgPr>
+    </p:bg>
+    <p:spTree>
+      <p:nvGrpSpPr>
+        <p:cNvPr id="1" name=""/>
+        <p:cNvGrpSpPr/>
+        <p:nvPr/>
+      </p:nvGrpSpPr>
+      <p:grpSpPr/>
+      <p:sp>
+        <p:nvSpPr>
+          <p:cNvPr id="2" name="TextBox 1"/>
+          <p:cNvSpPr txBox="1"/>
+          <p:nvPr/>
+        </p:nvSpPr>
+        <p:spPr>
+          <a:xfrm>
+            <a:off x="640080" y="457200"/>
+            <a:ext cx="10881360" cy="960120"/>
+          </a:xfrm>
+          <a:prstGeom prst="rect">
+            <a:avLst/>
+          </a:prstGeom>
+          <a:noFill/>
+        </p:spPr>
+        <p:txBody>
+          <a:bodyPr wrap="square" anchor="t" lIns="0" rIns="0" tIns="0" bIns="0">
+            <a:spAutoFit/>
+          </a:bodyPr>
+          <a:lstStyle/>
+          <a:p>
+            <a:r>
+              <a:rPr sz="2800" b="1" i="0">
+                <a:solidFill>
+                  <a:srgbClr val="2A2929"/>
+                </a:solidFill>
+                <a:latin typeface="Roboto"/>
+              </a:rPr>
+              <a:t>Prepare the presentation</a:t>
+            </a:r>
+          </a:p>
+        </p:txBody>
+      </p:sp>
+      <p:sp>
+        <p:nvSpPr>
+          <p:cNvPr id="3" name="Rectangle 2"/>
+          <p:cNvSpPr/>
+          <p:nvPr/>
+        </p:nvSpPr>
+        <p:spPr>
+          <a:xfrm>
+            <a:off x="658368" y="1371600"/>
+            <a:ext cx="1463040" cy="50800"/>
+          </a:xfrm>
+          <a:prstGeom prst="rect">
+            <a:avLst/>
+          </a:prstGeom>
+          <a:solidFill>
+            <a:srgbClr val="205F61"/>
+          </a:solidFill>
+          <a:ln>
+            <a:noFill/>
+          </a:ln>
+          <a:effectLst/>
+        </p:spPr>
+        <p:style>
+          <a:lnRef idx="1">
+            <a:schemeClr val="accent1"/>
+          </a:lnRef>
+          <a:fillRef idx="3">
+            <a:schemeClr val="accent1"/>
+          </a:fillRef>
+          <a:effectRef idx="2">
+            <a:schemeClr val="accent1"/>
+          </a:effectRef>
+          <a:fontRef idx="minor">
+            <a:schemeClr val="lt1"/>
+          </a:fontRef>
+        </p:style>
+        <p:txBody>
+          <a:bodyPr rtlCol="0" anchor="ctr"/>
+          <a:lstStyle/>
+          <a:p>
+            <a:pPr algn="ctr"/>
+          </a:p>
+        </p:txBody>
+      </p:sp>
+      <p:sp>
+        <p:nvSpPr>
+          <p:cNvPr id="4" name="TextBox 3"/>
+          <p:cNvSpPr txBox="1"/>
+          <p:nvPr/>
+        </p:nvSpPr>
+        <p:spPr>
+          <a:xfrm>
+            <a:off x="658368" y="1691640"/>
+            <a:ext cx="10881360" cy="4480560"/>
+          </a:xfrm>
+          <a:prstGeom prst="rect">
+            <a:avLst/>
+          </a:prstGeom>
+          <a:noFill/>
+        </p:spPr>
+        <p:txBody>
+          <a:bodyPr wrap="square" anchor="ctr" lIns="0" rIns="0" tIns="0" bIns="0">
+            <a:spAutoFit/>
+          </a:bodyPr>
+          <a:lstStyle/>
+          <a:p>
+            <a:pPr marL="0" indent="0">
               <a:lnSpc>
                 <a:spcPct val="105000"/>
               </a:lnSpc>
               <a:spcBef>
-                <a:spcPts val="1200"/>
+                <a:spcPts val="0"/>
               </a:spcBef>
+              <a:spcAft>
+                <a:spcPts val="1000"/>
+              </a:spcAft>
             </a:pPr>
             <a:r>
-              <a:rPr sz="1900" b="0" i="0">
-                <a:solidFill>
-                  <a:srgbClr val="E8E8E8"/>
-                </a:solidFill>
-                <a:latin typeface="Roboto Light"/>
-              </a:rPr>
-              <a:t>AT1 is closed out: designed, documented, presented, signed off to proceed.</a:t>
-            </a:r>
-          </a:p>
-          <a:p>
-            <a:pPr>
+              <a:rPr sz="2400" b="1" i="0">
+                <a:solidFill>
+                  <a:srgbClr val="EDAB0C"/>
+                </a:solidFill>
+                <a:latin typeface="Roboto"/>
+              </a:rPr>
+              <a:t>■  </a:t>
+            </a:r>
+            <a:r>
+              <a:rPr sz="2400" b="0" i="0">
+                <a:solidFill>
+                  <a:srgbClr val="2A2929"/>
+                </a:solidFill>
+                <a:latin typeface="Roboto"/>
+              </a:rPr>
+              <a:t>Plan the order you take the reviewer through the proposal, and for each part the one point they must take away.</a:t>
+            </a:r>
+          </a:p>
+          <a:p>
+            <a:pPr marL="0" indent="0">
               <a:lnSpc>
                 <a:spcPct val="105000"/>
               </a:lnSpc>
               <a:spcBef>
-                <a:spcPts val="1200"/>
+                <a:spcPts val="0"/>
+              </a:spcBef>
+              <a:spcAft>
+                <a:spcPts val="1000"/>
+              </a:spcAft>
+            </a:pPr>
+            <a:r>
+              <a:rPr sz="2400" b="1" i="0">
+                <a:solidFill>
+                  <a:srgbClr val="EDAB0C"/>
+                </a:solidFill>
+                <a:latin typeface="Roboto"/>
+              </a:rPr>
+              <a:t>■  </a:t>
+            </a:r>
+            <a:r>
+              <a:rPr sz="2400" b="0" i="0">
+                <a:solidFill>
+                  <a:srgbClr val="2A2929"/>
+                </a:solidFill>
+                <a:latin typeface="Roboto"/>
+              </a:rPr>
+              <a:t>Anticipate the questions: the choices someone could challenge are the ones to prepare — your justifications already hold the answers.</a:t>
+            </a:r>
+          </a:p>
+          <a:p>
+            <a:pPr marL="0" indent="0">
+              <a:lnSpc>
+                <a:spcPct val="105000"/>
+              </a:lnSpc>
+              <a:spcBef>
+                <a:spcPts val="0"/>
+              </a:spcBef>
+              <a:spcAft>
+                <a:spcPts val="1000"/>
+              </a:spcAft>
+            </a:pPr>
+            <a:r>
+              <a:rPr sz="2400" b="1" i="0">
+                <a:solidFill>
+                  <a:srgbClr val="EDAB0C"/>
+                </a:solidFill>
+                <a:latin typeface="Roboto"/>
+              </a:rPr>
+              <a:t>■  </a:t>
+            </a:r>
+            <a:r>
+              <a:rPr sz="2400" b="0" i="0">
+                <a:solidFill>
+                  <a:srgbClr val="2A2929"/>
+                </a:solidFill>
+                <a:latin typeface="Roboto"/>
+              </a:rPr>
+              <a:t>Time it to the slot; running out of time is the most common way this goes wrong.</a:t>
+            </a:r>
+          </a:p>
+        </p:txBody>
+      </p:sp>
+      <p:sp>
+        <p:nvSpPr>
+          <p:cNvPr id="5" name="Rectangle 4"/>
+          <p:cNvSpPr/>
+          <p:nvPr/>
+        </p:nvSpPr>
+        <p:spPr>
+          <a:xfrm>
+            <a:off x="0" y="6565392"/>
+            <a:ext cx="12191695" cy="38100"/>
+          </a:xfrm>
+          <a:prstGeom prst="rect">
+            <a:avLst/>
+          </a:prstGeom>
+          <a:solidFill>
+            <a:srgbClr val="205F61"/>
+          </a:solidFill>
+          <a:ln>
+            <a:noFill/>
+          </a:ln>
+          <a:effectLst/>
+        </p:spPr>
+        <p:style>
+          <a:lnRef idx="1">
+            <a:schemeClr val="accent1"/>
+          </a:lnRef>
+          <a:fillRef idx="3">
+            <a:schemeClr val="accent1"/>
+          </a:fillRef>
+          <a:effectRef idx="2">
+            <a:schemeClr val="accent1"/>
+          </a:effectRef>
+          <a:fontRef idx="minor">
+            <a:schemeClr val="lt1"/>
+          </a:fontRef>
+        </p:style>
+        <p:txBody>
+          <a:bodyPr rtlCol="0" anchor="ctr"/>
+          <a:lstStyle/>
+          <a:p>
+            <a:pPr algn="ctr"/>
+          </a:p>
+        </p:txBody>
+      </p:sp>
+      <p:sp>
+        <p:nvSpPr>
+          <p:cNvPr id="6" name="TextBox 5"/>
+          <p:cNvSpPr txBox="1"/>
+          <p:nvPr/>
+        </p:nvSpPr>
+        <p:spPr>
+          <a:xfrm>
+            <a:off x="502920" y="6400800"/>
+            <a:ext cx="5486400" cy="320040"/>
+          </a:xfrm>
+          <a:prstGeom prst="rect">
+            <a:avLst/>
+          </a:prstGeom>
+          <a:noFill/>
+        </p:spPr>
+        <p:txBody>
+          <a:bodyPr wrap="square" anchor="t" lIns="0" rIns="0" tIns="0" bIns="0">
+            <a:spAutoFit/>
+          </a:bodyPr>
+          <a:lstStyle/>
+          <a:p>
+            <a:r>
+              <a:rPr sz="1100" b="1" i="0">
+                <a:solidFill>
+                  <a:srgbClr val="2A2929"/>
+                </a:solidFill>
+                <a:latin typeface="Roboto"/>
+              </a:rPr>
+              <a:t>Kangan </a:t>
+            </a:r>
+            <a:r>
+              <a:rPr sz="1100" b="1" i="0">
+                <a:solidFill>
+                  <a:srgbClr val="D68E10"/>
+                </a:solidFill>
+                <a:latin typeface="Roboto"/>
+              </a:rPr>
+              <a:t>Institute</a:t>
+            </a:r>
+          </a:p>
+        </p:txBody>
+      </p:sp>
+      <p:sp>
+        <p:nvSpPr>
+          <p:cNvPr id="7" name="TextBox 6"/>
+          <p:cNvSpPr txBox="1"/>
+          <p:nvPr/>
+        </p:nvSpPr>
+        <p:spPr>
+          <a:xfrm>
+            <a:off x="10515600" y="6400800"/>
+            <a:ext cx="1188720" cy="320040"/>
+          </a:xfrm>
+          <a:prstGeom prst="rect">
+            <a:avLst/>
+          </a:prstGeom>
+          <a:noFill/>
+        </p:spPr>
+        <p:txBody>
+          <a:bodyPr wrap="square" anchor="t" lIns="0" rIns="0" tIns="0" bIns="0">
+            <a:spAutoFit/>
+          </a:bodyPr>
+          <a:lstStyle/>
+          <a:p>
+            <a:pPr algn="r"/>
+            <a:r>
+              <a:rPr sz="1100" b="0" i="0">
+                <a:solidFill>
+                  <a:srgbClr val="7A7A7A"/>
+                </a:solidFill>
+                <a:latin typeface="Roboto"/>
+              </a:rPr>
+              <a:t>10</a:t>
+            </a:r>
+          </a:p>
+        </p:txBody>
+      </p:sp>
+    </p:spTree>
+  </p:cSld>
+  <p:clrMapOvr>
+    <a:masterClrMapping/>
+  </p:clrMapOvr>
+</p:sld>
+</file>
+
+<file path=ppt/slides/slide15.xml><?xml version="1.0" encoding="utf-8"?>
+<p:sld xmlns:a="http://schemas.openxmlformats.org/drawingml/2006/main" xmlns:p="http://schemas.openxmlformats.org/presentationml/2006/main" xmlns:r="http://schemas.openxmlformats.org/officeDocument/2006/relationships">
+  <p:cSld>
+    <p:bg>
+      <p:bgPr>
+        <a:solidFill>
+          <a:srgbClr val="FFFFFF"/>
+        </a:solidFill>
+        <a:effectLst/>
+      </p:bgPr>
+    </p:bg>
+    <p:spTree>
+      <p:nvGrpSpPr>
+        <p:cNvPr id="1" name=""/>
+        <p:cNvGrpSpPr/>
+        <p:nvPr/>
+      </p:nvGrpSpPr>
+      <p:grpSpPr/>
+      <p:sp>
+        <p:nvSpPr>
+          <p:cNvPr id="2" name="TextBox 1"/>
+          <p:cNvSpPr txBox="1"/>
+          <p:nvPr/>
+        </p:nvSpPr>
+        <p:spPr>
+          <a:xfrm>
+            <a:off x="640080" y="457200"/>
+            <a:ext cx="10881360" cy="960120"/>
+          </a:xfrm>
+          <a:prstGeom prst="rect">
+            <a:avLst/>
+          </a:prstGeom>
+          <a:noFill/>
+        </p:spPr>
+        <p:txBody>
+          <a:bodyPr wrap="square" anchor="t" lIns="0" rIns="0" tIns="0" bIns="0">
+            <a:spAutoFit/>
+          </a:bodyPr>
+          <a:lstStyle/>
+          <a:p>
+            <a:r>
+              <a:rPr sz="2800" b="1" i="0">
+                <a:solidFill>
+                  <a:srgbClr val="2A2929"/>
+                </a:solidFill>
+                <a:latin typeface="Roboto"/>
+              </a:rPr>
+              <a:t>Present for review, then ask for the decision</a:t>
+            </a:r>
+          </a:p>
+        </p:txBody>
+      </p:sp>
+      <p:sp>
+        <p:nvSpPr>
+          <p:cNvPr id="3" name="Rectangle 2"/>
+          <p:cNvSpPr/>
+          <p:nvPr/>
+        </p:nvSpPr>
+        <p:spPr>
+          <a:xfrm>
+            <a:off x="658368" y="1371600"/>
+            <a:ext cx="1463040" cy="50800"/>
+          </a:xfrm>
+          <a:prstGeom prst="rect">
+            <a:avLst/>
+          </a:prstGeom>
+          <a:solidFill>
+            <a:srgbClr val="205F61"/>
+          </a:solidFill>
+          <a:ln>
+            <a:noFill/>
+          </a:ln>
+          <a:effectLst/>
+        </p:spPr>
+        <p:style>
+          <a:lnRef idx="1">
+            <a:schemeClr val="accent1"/>
+          </a:lnRef>
+          <a:fillRef idx="3">
+            <a:schemeClr val="accent1"/>
+          </a:fillRef>
+          <a:effectRef idx="2">
+            <a:schemeClr val="accent1"/>
+          </a:effectRef>
+          <a:fontRef idx="minor">
+            <a:schemeClr val="lt1"/>
+          </a:fontRef>
+        </p:style>
+        <p:txBody>
+          <a:bodyPr rtlCol="0" anchor="ctr"/>
+          <a:lstStyle/>
+          <a:p>
+            <a:pPr algn="ctr"/>
+          </a:p>
+        </p:txBody>
+      </p:sp>
+      <p:sp>
+        <p:nvSpPr>
+          <p:cNvPr id="4" name="TextBox 3"/>
+          <p:cNvSpPr txBox="1"/>
+          <p:nvPr/>
+        </p:nvSpPr>
+        <p:spPr>
+          <a:xfrm>
+            <a:off x="658368" y="1691640"/>
+            <a:ext cx="10881360" cy="4480560"/>
+          </a:xfrm>
+          <a:prstGeom prst="rect">
+            <a:avLst/>
+          </a:prstGeom>
+          <a:noFill/>
+        </p:spPr>
+        <p:txBody>
+          <a:bodyPr wrap="square" anchor="ctr" lIns="0" rIns="0" tIns="0" bIns="0">
+            <a:spAutoFit/>
+          </a:bodyPr>
+          <a:lstStyle/>
+          <a:p>
+            <a:pPr marL="0" indent="0">
+              <a:lnSpc>
+                <a:spcPct val="105000"/>
+              </a:lnSpc>
+              <a:spcBef>
+                <a:spcPts val="0"/>
+              </a:spcBef>
+              <a:spcAft>
+                <a:spcPts val="1000"/>
+              </a:spcAft>
+            </a:pPr>
+            <a:r>
+              <a:rPr sz="2400" b="1" i="0">
+                <a:solidFill>
+                  <a:srgbClr val="EDAB0C"/>
+                </a:solidFill>
+                <a:latin typeface="Roboto"/>
+              </a:rPr>
+              <a:t>■  </a:t>
+            </a:r>
+            <a:r>
+              <a:rPr sz="2400" b="0" i="0">
+                <a:solidFill>
+                  <a:srgbClr val="2A2929"/>
+                </a:solidFill>
+                <a:latin typeface="Roboto"/>
+              </a:rPr>
+              <a:t>Walk the decisions that matter, not every line; defend or adjust under questioning, with reasons.</a:t>
+            </a:r>
+          </a:p>
+          <a:p>
+            <a:pPr marL="0" indent="0">
+              <a:lnSpc>
+                <a:spcPct val="105000"/>
+              </a:lnSpc>
+              <a:spcBef>
+                <a:spcPts val="0"/>
+              </a:spcBef>
+              <a:spcAft>
+                <a:spcPts val="1000"/>
+              </a:spcAft>
+            </a:pPr>
+            <a:r>
+              <a:rPr sz="2400" b="1" i="0">
+                <a:solidFill>
+                  <a:srgbClr val="EDAB0C"/>
+                </a:solidFill>
+                <a:latin typeface="Roboto"/>
+              </a:rPr>
+              <a:t>■  </a:t>
+            </a:r>
+            <a:r>
+              <a:rPr sz="2400" b="0" i="0">
+                <a:solidFill>
+                  <a:srgbClr val="2A2929"/>
+                </a:solidFill>
+                <a:latin typeface="Roboto"/>
+              </a:rPr>
+              <a:t>Then ask for the sign-off to proceed to deployment, and record it — who approved, what, when.</a:t>
+            </a:r>
+          </a:p>
+          <a:p>
+            <a:pPr marL="0" indent="0">
+              <a:lnSpc>
+                <a:spcPct val="105000"/>
+              </a:lnSpc>
+              <a:spcBef>
+                <a:spcPts val="0"/>
+              </a:spcBef>
+              <a:spcAft>
+                <a:spcPts val="1000"/>
+              </a:spcAft>
+            </a:pPr>
+            <a:r>
+              <a:rPr sz="2400" b="1" i="0">
+                <a:solidFill>
+                  <a:srgbClr val="EDAB0C"/>
+                </a:solidFill>
+                <a:latin typeface="Roboto"/>
+              </a:rPr>
+              <a:t>■  </a:t>
+            </a:r>
+            <a:r>
+              <a:rPr sz="2400" b="0" i="0">
+                <a:solidFill>
+                  <a:srgbClr val="2A2929"/>
+                </a:solidFill>
+                <a:latin typeface="Roboto"/>
+              </a:rPr>
+              <a:t>This is the cluster's first approval: it authorises the build. The second, at the end of the build, accepts the result. Different moment, different question.</a:t>
+            </a:r>
+          </a:p>
+        </p:txBody>
+      </p:sp>
+      <p:sp>
+        <p:nvSpPr>
+          <p:cNvPr id="5" name="Rectangle 4"/>
+          <p:cNvSpPr/>
+          <p:nvPr/>
+        </p:nvSpPr>
+        <p:spPr>
+          <a:xfrm>
+            <a:off x="0" y="6565392"/>
+            <a:ext cx="12191695" cy="38100"/>
+          </a:xfrm>
+          <a:prstGeom prst="rect">
+            <a:avLst/>
+          </a:prstGeom>
+          <a:solidFill>
+            <a:srgbClr val="205F61"/>
+          </a:solidFill>
+          <a:ln>
+            <a:noFill/>
+          </a:ln>
+          <a:effectLst/>
+        </p:spPr>
+        <p:style>
+          <a:lnRef idx="1">
+            <a:schemeClr val="accent1"/>
+          </a:lnRef>
+          <a:fillRef idx="3">
+            <a:schemeClr val="accent1"/>
+          </a:fillRef>
+          <a:effectRef idx="2">
+            <a:schemeClr val="accent1"/>
+          </a:effectRef>
+          <a:fontRef idx="minor">
+            <a:schemeClr val="lt1"/>
+          </a:fontRef>
+        </p:style>
+        <p:txBody>
+          <a:bodyPr rtlCol="0" anchor="ctr"/>
+          <a:lstStyle/>
+          <a:p>
+            <a:pPr algn="ctr"/>
+          </a:p>
+        </p:txBody>
+      </p:sp>
+      <p:sp>
+        <p:nvSpPr>
+          <p:cNvPr id="6" name="TextBox 5"/>
+          <p:cNvSpPr txBox="1"/>
+          <p:nvPr/>
+        </p:nvSpPr>
+        <p:spPr>
+          <a:xfrm>
+            <a:off x="502920" y="6400800"/>
+            <a:ext cx="5486400" cy="320040"/>
+          </a:xfrm>
+          <a:prstGeom prst="rect">
+            <a:avLst/>
+          </a:prstGeom>
+          <a:noFill/>
+        </p:spPr>
+        <p:txBody>
+          <a:bodyPr wrap="square" anchor="t" lIns="0" rIns="0" tIns="0" bIns="0">
+            <a:spAutoFit/>
+          </a:bodyPr>
+          <a:lstStyle/>
+          <a:p>
+            <a:r>
+              <a:rPr sz="1100" b="1" i="0">
+                <a:solidFill>
+                  <a:srgbClr val="2A2929"/>
+                </a:solidFill>
+                <a:latin typeface="Roboto"/>
+              </a:rPr>
+              <a:t>Kangan </a:t>
+            </a:r>
+            <a:r>
+              <a:rPr sz="1100" b="1" i="0">
+                <a:solidFill>
+                  <a:srgbClr val="D68E10"/>
+                </a:solidFill>
+                <a:latin typeface="Roboto"/>
+              </a:rPr>
+              <a:t>Institute</a:t>
+            </a:r>
+          </a:p>
+        </p:txBody>
+      </p:sp>
+      <p:sp>
+        <p:nvSpPr>
+          <p:cNvPr id="7" name="TextBox 6"/>
+          <p:cNvSpPr txBox="1"/>
+          <p:nvPr/>
+        </p:nvSpPr>
+        <p:spPr>
+          <a:xfrm>
+            <a:off x="10515600" y="6400800"/>
+            <a:ext cx="1188720" cy="320040"/>
+          </a:xfrm>
+          <a:prstGeom prst="rect">
+            <a:avLst/>
+          </a:prstGeom>
+          <a:noFill/>
+        </p:spPr>
+        <p:txBody>
+          <a:bodyPr wrap="square" anchor="t" lIns="0" rIns="0" tIns="0" bIns="0">
+            <a:spAutoFit/>
+          </a:bodyPr>
+          <a:lstStyle/>
+          <a:p>
+            <a:pPr algn="r"/>
+            <a:r>
+              <a:rPr sz="1100" b="0" i="0">
+                <a:solidFill>
+                  <a:srgbClr val="7A7A7A"/>
+                </a:solidFill>
+                <a:latin typeface="Roboto"/>
+              </a:rPr>
+              <a:t>11</a:t>
+            </a:r>
+          </a:p>
+        </p:txBody>
+      </p:sp>
+    </p:spTree>
+  </p:cSld>
+  <p:clrMapOvr>
+    <a:masterClrMapping/>
+  </p:clrMapOvr>
+</p:sld>
+</file>
+
+<file path=ppt/slides/slide16.xml><?xml version="1.0" encoding="utf-8"?>
+<p:sld xmlns:a="http://schemas.openxmlformats.org/drawingml/2006/main" xmlns:p="http://schemas.openxmlformats.org/presentationml/2006/main" xmlns:r="http://schemas.openxmlformats.org/officeDocument/2006/relationships">
+  <p:cSld>
+    <p:bg>
+      <p:bgPr>
+        <a:solidFill>
+          <a:srgbClr val="FFFFFF"/>
+        </a:solidFill>
+        <a:effectLst/>
+      </p:bgPr>
+    </p:bg>
+    <p:spTree>
+      <p:nvGrpSpPr>
+        <p:cNvPr id="1" name=""/>
+        <p:cNvGrpSpPr/>
+        <p:nvPr/>
+      </p:nvGrpSpPr>
+      <p:grpSpPr/>
+      <p:sp>
+        <p:nvSpPr>
+          <p:cNvPr id="2" name="Rectangle 1"/>
+          <p:cNvSpPr/>
+          <p:nvPr/>
+        </p:nvSpPr>
+        <p:spPr>
+          <a:xfrm>
+            <a:off x="0" y="0"/>
+            <a:ext cx="12191695" cy="1234440"/>
+          </a:xfrm>
+          <a:prstGeom prst="rect">
+            <a:avLst/>
+          </a:prstGeom>
+          <a:solidFill>
+            <a:srgbClr val="205F61"/>
+          </a:solidFill>
+          <a:ln>
+            <a:noFill/>
+          </a:ln>
+          <a:effectLst/>
+        </p:spPr>
+        <p:style>
+          <a:lnRef idx="1">
+            <a:schemeClr val="accent1"/>
+          </a:lnRef>
+          <a:fillRef idx="3">
+            <a:schemeClr val="accent1"/>
+          </a:fillRef>
+          <a:effectRef idx="2">
+            <a:schemeClr val="accent1"/>
+          </a:effectRef>
+          <a:fontRef idx="minor">
+            <a:schemeClr val="lt1"/>
+          </a:fontRef>
+        </p:style>
+        <p:txBody>
+          <a:bodyPr rtlCol="0" anchor="ctr"/>
+          <a:lstStyle/>
+          <a:p>
+            <a:pPr algn="ctr"/>
+          </a:p>
+        </p:txBody>
+      </p:sp>
+      <p:sp>
+        <p:nvSpPr>
+          <p:cNvPr id="3" name="Rounded Rectangle 2"/>
+          <p:cNvSpPr/>
+          <p:nvPr/>
+        </p:nvSpPr>
+        <p:spPr>
+          <a:xfrm>
+            <a:off x="640080" y="384048"/>
+            <a:ext cx="1691640" cy="457200"/>
+          </a:xfrm>
+          <a:prstGeom prst="roundRect">
+            <a:avLst/>
+          </a:prstGeom>
+          <a:solidFill>
+            <a:srgbClr val="2A2929"/>
+          </a:solidFill>
+          <a:ln>
+            <a:noFill/>
+          </a:ln>
+          <a:effectLst/>
+        </p:spPr>
+        <p:style>
+          <a:lnRef idx="1">
+            <a:schemeClr val="accent1"/>
+          </a:lnRef>
+          <a:fillRef idx="3">
+            <a:schemeClr val="accent1"/>
+          </a:fillRef>
+          <a:effectRef idx="2">
+            <a:schemeClr val="accent1"/>
+          </a:effectRef>
+          <a:fontRef idx="minor">
+            <a:schemeClr val="lt1"/>
+          </a:fontRef>
+        </p:style>
+        <p:txBody>
+          <a:bodyPr rtlCol="0" anchor="ctr"/>
+          <a:lstStyle/>
+          <a:p>
+            <a:pPr algn="ctr"/>
+            <a:r>
+              <a:rPr sz="1400" b="1" i="0">
+                <a:solidFill>
+                  <a:srgbClr val="FBB900"/>
+                </a:solidFill>
+                <a:latin typeface="Roboto"/>
+              </a:rPr>
+              <a:t>ACTIVITY</a:t>
+            </a:r>
+          </a:p>
+        </p:txBody>
+      </p:sp>
+      <p:sp>
+        <p:nvSpPr>
+          <p:cNvPr id="4" name="TextBox 3"/>
+          <p:cNvSpPr txBox="1"/>
+          <p:nvPr/>
+        </p:nvSpPr>
+        <p:spPr>
+          <a:xfrm>
+            <a:off x="2560320" y="310896"/>
+            <a:ext cx="8961120" cy="685800"/>
+          </a:xfrm>
+          <a:prstGeom prst="rect">
+            <a:avLst/>
+          </a:prstGeom>
+          <a:noFill/>
+        </p:spPr>
+        <p:txBody>
+          <a:bodyPr wrap="square" anchor="ctr" lIns="0" rIns="0" tIns="0" bIns="0">
+            <a:spAutoFit/>
+          </a:bodyPr>
+          <a:lstStyle/>
+          <a:p>
+            <a:r>
+              <a:rPr sz="2600" b="1" i="0">
+                <a:solidFill>
+                  <a:srgbClr val="FFFFFF"/>
+                </a:solidFill>
+                <a:latin typeface="Roboto"/>
+              </a:rPr>
+              <a:t>Present and close</a:t>
+            </a:r>
+          </a:p>
+        </p:txBody>
+      </p:sp>
+      <p:sp>
+        <p:nvSpPr>
+          <p:cNvPr id="5" name="TextBox 4"/>
+          <p:cNvSpPr txBox="1"/>
+          <p:nvPr/>
+        </p:nvSpPr>
+        <p:spPr>
+          <a:xfrm>
+            <a:off x="658368" y="1554480"/>
+            <a:ext cx="10881360" cy="4297680"/>
+          </a:xfrm>
+          <a:prstGeom prst="rect">
+            <a:avLst/>
+          </a:prstGeom>
+          <a:noFill/>
+        </p:spPr>
+        <p:txBody>
+          <a:bodyPr wrap="square" anchor="t" lIns="0" rIns="0" tIns="0" bIns="0">
+            <a:spAutoFit/>
+          </a:bodyPr>
+          <a:lstStyle/>
+          <a:p>
+            <a:pPr marL="0" indent="0">
+              <a:lnSpc>
+                <a:spcPct val="105000"/>
+              </a:lnSpc>
+              <a:spcBef>
+                <a:spcPts val="0"/>
+              </a:spcBef>
+              <a:spcAft>
+                <a:spcPts val="1000"/>
+              </a:spcAft>
+            </a:pPr>
+            <a:r>
+              <a:rPr sz="1700" b="1" i="0">
+                <a:solidFill>
+                  <a:srgbClr val="EDAB0C"/>
+                </a:solidFill>
+                <a:latin typeface="Roboto"/>
+              </a:rPr>
+              <a:t>■  </a:t>
+            </a:r>
+            <a:r>
+              <a:rPr sz="1700" b="0" i="0">
+                <a:solidFill>
+                  <a:srgbClr val="2A2929"/>
+                </a:solidFill>
+                <a:latin typeface="Roboto"/>
+              </a:rPr>
+              <a:t>Workbook — tasks 16, 17 and 18.</a:t>
+            </a:r>
+          </a:p>
+          <a:p>
+            <a:pPr marL="0" indent="0">
+              <a:lnSpc>
+                <a:spcPct val="105000"/>
+              </a:lnSpc>
+              <a:spcBef>
+                <a:spcPts val="0"/>
+              </a:spcBef>
+              <a:spcAft>
+                <a:spcPts val="1000"/>
+              </a:spcAft>
+            </a:pPr>
+            <a:r>
+              <a:rPr sz="1700" b="1" i="0">
+                <a:solidFill>
+                  <a:srgbClr val="EDAB0C"/>
+                </a:solidFill>
+                <a:latin typeface="Roboto"/>
+              </a:rPr>
+              <a:t>■  </a:t>
+            </a:r>
+            <a:r>
+              <a:rPr sz="1700" b="0" i="0">
+                <a:solidFill>
+                  <a:srgbClr val="2A2929"/>
+                </a:solidFill>
+                <a:latin typeface="Roboto"/>
+              </a:rPr>
+              <a:t>Prepare the walkthrough, present the proposal to a mock review panel, respond to the feedback, then ask for sign-off and record the decision.</a:t>
+            </a:r>
+          </a:p>
+        </p:txBody>
+      </p:sp>
+      <p:sp>
+        <p:nvSpPr>
+          <p:cNvPr id="6" name="Rounded Rectangle 5"/>
+          <p:cNvSpPr/>
+          <p:nvPr/>
+        </p:nvSpPr>
+        <p:spPr>
+          <a:xfrm>
+            <a:off x="640080" y="5897880"/>
+            <a:ext cx="4023360" cy="457200"/>
+          </a:xfrm>
+          <a:prstGeom prst="roundRect">
+            <a:avLst/>
+          </a:prstGeom>
+          <a:solidFill>
+            <a:srgbClr val="F9F9F9"/>
+          </a:solidFill>
+          <a:ln w="12700">
+            <a:solidFill>
+              <a:srgbClr val="CCCCCC"/>
+            </a:solidFill>
+          </a:ln>
+          <a:effectLst/>
+        </p:spPr>
+        <p:style>
+          <a:lnRef idx="1">
+            <a:schemeClr val="accent1"/>
+          </a:lnRef>
+          <a:fillRef idx="3">
+            <a:schemeClr val="accent1"/>
+          </a:fillRef>
+          <a:effectRef idx="2">
+            <a:schemeClr val="accent1"/>
+          </a:effectRef>
+          <a:fontRef idx="minor">
+            <a:schemeClr val="lt1"/>
+          </a:fontRef>
+        </p:style>
+        <p:txBody>
+          <a:bodyPr rtlCol="0" anchor="ctr"/>
+          <a:lstStyle/>
+          <a:p>
+            <a:pPr algn="ctr"/>
+          </a:p>
+        </p:txBody>
+      </p:sp>
+      <p:sp>
+        <p:nvSpPr>
+          <p:cNvPr id="7" name="TextBox 6"/>
+          <p:cNvSpPr txBox="1"/>
+          <p:nvPr/>
+        </p:nvSpPr>
+        <p:spPr>
+          <a:xfrm>
+            <a:off x="822960" y="5943600"/>
+            <a:ext cx="3657600" cy="365760"/>
+          </a:xfrm>
+          <a:prstGeom prst="rect">
+            <a:avLst/>
+          </a:prstGeom>
+          <a:noFill/>
+        </p:spPr>
+        <p:txBody>
+          <a:bodyPr wrap="square" anchor="ctr" lIns="0" rIns="0" tIns="0" bIns="0">
+            <a:spAutoFit/>
+          </a:bodyPr>
+          <a:lstStyle/>
+          <a:p>
+            <a:r>
+              <a:rPr sz="1500" b="1" i="0">
+                <a:solidFill>
+                  <a:srgbClr val="2A2929"/>
+                </a:solidFill>
+                <a:latin typeface="Roboto"/>
+              </a:rPr>
+              <a:t>⏱  ~40 min</a:t>
+            </a:r>
+          </a:p>
+        </p:txBody>
+      </p:sp>
+      <p:sp>
+        <p:nvSpPr>
+          <p:cNvPr id="8" name="Rectangle 7"/>
+          <p:cNvSpPr/>
+          <p:nvPr/>
+        </p:nvSpPr>
+        <p:spPr>
+          <a:xfrm>
+            <a:off x="0" y="6565392"/>
+            <a:ext cx="12191695" cy="38100"/>
+          </a:xfrm>
+          <a:prstGeom prst="rect">
+            <a:avLst/>
+          </a:prstGeom>
+          <a:solidFill>
+            <a:srgbClr val="205F61"/>
+          </a:solidFill>
+          <a:ln>
+            <a:noFill/>
+          </a:ln>
+          <a:effectLst/>
+        </p:spPr>
+        <p:style>
+          <a:lnRef idx="1">
+            <a:schemeClr val="accent1"/>
+          </a:lnRef>
+          <a:fillRef idx="3">
+            <a:schemeClr val="accent1"/>
+          </a:fillRef>
+          <a:effectRef idx="2">
+            <a:schemeClr val="accent1"/>
+          </a:effectRef>
+          <a:fontRef idx="minor">
+            <a:schemeClr val="lt1"/>
+          </a:fontRef>
+        </p:style>
+        <p:txBody>
+          <a:bodyPr rtlCol="0" anchor="ctr"/>
+          <a:lstStyle/>
+          <a:p>
+            <a:pPr algn="ctr"/>
+          </a:p>
+        </p:txBody>
+      </p:sp>
+      <p:sp>
+        <p:nvSpPr>
+          <p:cNvPr id="9" name="TextBox 8"/>
+          <p:cNvSpPr txBox="1"/>
+          <p:nvPr/>
+        </p:nvSpPr>
+        <p:spPr>
+          <a:xfrm>
+            <a:off x="502920" y="6400800"/>
+            <a:ext cx="5486400" cy="320040"/>
+          </a:xfrm>
+          <a:prstGeom prst="rect">
+            <a:avLst/>
+          </a:prstGeom>
+          <a:noFill/>
+        </p:spPr>
+        <p:txBody>
+          <a:bodyPr wrap="square" anchor="t" lIns="0" rIns="0" tIns="0" bIns="0">
+            <a:spAutoFit/>
+          </a:bodyPr>
+          <a:lstStyle/>
+          <a:p>
+            <a:r>
+              <a:rPr sz="1100" b="1" i="0">
+                <a:solidFill>
+                  <a:srgbClr val="2A2929"/>
+                </a:solidFill>
+                <a:latin typeface="Roboto"/>
+              </a:rPr>
+              <a:t>Kangan </a:t>
+            </a:r>
+            <a:r>
+              <a:rPr sz="1100" b="1" i="0">
+                <a:solidFill>
+                  <a:srgbClr val="D68E10"/>
+                </a:solidFill>
+                <a:latin typeface="Roboto"/>
+              </a:rPr>
+              <a:t>Institute</a:t>
+            </a:r>
+          </a:p>
+        </p:txBody>
+      </p:sp>
+      <p:sp>
+        <p:nvSpPr>
+          <p:cNvPr id="10" name="TextBox 9"/>
+          <p:cNvSpPr txBox="1"/>
+          <p:nvPr/>
+        </p:nvSpPr>
+        <p:spPr>
+          <a:xfrm>
+            <a:off x="10515600" y="6400800"/>
+            <a:ext cx="1188720" cy="320040"/>
+          </a:xfrm>
+          <a:prstGeom prst="rect">
+            <a:avLst/>
+          </a:prstGeom>
+          <a:noFill/>
+        </p:spPr>
+        <p:txBody>
+          <a:bodyPr wrap="square" anchor="t" lIns="0" rIns="0" tIns="0" bIns="0">
+            <a:spAutoFit/>
+          </a:bodyPr>
+          <a:lstStyle/>
+          <a:p>
+            <a:pPr algn="r"/>
+            <a:r>
+              <a:rPr sz="1100" b="0" i="0">
+                <a:solidFill>
+                  <a:srgbClr val="7A7A7A"/>
+                </a:solidFill>
+                <a:latin typeface="Roboto"/>
+              </a:rPr>
+              <a:t>12</a:t>
+            </a:r>
+          </a:p>
+        </p:txBody>
+      </p:sp>
+    </p:spTree>
+  </p:cSld>
+  <p:clrMapOvr>
+    <a:masterClrMapping/>
+  </p:clrMapOvr>
+</p:sld>
+</file>
+
+<file path=ppt/slides/slide17.xml><?xml version="1.0" encoding="utf-8"?>
+<p:sld xmlns:a="http://schemas.openxmlformats.org/drawingml/2006/main" xmlns:p="http://schemas.openxmlformats.org/presentationml/2006/main" xmlns:r="http://schemas.openxmlformats.org/officeDocument/2006/relationships">
+  <p:cSld>
+    <p:bg>
+      <p:bgPr>
+        <a:solidFill>
+          <a:srgbClr val="F9F9F9"/>
+        </a:solidFill>
+        <a:effectLst/>
+      </p:bgPr>
+    </p:bg>
+    <p:spTree>
+      <p:nvGrpSpPr>
+        <p:cNvPr id="1" name=""/>
+        <p:cNvGrpSpPr/>
+        <p:nvPr/>
+      </p:nvGrpSpPr>
+      <p:grpSpPr/>
+      <p:sp>
+        <p:nvSpPr>
+          <p:cNvPr id="2" name="TextBox 1"/>
+          <p:cNvSpPr txBox="1"/>
+          <p:nvPr/>
+        </p:nvSpPr>
+        <p:spPr>
+          <a:xfrm>
+            <a:off x="640080" y="548640"/>
+            <a:ext cx="10881360" cy="1097280"/>
+          </a:xfrm>
+          <a:prstGeom prst="rect">
+            <a:avLst/>
+          </a:prstGeom>
+          <a:noFill/>
+        </p:spPr>
+        <p:txBody>
+          <a:bodyPr wrap="square" anchor="t" lIns="0" rIns="0" tIns="0" bIns="0">
+            <a:spAutoFit/>
+          </a:bodyPr>
+          <a:lstStyle/>
+          <a:p>
+            <a:r>
+              <a:rPr sz="3200" b="1" i="0">
+                <a:solidFill>
+                  <a:srgbClr val="2A2929"/>
+                </a:solidFill>
+                <a:latin typeface="Roboto"/>
+              </a:rPr>
+              <a:t>Key takeaways</a:t>
+            </a:r>
+          </a:p>
+          <a:p>
+            <a:pPr>
+              <a:spcBef>
+                <a:spcPts val="200"/>
               </a:spcBef>
             </a:pPr>
             <a:r>
-              <a:rPr sz="1900" b="0" i="0">
-                <a:solidFill>
-                  <a:srgbClr val="E8E8E8"/>
+              <a:rPr sz="1800" b="1" i="0">
+                <a:solidFill>
+                  <a:srgbClr val="205F61"/>
+                </a:solidFill>
+                <a:latin typeface="Roboto"/>
+              </a:rPr>
+              <a:t>Section 3 · The close</a:t>
+            </a:r>
+          </a:p>
+        </p:txBody>
+      </p:sp>
+      <p:sp>
+        <p:nvSpPr>
+          <p:cNvPr id="3" name="Rectangle 2"/>
+          <p:cNvSpPr/>
+          <p:nvPr/>
+        </p:nvSpPr>
+        <p:spPr>
+          <a:xfrm>
+            <a:off x="658368" y="1600200"/>
+            <a:ext cx="1463040" cy="50800"/>
+          </a:xfrm>
+          <a:prstGeom prst="rect">
+            <a:avLst/>
+          </a:prstGeom>
+          <a:solidFill>
+            <a:srgbClr val="205F61"/>
+          </a:solidFill>
+          <a:ln>
+            <a:noFill/>
+          </a:ln>
+          <a:effectLst/>
+        </p:spPr>
+        <p:style>
+          <a:lnRef idx="1">
+            <a:schemeClr val="accent1"/>
+          </a:lnRef>
+          <a:fillRef idx="3">
+            <a:schemeClr val="accent1"/>
+          </a:fillRef>
+          <a:effectRef idx="2">
+            <a:schemeClr val="accent1"/>
+          </a:effectRef>
+          <a:fontRef idx="minor">
+            <a:schemeClr val="lt1"/>
+          </a:fontRef>
+        </p:style>
+        <p:txBody>
+          <a:bodyPr rtlCol="0" anchor="ctr"/>
+          <a:lstStyle/>
+          <a:p>
+            <a:pPr algn="ctr"/>
+          </a:p>
+        </p:txBody>
+      </p:sp>
+      <p:sp>
+        <p:nvSpPr>
+          <p:cNvPr id="4" name="Rectangle 3"/>
+          <p:cNvSpPr/>
+          <p:nvPr/>
+        </p:nvSpPr>
+        <p:spPr>
+          <a:xfrm>
+            <a:off x="640080" y="1965960"/>
+            <a:ext cx="10927080" cy="841248"/>
+          </a:xfrm>
+          <a:prstGeom prst="rect">
+            <a:avLst/>
+          </a:prstGeom>
+          <a:solidFill>
+            <a:srgbClr val="FFFFFF"/>
+          </a:solidFill>
+          <a:ln w="12700">
+            <a:solidFill>
+              <a:srgbClr val="CCCCCC"/>
+            </a:solidFill>
+          </a:ln>
+          <a:effectLst/>
+        </p:spPr>
+        <p:style>
+          <a:lnRef idx="1">
+            <a:schemeClr val="accent1"/>
+          </a:lnRef>
+          <a:fillRef idx="3">
+            <a:schemeClr val="accent1"/>
+          </a:fillRef>
+          <a:effectRef idx="2">
+            <a:schemeClr val="accent1"/>
+          </a:effectRef>
+          <a:fontRef idx="minor">
+            <a:schemeClr val="lt1"/>
+          </a:fontRef>
+        </p:style>
+        <p:txBody>
+          <a:bodyPr rtlCol="0" anchor="ctr"/>
+          <a:lstStyle/>
+          <a:p>
+            <a:pPr algn="ctr"/>
+          </a:p>
+        </p:txBody>
+      </p:sp>
+      <p:sp>
+        <p:nvSpPr>
+          <p:cNvPr id="5" name="Rectangle 4"/>
+          <p:cNvSpPr/>
+          <p:nvPr/>
+        </p:nvSpPr>
+        <p:spPr>
+          <a:xfrm>
+            <a:off x="640080" y="1965960"/>
+            <a:ext cx="109728" cy="841248"/>
+          </a:xfrm>
+          <a:prstGeom prst="rect">
+            <a:avLst/>
+          </a:prstGeom>
+          <a:solidFill>
+            <a:srgbClr val="205F61"/>
+          </a:solidFill>
+          <a:ln>
+            <a:noFill/>
+          </a:ln>
+          <a:effectLst/>
+        </p:spPr>
+        <p:style>
+          <a:lnRef idx="1">
+            <a:schemeClr val="accent1"/>
+          </a:lnRef>
+          <a:fillRef idx="3">
+            <a:schemeClr val="accent1"/>
+          </a:fillRef>
+          <a:effectRef idx="2">
+            <a:schemeClr val="accent1"/>
+          </a:effectRef>
+          <a:fontRef idx="minor">
+            <a:schemeClr val="lt1"/>
+          </a:fontRef>
+        </p:style>
+        <p:txBody>
+          <a:bodyPr rtlCol="0" anchor="ctr"/>
+          <a:lstStyle/>
+          <a:p>
+            <a:pPr algn="ctr"/>
+          </a:p>
+        </p:txBody>
+      </p:sp>
+      <p:sp>
+        <p:nvSpPr>
+          <p:cNvPr id="6" name="TextBox 5"/>
+          <p:cNvSpPr txBox="1"/>
+          <p:nvPr/>
+        </p:nvSpPr>
+        <p:spPr>
+          <a:xfrm>
+            <a:off x="960120" y="1965960"/>
+            <a:ext cx="10424160" cy="841248"/>
+          </a:xfrm>
+          <a:prstGeom prst="rect">
+            <a:avLst/>
+          </a:prstGeom>
+          <a:noFill/>
+        </p:spPr>
+        <p:txBody>
+          <a:bodyPr wrap="square" anchor="ctr" lIns="0" rIns="0" tIns="0" bIns="0">
+            <a:spAutoFit/>
+          </a:bodyPr>
+          <a:lstStyle/>
+          <a:p>
+            <a:pPr>
+              <a:lnSpc>
+                <a:spcPct val="100000"/>
+              </a:lnSpc>
+            </a:pPr>
+            <a:r>
+              <a:rPr sz="1700" b="0" i="0">
+                <a:solidFill>
+                  <a:srgbClr val="2A2929"/>
+                </a:solidFill>
+                <a:latin typeface="Roboto"/>
+              </a:rPr>
+              <a:t>One point per part; prepare the questions your choices invite.</a:t>
+            </a:r>
+          </a:p>
+        </p:txBody>
+      </p:sp>
+      <p:sp>
+        <p:nvSpPr>
+          <p:cNvPr id="7" name="Rectangle 6"/>
+          <p:cNvSpPr/>
+          <p:nvPr/>
+        </p:nvSpPr>
+        <p:spPr>
+          <a:xfrm>
+            <a:off x="640080" y="2916936"/>
+            <a:ext cx="10927080" cy="841248"/>
+          </a:xfrm>
+          <a:prstGeom prst="rect">
+            <a:avLst/>
+          </a:prstGeom>
+          <a:solidFill>
+            <a:srgbClr val="FFFFFF"/>
+          </a:solidFill>
+          <a:ln w="12700">
+            <a:solidFill>
+              <a:srgbClr val="CCCCCC"/>
+            </a:solidFill>
+          </a:ln>
+          <a:effectLst/>
+        </p:spPr>
+        <p:style>
+          <a:lnRef idx="1">
+            <a:schemeClr val="accent1"/>
+          </a:lnRef>
+          <a:fillRef idx="3">
+            <a:schemeClr val="accent1"/>
+          </a:fillRef>
+          <a:effectRef idx="2">
+            <a:schemeClr val="accent1"/>
+          </a:effectRef>
+          <a:fontRef idx="minor">
+            <a:schemeClr val="lt1"/>
+          </a:fontRef>
+        </p:style>
+        <p:txBody>
+          <a:bodyPr rtlCol="0" anchor="ctr"/>
+          <a:lstStyle/>
+          <a:p>
+            <a:pPr algn="ctr"/>
+          </a:p>
+        </p:txBody>
+      </p:sp>
+      <p:sp>
+        <p:nvSpPr>
+          <p:cNvPr id="8" name="Rectangle 7"/>
+          <p:cNvSpPr/>
+          <p:nvPr/>
+        </p:nvSpPr>
+        <p:spPr>
+          <a:xfrm>
+            <a:off x="640080" y="2916936"/>
+            <a:ext cx="109728" cy="841248"/>
+          </a:xfrm>
+          <a:prstGeom prst="rect">
+            <a:avLst/>
+          </a:prstGeom>
+          <a:solidFill>
+            <a:srgbClr val="205F61"/>
+          </a:solidFill>
+          <a:ln>
+            <a:noFill/>
+          </a:ln>
+          <a:effectLst/>
+        </p:spPr>
+        <p:style>
+          <a:lnRef idx="1">
+            <a:schemeClr val="accent1"/>
+          </a:lnRef>
+          <a:fillRef idx="3">
+            <a:schemeClr val="accent1"/>
+          </a:fillRef>
+          <a:effectRef idx="2">
+            <a:schemeClr val="accent1"/>
+          </a:effectRef>
+          <a:fontRef idx="minor">
+            <a:schemeClr val="lt1"/>
+          </a:fontRef>
+        </p:style>
+        <p:txBody>
+          <a:bodyPr rtlCol="0" anchor="ctr"/>
+          <a:lstStyle/>
+          <a:p>
+            <a:pPr algn="ctr"/>
+          </a:p>
+        </p:txBody>
+      </p:sp>
+      <p:sp>
+        <p:nvSpPr>
+          <p:cNvPr id="9" name="TextBox 8"/>
+          <p:cNvSpPr txBox="1"/>
+          <p:nvPr/>
+        </p:nvSpPr>
+        <p:spPr>
+          <a:xfrm>
+            <a:off x="960120" y="2916936"/>
+            <a:ext cx="10424160" cy="841248"/>
+          </a:xfrm>
+          <a:prstGeom prst="rect">
+            <a:avLst/>
+          </a:prstGeom>
+          <a:noFill/>
+        </p:spPr>
+        <p:txBody>
+          <a:bodyPr wrap="square" anchor="ctr" lIns="0" rIns="0" tIns="0" bIns="0">
+            <a:spAutoFit/>
+          </a:bodyPr>
+          <a:lstStyle/>
+          <a:p>
+            <a:pPr>
+              <a:lnSpc>
+                <a:spcPct val="100000"/>
+              </a:lnSpc>
+            </a:pPr>
+            <a:r>
+              <a:rPr sz="1700" b="0" i="0">
+                <a:solidFill>
+                  <a:srgbClr val="2A2929"/>
+                </a:solidFill>
+                <a:latin typeface="Roboto"/>
+              </a:rPr>
+              <a:t>Defend with reasons; record the decision.</a:t>
+            </a:r>
+          </a:p>
+        </p:txBody>
+      </p:sp>
+      <p:sp>
+        <p:nvSpPr>
+          <p:cNvPr id="10" name="Rectangle 9"/>
+          <p:cNvSpPr/>
+          <p:nvPr/>
+        </p:nvSpPr>
+        <p:spPr>
+          <a:xfrm>
+            <a:off x="640080" y="3867912"/>
+            <a:ext cx="10927080" cy="841248"/>
+          </a:xfrm>
+          <a:prstGeom prst="rect">
+            <a:avLst/>
+          </a:prstGeom>
+          <a:solidFill>
+            <a:srgbClr val="FFFFFF"/>
+          </a:solidFill>
+          <a:ln w="12700">
+            <a:solidFill>
+              <a:srgbClr val="CCCCCC"/>
+            </a:solidFill>
+          </a:ln>
+          <a:effectLst/>
+        </p:spPr>
+        <p:style>
+          <a:lnRef idx="1">
+            <a:schemeClr val="accent1"/>
+          </a:lnRef>
+          <a:fillRef idx="3">
+            <a:schemeClr val="accent1"/>
+          </a:fillRef>
+          <a:effectRef idx="2">
+            <a:schemeClr val="accent1"/>
+          </a:effectRef>
+          <a:fontRef idx="minor">
+            <a:schemeClr val="lt1"/>
+          </a:fontRef>
+        </p:style>
+        <p:txBody>
+          <a:bodyPr rtlCol="0" anchor="ctr"/>
+          <a:lstStyle/>
+          <a:p>
+            <a:pPr algn="ctr"/>
+          </a:p>
+        </p:txBody>
+      </p:sp>
+      <p:sp>
+        <p:nvSpPr>
+          <p:cNvPr id="11" name="Rectangle 10"/>
+          <p:cNvSpPr/>
+          <p:nvPr/>
+        </p:nvSpPr>
+        <p:spPr>
+          <a:xfrm>
+            <a:off x="640080" y="3867912"/>
+            <a:ext cx="109728" cy="841248"/>
+          </a:xfrm>
+          <a:prstGeom prst="rect">
+            <a:avLst/>
+          </a:prstGeom>
+          <a:solidFill>
+            <a:srgbClr val="205F61"/>
+          </a:solidFill>
+          <a:ln>
+            <a:noFill/>
+          </a:ln>
+          <a:effectLst/>
+        </p:spPr>
+        <p:style>
+          <a:lnRef idx="1">
+            <a:schemeClr val="accent1"/>
+          </a:lnRef>
+          <a:fillRef idx="3">
+            <a:schemeClr val="accent1"/>
+          </a:fillRef>
+          <a:effectRef idx="2">
+            <a:schemeClr val="accent1"/>
+          </a:effectRef>
+          <a:fontRef idx="minor">
+            <a:schemeClr val="lt1"/>
+          </a:fontRef>
+        </p:style>
+        <p:txBody>
+          <a:bodyPr rtlCol="0" anchor="ctr"/>
+          <a:lstStyle/>
+          <a:p>
+            <a:pPr algn="ctr"/>
+          </a:p>
+        </p:txBody>
+      </p:sp>
+      <p:sp>
+        <p:nvSpPr>
+          <p:cNvPr id="12" name="TextBox 11"/>
+          <p:cNvSpPr txBox="1"/>
+          <p:nvPr/>
+        </p:nvSpPr>
+        <p:spPr>
+          <a:xfrm>
+            <a:off x="960120" y="3867912"/>
+            <a:ext cx="10424160" cy="841248"/>
+          </a:xfrm>
+          <a:prstGeom prst="rect">
+            <a:avLst/>
+          </a:prstGeom>
+          <a:noFill/>
+        </p:spPr>
+        <p:txBody>
+          <a:bodyPr wrap="square" anchor="ctr" lIns="0" rIns="0" tIns="0" bIns="0">
+            <a:spAutoFit/>
+          </a:bodyPr>
+          <a:lstStyle/>
+          <a:p>
+            <a:pPr>
+              <a:lnSpc>
+                <a:spcPct val="100000"/>
+              </a:lnSpc>
+            </a:pPr>
+            <a:r>
+              <a:rPr sz="1700" b="0" i="0">
+                <a:solidFill>
+                  <a:srgbClr val="2A2929"/>
+                </a:solidFill>
+                <a:latin typeface="Roboto"/>
+              </a:rPr>
+              <a:t>First approval authorises the build; the final one accepts the result.</a:t>
+            </a:r>
+          </a:p>
+        </p:txBody>
+      </p:sp>
+      <p:sp>
+        <p:nvSpPr>
+          <p:cNvPr id="13" name="Rectangle 12"/>
+          <p:cNvSpPr/>
+          <p:nvPr/>
+        </p:nvSpPr>
+        <p:spPr>
+          <a:xfrm>
+            <a:off x="0" y="6565392"/>
+            <a:ext cx="12191695" cy="38100"/>
+          </a:xfrm>
+          <a:prstGeom prst="rect">
+            <a:avLst/>
+          </a:prstGeom>
+          <a:solidFill>
+            <a:srgbClr val="205F61"/>
+          </a:solidFill>
+          <a:ln>
+            <a:noFill/>
+          </a:ln>
+          <a:effectLst/>
+        </p:spPr>
+        <p:style>
+          <a:lnRef idx="1">
+            <a:schemeClr val="accent1"/>
+          </a:lnRef>
+          <a:fillRef idx="3">
+            <a:schemeClr val="accent1"/>
+          </a:fillRef>
+          <a:effectRef idx="2">
+            <a:schemeClr val="accent1"/>
+          </a:effectRef>
+          <a:fontRef idx="minor">
+            <a:schemeClr val="lt1"/>
+          </a:fontRef>
+        </p:style>
+        <p:txBody>
+          <a:bodyPr rtlCol="0" anchor="ctr"/>
+          <a:lstStyle/>
+          <a:p>
+            <a:pPr algn="ctr"/>
+          </a:p>
+        </p:txBody>
+      </p:sp>
+      <p:sp>
+        <p:nvSpPr>
+          <p:cNvPr id="14" name="TextBox 13"/>
+          <p:cNvSpPr txBox="1"/>
+          <p:nvPr/>
+        </p:nvSpPr>
+        <p:spPr>
+          <a:xfrm>
+            <a:off x="502920" y="6400800"/>
+            <a:ext cx="5486400" cy="320040"/>
+          </a:xfrm>
+          <a:prstGeom prst="rect">
+            <a:avLst/>
+          </a:prstGeom>
+          <a:noFill/>
+        </p:spPr>
+        <p:txBody>
+          <a:bodyPr wrap="square" anchor="t" lIns="0" rIns="0" tIns="0" bIns="0">
+            <a:spAutoFit/>
+          </a:bodyPr>
+          <a:lstStyle/>
+          <a:p>
+            <a:r>
+              <a:rPr sz="1100" b="1" i="0">
+                <a:solidFill>
+                  <a:srgbClr val="2A2929"/>
+                </a:solidFill>
+                <a:latin typeface="Roboto"/>
+              </a:rPr>
+              <a:t>Kangan </a:t>
+            </a:r>
+            <a:r>
+              <a:rPr sz="1100" b="1" i="0">
+                <a:solidFill>
+                  <a:srgbClr val="D68E10"/>
+                </a:solidFill>
+                <a:latin typeface="Roboto"/>
+              </a:rPr>
+              <a:t>Institute</a:t>
+            </a:r>
+          </a:p>
+        </p:txBody>
+      </p:sp>
+      <p:sp>
+        <p:nvSpPr>
+          <p:cNvPr id="15" name="TextBox 14"/>
+          <p:cNvSpPr txBox="1"/>
+          <p:nvPr/>
+        </p:nvSpPr>
+        <p:spPr>
+          <a:xfrm>
+            <a:off x="10515600" y="6400800"/>
+            <a:ext cx="1188720" cy="320040"/>
+          </a:xfrm>
+          <a:prstGeom prst="rect">
+            <a:avLst/>
+          </a:prstGeom>
+          <a:noFill/>
+        </p:spPr>
+        <p:txBody>
+          <a:bodyPr wrap="square" anchor="t" lIns="0" rIns="0" tIns="0" bIns="0">
+            <a:spAutoFit/>
+          </a:bodyPr>
+          <a:lstStyle/>
+          <a:p>
+            <a:pPr algn="r"/>
+            <a:r>
+              <a:rPr sz="1100" b="0" i="0">
+                <a:solidFill>
+                  <a:srgbClr val="7A7A7A"/>
+                </a:solidFill>
+                <a:latin typeface="Roboto"/>
+              </a:rPr>
+              <a:t>13</a:t>
+            </a:r>
+          </a:p>
+        </p:txBody>
+      </p:sp>
+    </p:spTree>
+  </p:cSld>
+  <p:clrMapOvr>
+    <a:masterClrMapping/>
+  </p:clrMapOvr>
+</p:sld>
+</file>
+
+<file path=ppt/slides/slide18.xml><?xml version="1.0" encoding="utf-8"?>
+<p:sld xmlns:a="http://schemas.openxmlformats.org/drawingml/2006/main" xmlns:p="http://schemas.openxmlformats.org/presentationml/2006/main" xmlns:r="http://schemas.openxmlformats.org/officeDocument/2006/relationships">
+  <p:cSld>
+    <p:bg>
+      <p:bgPr>
+        <a:solidFill>
+          <a:srgbClr val="FFFFFF"/>
+        </a:solidFill>
+        <a:effectLst/>
+      </p:bgPr>
+    </p:bg>
+    <p:spTree>
+      <p:nvGrpSpPr>
+        <p:cNvPr id="1" name=""/>
+        <p:cNvGrpSpPr/>
+        <p:nvPr/>
+      </p:nvGrpSpPr>
+      <p:grpSpPr/>
+      <p:sp>
+        <p:nvSpPr>
+          <p:cNvPr id="2" name="Rectangle 1"/>
+          <p:cNvSpPr/>
+          <p:nvPr/>
+        </p:nvSpPr>
+        <p:spPr>
+          <a:xfrm>
+            <a:off x="0" y="0"/>
+            <a:ext cx="3931920" cy="6858000"/>
+          </a:xfrm>
+          <a:prstGeom prst="rect">
+            <a:avLst/>
+          </a:prstGeom>
+          <a:solidFill>
+            <a:srgbClr val="004488"/>
+          </a:solidFill>
+          <a:ln>
+            <a:noFill/>
+          </a:ln>
+          <a:effectLst/>
+        </p:spPr>
+        <p:style>
+          <a:lnRef idx="1">
+            <a:schemeClr val="accent1"/>
+          </a:lnRef>
+          <a:fillRef idx="3">
+            <a:schemeClr val="accent1"/>
+          </a:fillRef>
+          <a:effectRef idx="2">
+            <a:schemeClr val="accent1"/>
+          </a:effectRef>
+          <a:fontRef idx="minor">
+            <a:schemeClr val="lt1"/>
+          </a:fontRef>
+        </p:style>
+        <p:txBody>
+          <a:bodyPr rtlCol="0" anchor="ctr"/>
+          <a:lstStyle/>
+          <a:p>
+            <a:pPr algn="ctr"/>
+          </a:p>
+        </p:txBody>
+      </p:sp>
+      <p:sp>
+        <p:nvSpPr>
+          <p:cNvPr id="3" name="TextBox 2"/>
+          <p:cNvSpPr txBox="1"/>
+          <p:nvPr/>
+        </p:nvSpPr>
+        <p:spPr>
+          <a:xfrm>
+            <a:off x="365760" y="2103120"/>
+            <a:ext cx="3291840" cy="2194560"/>
+          </a:xfrm>
+          <a:prstGeom prst="rect">
+            <a:avLst/>
+          </a:prstGeom>
+          <a:noFill/>
+        </p:spPr>
+        <p:txBody>
+          <a:bodyPr wrap="square" anchor="t" lIns="0" rIns="0" tIns="0" bIns="0">
+            <a:spAutoFit/>
+          </a:bodyPr>
+          <a:lstStyle/>
+          <a:p>
+            <a:r>
+              <a:rPr sz="13000" b="1" i="0">
+                <a:solidFill>
+                  <a:srgbClr val="FFFFFF"/>
+                </a:solidFill>
+                <a:latin typeface="Roboto"/>
+              </a:rPr>
+              <a:t>04</a:t>
+            </a:r>
+          </a:p>
+        </p:txBody>
+      </p:sp>
+      <p:sp>
+        <p:nvSpPr>
+          <p:cNvPr id="4" name="TextBox 3"/>
+          <p:cNvSpPr txBox="1"/>
+          <p:nvPr/>
+        </p:nvSpPr>
+        <p:spPr>
+          <a:xfrm>
+            <a:off x="4480560" y="2468880"/>
+            <a:ext cx="7132320" cy="2194560"/>
+          </a:xfrm>
+          <a:prstGeom prst="rect">
+            <a:avLst/>
+          </a:prstGeom>
+          <a:noFill/>
+        </p:spPr>
+        <p:txBody>
+          <a:bodyPr wrap="square" anchor="t" lIns="0" rIns="0" tIns="0" bIns="0">
+            <a:spAutoFit/>
+          </a:bodyPr>
+          <a:lstStyle/>
+          <a:p>
+            <a:r>
+              <a:rPr sz="1600" b="1" i="0">
+                <a:solidFill>
+                  <a:srgbClr val="004488"/>
+                </a:solidFill>
+                <a:latin typeface="Roboto"/>
+              </a:rPr>
+              <a:t>SECTION</a:t>
+            </a:r>
+          </a:p>
+          <a:p>
+            <a:pPr>
+              <a:spcBef>
+                <a:spcPts val="600"/>
+              </a:spcBef>
+            </a:pPr>
+            <a:r>
+              <a:rPr sz="3800" b="1" i="0">
+                <a:solidFill>
+                  <a:srgbClr val="2A2929"/>
+                </a:solidFill>
+                <a:latin typeface="Roboto"/>
+              </a:rPr>
+              <a:t>The written questions</a:t>
+            </a:r>
+          </a:p>
+          <a:p>
+            <a:pPr>
+              <a:spcBef>
+                <a:spcPts val="1000"/>
+              </a:spcBef>
+            </a:pPr>
+            <a:r>
+              <a:rPr sz="2000" b="0" i="1">
+                <a:solidFill>
+                  <a:srgbClr val="484848"/>
                 </a:solidFill>
                 <a:latin typeface="Roboto Light"/>
               </a:rPr>
-              <a:t>Next you switch from design to build — lead and plan the team that implements the approved design.</a:t>
+              <a:t>your design, your answers</a:t>
+            </a:r>
+          </a:p>
+        </p:txBody>
+      </p:sp>
+      <p:sp>
+        <p:nvSpPr>
+          <p:cNvPr id="5" name="Rectangle 4"/>
+          <p:cNvSpPr/>
+          <p:nvPr/>
+        </p:nvSpPr>
+        <p:spPr>
+          <a:xfrm>
+            <a:off x="0" y="6565392"/>
+            <a:ext cx="12191695" cy="38100"/>
+          </a:xfrm>
+          <a:prstGeom prst="rect">
+            <a:avLst/>
+          </a:prstGeom>
+          <a:solidFill>
+            <a:srgbClr val="004488"/>
+          </a:solidFill>
+          <a:ln>
+            <a:noFill/>
+          </a:ln>
+          <a:effectLst/>
+        </p:spPr>
+        <p:style>
+          <a:lnRef idx="1">
+            <a:schemeClr val="accent1"/>
+          </a:lnRef>
+          <a:fillRef idx="3">
+            <a:schemeClr val="accent1"/>
+          </a:fillRef>
+          <a:effectRef idx="2">
+            <a:schemeClr val="accent1"/>
+          </a:effectRef>
+          <a:fontRef idx="minor">
+            <a:schemeClr val="lt1"/>
+          </a:fontRef>
+        </p:style>
+        <p:txBody>
+          <a:bodyPr rtlCol="0" anchor="ctr"/>
+          <a:lstStyle/>
+          <a:p>
+            <a:pPr algn="ctr"/>
+          </a:p>
+        </p:txBody>
+      </p:sp>
+      <p:sp>
+        <p:nvSpPr>
+          <p:cNvPr id="6" name="TextBox 5"/>
+          <p:cNvSpPr txBox="1"/>
+          <p:nvPr/>
+        </p:nvSpPr>
+        <p:spPr>
+          <a:xfrm>
+            <a:off x="502920" y="6400800"/>
+            <a:ext cx="5486400" cy="320040"/>
+          </a:xfrm>
+          <a:prstGeom prst="rect">
+            <a:avLst/>
+          </a:prstGeom>
+          <a:noFill/>
+        </p:spPr>
+        <p:txBody>
+          <a:bodyPr wrap="square" anchor="t" lIns="0" rIns="0" tIns="0" bIns="0">
+            <a:spAutoFit/>
+          </a:bodyPr>
+          <a:lstStyle/>
+          <a:p>
+            <a:r>
+              <a:rPr sz="1100" b="1" i="0">
+                <a:solidFill>
+                  <a:srgbClr val="2A2929"/>
+                </a:solidFill>
+                <a:latin typeface="Roboto"/>
+              </a:rPr>
+              <a:t>Kangan </a:t>
+            </a:r>
+            <a:r>
+              <a:rPr sz="1100" b="1" i="0">
+                <a:solidFill>
+                  <a:srgbClr val="D68E10"/>
+                </a:solidFill>
+                <a:latin typeface="Roboto"/>
+              </a:rPr>
+              <a:t>Institute</a:t>
+            </a:r>
+          </a:p>
+        </p:txBody>
+      </p:sp>
+      <p:sp>
+        <p:nvSpPr>
+          <p:cNvPr id="7" name="TextBox 6"/>
+          <p:cNvSpPr txBox="1"/>
+          <p:nvPr/>
+        </p:nvSpPr>
+        <p:spPr>
+          <a:xfrm>
+            <a:off x="10515600" y="6400800"/>
+            <a:ext cx="1188720" cy="320040"/>
+          </a:xfrm>
+          <a:prstGeom prst="rect">
+            <a:avLst/>
+          </a:prstGeom>
+          <a:noFill/>
+        </p:spPr>
+        <p:txBody>
+          <a:bodyPr wrap="square" anchor="t" lIns="0" rIns="0" tIns="0" bIns="0">
+            <a:spAutoFit/>
+          </a:bodyPr>
+          <a:lstStyle/>
+          <a:p>
+            <a:pPr algn="r"/>
+            <a:r>
+              <a:rPr sz="1100" b="0" i="0">
+                <a:solidFill>
+                  <a:srgbClr val="7A7A7A"/>
+                </a:solidFill>
+                <a:latin typeface="Roboto"/>
+              </a:rPr>
+              <a:t/>
+            </a:r>
+          </a:p>
+        </p:txBody>
+      </p:sp>
+    </p:spTree>
+  </p:cSld>
+  <p:clrMapOvr>
+    <a:masterClrMapping/>
+  </p:clrMapOvr>
+</p:sld>
+</file>
+
+<file path=ppt/slides/slide19.xml><?xml version="1.0" encoding="utf-8"?>
+<p:sld xmlns:a="http://schemas.openxmlformats.org/drawingml/2006/main" xmlns:p="http://schemas.openxmlformats.org/presentationml/2006/main" xmlns:r="http://schemas.openxmlformats.org/officeDocument/2006/relationships">
+  <p:cSld>
+    <p:bg>
+      <p:bgPr>
+        <a:solidFill>
+          <a:srgbClr val="FFFFFF"/>
+        </a:solidFill>
+        <a:effectLst/>
+      </p:bgPr>
+    </p:bg>
+    <p:spTree>
+      <p:nvGrpSpPr>
+        <p:cNvPr id="1" name=""/>
+        <p:cNvGrpSpPr/>
+        <p:nvPr/>
+      </p:nvGrpSpPr>
+      <p:grpSpPr/>
+      <p:sp>
+        <p:nvSpPr>
+          <p:cNvPr id="2" name="TextBox 1"/>
+          <p:cNvSpPr txBox="1"/>
+          <p:nvPr/>
+        </p:nvSpPr>
+        <p:spPr>
+          <a:xfrm>
+            <a:off x="640080" y="457200"/>
+            <a:ext cx="10881360" cy="960120"/>
+          </a:xfrm>
+          <a:prstGeom prst="rect">
+            <a:avLst/>
+          </a:prstGeom>
+          <a:noFill/>
+        </p:spPr>
+        <p:txBody>
+          <a:bodyPr wrap="square" anchor="t" lIns="0" rIns="0" tIns="0" bIns="0">
+            <a:spAutoFit/>
+          </a:bodyPr>
+          <a:lstStyle/>
+          <a:p>
+            <a:r>
+              <a:rPr sz="2800" b="1" i="0">
+                <a:solidFill>
+                  <a:srgbClr val="2A2929"/>
+                </a:solidFill>
+                <a:latin typeface="Roboto"/>
+              </a:rPr>
+              <a:t>The questions ask about your own design</a:t>
+            </a:r>
+          </a:p>
+        </p:txBody>
+      </p:sp>
+      <p:sp>
+        <p:nvSpPr>
+          <p:cNvPr id="3" name="Rectangle 2"/>
+          <p:cNvSpPr/>
+          <p:nvPr/>
+        </p:nvSpPr>
+        <p:spPr>
+          <a:xfrm>
+            <a:off x="658368" y="1371600"/>
+            <a:ext cx="1463040" cy="50800"/>
+          </a:xfrm>
+          <a:prstGeom prst="rect">
+            <a:avLst/>
+          </a:prstGeom>
+          <a:solidFill>
+            <a:srgbClr val="004488"/>
+          </a:solidFill>
+          <a:ln>
+            <a:noFill/>
+          </a:ln>
+          <a:effectLst/>
+        </p:spPr>
+        <p:style>
+          <a:lnRef idx="1">
+            <a:schemeClr val="accent1"/>
+          </a:lnRef>
+          <a:fillRef idx="3">
+            <a:schemeClr val="accent1"/>
+          </a:fillRef>
+          <a:effectRef idx="2">
+            <a:schemeClr val="accent1"/>
+          </a:effectRef>
+          <a:fontRef idx="minor">
+            <a:schemeClr val="lt1"/>
+          </a:fontRef>
+        </p:style>
+        <p:txBody>
+          <a:bodyPr rtlCol="0" anchor="ctr"/>
+          <a:lstStyle/>
+          <a:p>
+            <a:pPr algn="ctr"/>
+          </a:p>
+        </p:txBody>
+      </p:sp>
+      <p:sp>
+        <p:nvSpPr>
+          <p:cNvPr id="4" name="TextBox 3"/>
+          <p:cNvSpPr txBox="1"/>
+          <p:nvPr/>
+        </p:nvSpPr>
+        <p:spPr>
+          <a:xfrm>
+            <a:off x="658368" y="1691640"/>
+            <a:ext cx="10881360" cy="4480560"/>
+          </a:xfrm>
+          <a:prstGeom prst="rect">
+            <a:avLst/>
+          </a:prstGeom>
+          <a:noFill/>
+        </p:spPr>
+        <p:txBody>
+          <a:bodyPr wrap="square" anchor="ctr" lIns="0" rIns="0" tIns="0" bIns="0">
+            <a:spAutoFit/>
+          </a:bodyPr>
+          <a:lstStyle/>
+          <a:p>
+            <a:pPr marL="0" indent="0">
+              <a:lnSpc>
+                <a:spcPct val="105000"/>
+              </a:lnSpc>
+              <a:spcBef>
+                <a:spcPts val="0"/>
+              </a:spcBef>
+              <a:spcAft>
+                <a:spcPts val="1000"/>
+              </a:spcAft>
+            </a:pPr>
+            <a:r>
+              <a:rPr sz="2400" b="1" i="0">
+                <a:solidFill>
+                  <a:srgbClr val="EDAB0C"/>
+                </a:solidFill>
+                <a:latin typeface="Roboto"/>
+              </a:rPr>
+              <a:t>■  </a:t>
+            </a:r>
+            <a:r>
+              <a:rPr sz="2400" b="0" i="0">
+                <a:solidFill>
+                  <a:srgbClr val="2A2929"/>
+                </a:solidFill>
+                <a:latin typeface="Roboto"/>
+              </a:rPr>
+              <a:t>Two questions remain: the standards and standard products your design relies on, and what cloud adoption changed — with the migration principles that manage the change.</a:t>
+            </a:r>
+          </a:p>
+          <a:p>
+            <a:pPr marL="0" indent="0">
+              <a:lnSpc>
+                <a:spcPct val="105000"/>
+              </a:lnSpc>
+              <a:spcBef>
+                <a:spcPts val="0"/>
+              </a:spcBef>
+              <a:spcAft>
+                <a:spcPts val="1000"/>
+              </a:spcAft>
+            </a:pPr>
+            <a:r>
+              <a:rPr sz="2400" b="1" i="0">
+                <a:solidFill>
+                  <a:srgbClr val="EDAB0C"/>
+                </a:solidFill>
+                <a:latin typeface="Roboto"/>
+              </a:rPr>
+              <a:t>■  </a:t>
+            </a:r>
+            <a:r>
+              <a:rPr sz="2400" b="0" i="0">
+                <a:solidFill>
+                  <a:srgbClr val="2A2929"/>
+                </a:solidFill>
+                <a:latin typeface="Roboto"/>
+              </a:rPr>
+              <a:t>Every answer cites your own analysis and design — the review you ran, the options you weighed, the path you chose.</a:t>
+            </a:r>
+          </a:p>
+          <a:p>
+            <a:pPr marL="0" indent="0">
+              <a:lnSpc>
+                <a:spcPct val="105000"/>
+              </a:lnSpc>
+              <a:spcBef>
+                <a:spcPts val="0"/>
+              </a:spcBef>
+              <a:spcAft>
+                <a:spcPts val="1000"/>
+              </a:spcAft>
+            </a:pPr>
+            <a:r>
+              <a:rPr sz="2400" b="1" i="0">
+                <a:solidFill>
+                  <a:srgbClr val="EDAB0C"/>
+                </a:solidFill>
+                <a:latin typeface="Roboto"/>
+              </a:rPr>
+              <a:t>■  </a:t>
+            </a:r>
+            <a:r>
+              <a:rPr sz="2400" b="0" i="0">
+                <a:solidFill>
+                  <a:srgbClr val="2A2929"/>
+                </a:solidFill>
+                <a:latin typeface="Roboto"/>
+              </a:rPr>
+              <a:t>A textbook definition with none of your design in it answers nothing.</a:t>
+            </a:r>
+          </a:p>
+        </p:txBody>
+      </p:sp>
+      <p:sp>
+        <p:nvSpPr>
+          <p:cNvPr id="5" name="Rectangle 4"/>
+          <p:cNvSpPr/>
+          <p:nvPr/>
+        </p:nvSpPr>
+        <p:spPr>
+          <a:xfrm>
+            <a:off x="0" y="6565392"/>
+            <a:ext cx="12191695" cy="38100"/>
+          </a:xfrm>
+          <a:prstGeom prst="rect">
+            <a:avLst/>
+          </a:prstGeom>
+          <a:solidFill>
+            <a:srgbClr val="004488"/>
+          </a:solidFill>
+          <a:ln>
+            <a:noFill/>
+          </a:ln>
+          <a:effectLst/>
+        </p:spPr>
+        <p:style>
+          <a:lnRef idx="1">
+            <a:schemeClr val="accent1"/>
+          </a:lnRef>
+          <a:fillRef idx="3">
+            <a:schemeClr val="accent1"/>
+          </a:fillRef>
+          <a:effectRef idx="2">
+            <a:schemeClr val="accent1"/>
+          </a:effectRef>
+          <a:fontRef idx="minor">
+            <a:schemeClr val="lt1"/>
+          </a:fontRef>
+        </p:style>
+        <p:txBody>
+          <a:bodyPr rtlCol="0" anchor="ctr"/>
+          <a:lstStyle/>
+          <a:p>
+            <a:pPr algn="ctr"/>
+          </a:p>
+        </p:txBody>
+      </p:sp>
+      <p:sp>
+        <p:nvSpPr>
+          <p:cNvPr id="6" name="TextBox 5"/>
+          <p:cNvSpPr txBox="1"/>
+          <p:nvPr/>
+        </p:nvSpPr>
+        <p:spPr>
+          <a:xfrm>
+            <a:off x="502920" y="6400800"/>
+            <a:ext cx="5486400" cy="320040"/>
+          </a:xfrm>
+          <a:prstGeom prst="rect">
+            <a:avLst/>
+          </a:prstGeom>
+          <a:noFill/>
+        </p:spPr>
+        <p:txBody>
+          <a:bodyPr wrap="square" anchor="t" lIns="0" rIns="0" tIns="0" bIns="0">
+            <a:spAutoFit/>
+          </a:bodyPr>
+          <a:lstStyle/>
+          <a:p>
+            <a:r>
+              <a:rPr sz="1100" b="1" i="0">
+                <a:solidFill>
+                  <a:srgbClr val="2A2929"/>
+                </a:solidFill>
+                <a:latin typeface="Roboto"/>
+              </a:rPr>
+              <a:t>Kangan </a:t>
+            </a:r>
+            <a:r>
+              <a:rPr sz="1100" b="1" i="0">
+                <a:solidFill>
+                  <a:srgbClr val="D68E10"/>
+                </a:solidFill>
+                <a:latin typeface="Roboto"/>
+              </a:rPr>
+              <a:t>Institute</a:t>
+            </a:r>
+          </a:p>
+        </p:txBody>
+      </p:sp>
+      <p:sp>
+        <p:nvSpPr>
+          <p:cNvPr id="7" name="TextBox 6"/>
+          <p:cNvSpPr txBox="1"/>
+          <p:nvPr/>
+        </p:nvSpPr>
+        <p:spPr>
+          <a:xfrm>
+            <a:off x="10515600" y="6400800"/>
+            <a:ext cx="1188720" cy="320040"/>
+          </a:xfrm>
+          <a:prstGeom prst="rect">
+            <a:avLst/>
+          </a:prstGeom>
+          <a:noFill/>
+        </p:spPr>
+        <p:txBody>
+          <a:bodyPr wrap="square" anchor="t" lIns="0" rIns="0" tIns="0" bIns="0">
+            <a:spAutoFit/>
+          </a:bodyPr>
+          <a:lstStyle/>
+          <a:p>
+            <a:pPr algn="r"/>
+            <a:r>
+              <a:rPr sz="1100" b="0" i="0">
+                <a:solidFill>
+                  <a:srgbClr val="7A7A7A"/>
+                </a:solidFill>
+                <a:latin typeface="Roboto"/>
+              </a:rPr>
+              <a:t>14</a:t>
             </a:r>
           </a:p>
         </p:txBody>
@@ -6313,7 +8562,7 @@
                 </a:solidFill>
                 <a:latin typeface="Roboto"/>
               </a:rPr>
-              <a:t>Topics 1–3 produced the design; Topic 4 turns it into one reviewable Solution Design and gets it approved.</a:t>
+              <a:t>The design is complete; now it becomes one reviewable proposal: drawn, documented, presented, approved.</a:t>
             </a:r>
           </a:p>
           <a:p>
@@ -6344,7 +8593,7 @@
                 </a:solidFill>
                 <a:latin typeface="Roboto"/>
               </a:rPr>
-              <a:t>Two moves: document and present the proposed architecture, then obtain the sign-off to proceed to deployment.</a:t>
+              <a:t>The cost-benefit reasoning rides inside the proposal — there is no separate business case.</a:t>
             </a:r>
           </a:p>
           <a:p>
@@ -6375,9 +8624,335 @@
                 </a:solidFill>
                 <a:latin typeface="Roboto"/>
               </a:rPr>
-              <a:t>The cost-benefit reasoning rides inside the Solution Design — there is no separate business case.</a:t>
-            </a:r>
-          </a:p>
+              <a:t>This Topic ends with the sign-off that authorises the build.</a:t>
+            </a:r>
+          </a:p>
+        </p:txBody>
+      </p:sp>
+      <p:pic>
+        <p:nvPicPr>
+          <p:cNvPr id="5" name="Picture 4" descr="gen-251f9671.png"/>
+          <p:cNvPicPr>
+            <a:picLocks noChangeAspect="1"/>
+          </p:cNvPicPr>
+          <p:nvPr/>
+        </p:nvPicPr>
+        <p:blipFill>
+          <a:blip r:embed="rId2"/>
+          <a:stretch>
+            <a:fillRect/>
+          </a:stretch>
+        </p:blipFill>
+        <p:spPr>
+          <a:xfrm>
+            <a:off x="6949440" y="1783080"/>
+            <a:ext cx="4023360" cy="4023360"/>
+          </a:xfrm>
+          <a:prstGeom prst="rect">
+            <a:avLst/>
+          </a:prstGeom>
+        </p:spPr>
+      </p:pic>
+      <p:sp>
+        <p:nvSpPr>
+          <p:cNvPr id="6" name="Rectangle 5"/>
+          <p:cNvSpPr/>
+          <p:nvPr/>
+        </p:nvSpPr>
+        <p:spPr>
+          <a:xfrm>
+            <a:off x="0" y="6565392"/>
+            <a:ext cx="12191695" cy="38100"/>
+          </a:xfrm>
+          <a:prstGeom prst="rect">
+            <a:avLst/>
+          </a:prstGeom>
+          <a:solidFill>
+            <a:srgbClr val="EDAB0C"/>
+          </a:solidFill>
+          <a:ln>
+            <a:noFill/>
+          </a:ln>
+          <a:effectLst/>
+        </p:spPr>
+        <p:style>
+          <a:lnRef idx="1">
+            <a:schemeClr val="accent1"/>
+          </a:lnRef>
+          <a:fillRef idx="3">
+            <a:schemeClr val="accent1"/>
+          </a:fillRef>
+          <a:effectRef idx="2">
+            <a:schemeClr val="accent1"/>
+          </a:effectRef>
+          <a:fontRef idx="minor">
+            <a:schemeClr val="lt1"/>
+          </a:fontRef>
+        </p:style>
+        <p:txBody>
+          <a:bodyPr rtlCol="0" anchor="ctr"/>
+          <a:lstStyle/>
+          <a:p>
+            <a:pPr algn="ctr"/>
+          </a:p>
+        </p:txBody>
+      </p:sp>
+      <p:sp>
+        <p:nvSpPr>
+          <p:cNvPr id="7" name="TextBox 6"/>
+          <p:cNvSpPr txBox="1"/>
+          <p:nvPr/>
+        </p:nvSpPr>
+        <p:spPr>
+          <a:xfrm>
+            <a:off x="502920" y="6400800"/>
+            <a:ext cx="5486400" cy="320040"/>
+          </a:xfrm>
+          <a:prstGeom prst="rect">
+            <a:avLst/>
+          </a:prstGeom>
+          <a:noFill/>
+        </p:spPr>
+        <p:txBody>
+          <a:bodyPr wrap="square" anchor="t" lIns="0" rIns="0" tIns="0" bIns="0">
+            <a:spAutoFit/>
+          </a:bodyPr>
+          <a:lstStyle/>
+          <a:p>
+            <a:r>
+              <a:rPr sz="1100" b="1" i="0">
+                <a:solidFill>
+                  <a:srgbClr val="2A2929"/>
+                </a:solidFill>
+                <a:latin typeface="Roboto"/>
+              </a:rPr>
+              <a:t>Kangan </a:t>
+            </a:r>
+            <a:r>
+              <a:rPr sz="1100" b="1" i="0">
+                <a:solidFill>
+                  <a:srgbClr val="D68E10"/>
+                </a:solidFill>
+                <a:latin typeface="Roboto"/>
+              </a:rPr>
+              <a:t>Institute</a:t>
+            </a:r>
+          </a:p>
+        </p:txBody>
+      </p:sp>
+      <p:sp>
+        <p:nvSpPr>
+          <p:cNvPr id="8" name="TextBox 7"/>
+          <p:cNvSpPr txBox="1"/>
+          <p:nvPr/>
+        </p:nvSpPr>
+        <p:spPr>
+          <a:xfrm>
+            <a:off x="10515600" y="6400800"/>
+            <a:ext cx="1188720" cy="320040"/>
+          </a:xfrm>
+          <a:prstGeom prst="rect">
+            <a:avLst/>
+          </a:prstGeom>
+          <a:noFill/>
+        </p:spPr>
+        <p:txBody>
+          <a:bodyPr wrap="square" anchor="t" lIns="0" rIns="0" tIns="0" bIns="0">
+            <a:spAutoFit/>
+          </a:bodyPr>
+          <a:lstStyle/>
+          <a:p>
+            <a:pPr algn="r"/>
+            <a:r>
+              <a:rPr sz="1100" b="0" i="0">
+                <a:solidFill>
+                  <a:srgbClr val="7A7A7A"/>
+                </a:solidFill>
+                <a:latin typeface="Roboto"/>
+              </a:rPr>
+              <a:t>1</a:t>
+            </a:r>
+          </a:p>
+        </p:txBody>
+      </p:sp>
+    </p:spTree>
+  </p:cSld>
+  <p:clrMapOvr>
+    <a:masterClrMapping/>
+  </p:clrMapOvr>
+</p:sld>
+</file>
+
+<file path=ppt/slides/slide20.xml><?xml version="1.0" encoding="utf-8"?>
+<p:sld xmlns:a="http://schemas.openxmlformats.org/drawingml/2006/main" xmlns:p="http://schemas.openxmlformats.org/presentationml/2006/main" xmlns:r="http://schemas.openxmlformats.org/officeDocument/2006/relationships">
+  <p:cSld>
+    <p:bg>
+      <p:bgPr>
+        <a:solidFill>
+          <a:srgbClr val="FFFFFF"/>
+        </a:solidFill>
+        <a:effectLst/>
+      </p:bgPr>
+    </p:bg>
+    <p:spTree>
+      <p:nvGrpSpPr>
+        <p:cNvPr id="1" name=""/>
+        <p:cNvGrpSpPr/>
+        <p:nvPr/>
+      </p:nvGrpSpPr>
+      <p:grpSpPr/>
+      <p:sp>
+        <p:nvSpPr>
+          <p:cNvPr id="2" name="Rectangle 1"/>
+          <p:cNvSpPr/>
+          <p:nvPr/>
+        </p:nvSpPr>
+        <p:spPr>
+          <a:xfrm>
+            <a:off x="0" y="0"/>
+            <a:ext cx="12191695" cy="1234440"/>
+          </a:xfrm>
+          <a:prstGeom prst="rect">
+            <a:avLst/>
+          </a:prstGeom>
+          <a:solidFill>
+            <a:srgbClr val="004488"/>
+          </a:solidFill>
+          <a:ln>
+            <a:noFill/>
+          </a:ln>
+          <a:effectLst/>
+        </p:spPr>
+        <p:style>
+          <a:lnRef idx="1">
+            <a:schemeClr val="accent1"/>
+          </a:lnRef>
+          <a:fillRef idx="3">
+            <a:schemeClr val="accent1"/>
+          </a:fillRef>
+          <a:effectRef idx="2">
+            <a:schemeClr val="accent1"/>
+          </a:effectRef>
+          <a:fontRef idx="minor">
+            <a:schemeClr val="lt1"/>
+          </a:fontRef>
+        </p:style>
+        <p:txBody>
+          <a:bodyPr rtlCol="0" anchor="ctr"/>
+          <a:lstStyle/>
+          <a:p>
+            <a:pPr algn="ctr"/>
+          </a:p>
+        </p:txBody>
+      </p:sp>
+      <p:sp>
+        <p:nvSpPr>
+          <p:cNvPr id="3" name="Rounded Rectangle 2"/>
+          <p:cNvSpPr/>
+          <p:nvPr/>
+        </p:nvSpPr>
+        <p:spPr>
+          <a:xfrm>
+            <a:off x="640080" y="384048"/>
+            <a:ext cx="1691640" cy="457200"/>
+          </a:xfrm>
+          <a:prstGeom prst="roundRect">
+            <a:avLst/>
+          </a:prstGeom>
+          <a:solidFill>
+            <a:srgbClr val="2A2929"/>
+          </a:solidFill>
+          <a:ln>
+            <a:noFill/>
+          </a:ln>
+          <a:effectLst/>
+        </p:spPr>
+        <p:style>
+          <a:lnRef idx="1">
+            <a:schemeClr val="accent1"/>
+          </a:lnRef>
+          <a:fillRef idx="3">
+            <a:schemeClr val="accent1"/>
+          </a:fillRef>
+          <a:effectRef idx="2">
+            <a:schemeClr val="accent1"/>
+          </a:effectRef>
+          <a:fontRef idx="minor">
+            <a:schemeClr val="lt1"/>
+          </a:fontRef>
+        </p:style>
+        <p:txBody>
+          <a:bodyPr rtlCol="0" anchor="ctr"/>
+          <a:lstStyle/>
+          <a:p>
+            <a:pPr algn="ctr"/>
+            <a:r>
+              <a:rPr sz="1400" b="1" i="0">
+                <a:solidFill>
+                  <a:srgbClr val="FBB900"/>
+                </a:solidFill>
+                <a:latin typeface="Roboto"/>
+              </a:rPr>
+              <a:t>ACTIVITY</a:t>
+            </a:r>
+          </a:p>
+        </p:txBody>
+      </p:sp>
+      <p:sp>
+        <p:nvSpPr>
+          <p:cNvPr id="4" name="TextBox 3"/>
+          <p:cNvSpPr txBox="1"/>
+          <p:nvPr/>
+        </p:nvSpPr>
+        <p:spPr>
+          <a:xfrm>
+            <a:off x="2560320" y="310896"/>
+            <a:ext cx="8961120" cy="685800"/>
+          </a:xfrm>
+          <a:prstGeom prst="rect">
+            <a:avLst/>
+          </a:prstGeom>
+          <a:noFill/>
+        </p:spPr>
+        <p:txBody>
+          <a:bodyPr wrap="square" anchor="ctr" lIns="0" rIns="0" tIns="0" bIns="0">
+            <a:spAutoFit/>
+          </a:bodyPr>
+          <a:lstStyle/>
+          <a:p>
+            <a:r>
+              <a:rPr sz="2600" b="1" i="0">
+                <a:solidFill>
+                  <a:srgbClr val="FFFFFF"/>
+                </a:solidFill>
+                <a:latin typeface="Roboto"/>
+              </a:rPr>
+              <a:t>Answer the questions</a:t>
+            </a:r>
+          </a:p>
+        </p:txBody>
+      </p:sp>
+      <p:sp>
+        <p:nvSpPr>
+          <p:cNvPr id="5" name="TextBox 4"/>
+          <p:cNvSpPr txBox="1"/>
+          <p:nvPr/>
+        </p:nvSpPr>
+        <p:spPr>
+          <a:xfrm>
+            <a:off x="658368" y="1554480"/>
+            <a:ext cx="10881360" cy="4297680"/>
+          </a:xfrm>
+          <a:prstGeom prst="rect">
+            <a:avLst/>
+          </a:prstGeom>
+          <a:noFill/>
+        </p:spPr>
+        <p:txBody>
+          <a:bodyPr wrap="square" anchor="t" lIns="0" rIns="0" tIns="0" bIns="0">
+            <a:spAutoFit/>
+          </a:bodyPr>
+          <a:lstStyle/>
           <a:p>
             <a:pPr marL="0" indent="0">
               <a:lnSpc>
@@ -6406,38 +8981,125 @@
                 </a:solidFill>
                 <a:latin typeface="Roboto"/>
               </a:rPr>
-              <a:t>Design only — this is the AT1 deliverable and its approval gate; the build is AT2/AT3.</a:t>
-            </a:r>
-          </a:p>
-        </p:txBody>
-      </p:sp>
-      <p:pic>
-        <p:nvPicPr>
-          <p:cNvPr id="5" name="Picture 4" descr="gen-251f9671.png"/>
-          <p:cNvPicPr>
-            <a:picLocks noChangeAspect="1"/>
-          </p:cNvPicPr>
-          <p:nvPr/>
-        </p:nvPicPr>
-        <p:blipFill>
-          <a:blip r:embed="rId2"/>
-          <a:stretch>
-            <a:fillRect/>
-          </a:stretch>
-        </p:blipFill>
-        <p:spPr>
-          <a:xfrm>
-            <a:off x="6949440" y="1783080"/>
-            <a:ext cx="4023360" cy="4023360"/>
-          </a:xfrm>
-          <a:prstGeom prst="rect">
-            <a:avLst/>
-          </a:prstGeom>
-        </p:spPr>
-      </p:pic>
-      <p:sp>
-        <p:nvSpPr>
-          <p:cNvPr id="6" name="Rectangle 5"/>
+              <a:t>The assessment's questions Q1 and Q3, rehearsed from your practice design.</a:t>
+            </a:r>
+          </a:p>
+          <a:p>
+            <a:pPr marL="0" indent="0">
+              <a:lnSpc>
+                <a:spcPct val="105000"/>
+              </a:lnSpc>
+              <a:spcBef>
+                <a:spcPts val="0"/>
+              </a:spcBef>
+              <a:spcAft>
+                <a:spcPts val="1000"/>
+              </a:spcAft>
+            </a:pPr>
+            <a:r>
+              <a:rPr sz="1700" b="1" i="0">
+                <a:solidFill>
+                  <a:srgbClr val="EDAB0C"/>
+                </a:solidFill>
+                <a:latin typeface="Roboto"/>
+              </a:rPr>
+              <a:t>■  </a:t>
+            </a:r>
+            <a:r>
+              <a:rPr sz="1700" b="0" i="0">
+                <a:solidFill>
+                  <a:srgbClr val="2A2929"/>
+                </a:solidFill>
+                <a:latin typeface="Roboto"/>
+              </a:rPr>
+              <a:t>Answer from your own work: the standards and products your build relies on, and what cloud adoption changed for this system.</a:t>
+            </a:r>
+          </a:p>
+        </p:txBody>
+      </p:sp>
+      <p:sp>
+        <p:nvSpPr>
+          <p:cNvPr id="6" name="Rounded Rectangle 5"/>
+          <p:cNvSpPr/>
+          <p:nvPr/>
+        </p:nvSpPr>
+        <p:spPr>
+          <a:xfrm>
+            <a:off x="640080" y="5897880"/>
+            <a:ext cx="4023360" cy="457200"/>
+          </a:xfrm>
+          <a:prstGeom prst="roundRect">
+            <a:avLst/>
+          </a:prstGeom>
+          <a:solidFill>
+            <a:srgbClr val="F9F9F9"/>
+          </a:solidFill>
+          <a:ln w="12700">
+            <a:solidFill>
+              <a:srgbClr val="CCCCCC"/>
+            </a:solidFill>
+          </a:ln>
+          <a:effectLst/>
+        </p:spPr>
+        <p:style>
+          <a:lnRef idx="1">
+            <a:schemeClr val="accent1"/>
+          </a:lnRef>
+          <a:fillRef idx="3">
+            <a:schemeClr val="accent1"/>
+          </a:fillRef>
+          <a:effectRef idx="2">
+            <a:schemeClr val="accent1"/>
+          </a:effectRef>
+          <a:fontRef idx="minor">
+            <a:schemeClr val="lt1"/>
+          </a:fontRef>
+        </p:style>
+        <p:txBody>
+          <a:bodyPr rtlCol="0" anchor="ctr"/>
+          <a:lstStyle/>
+          <a:p>
+            <a:pPr algn="ctr"/>
+          </a:p>
+        </p:txBody>
+      </p:sp>
+      <p:sp>
+        <p:nvSpPr>
+          <p:cNvPr id="7" name="TextBox 6"/>
+          <p:cNvSpPr txBox="1"/>
+          <p:nvPr/>
+        </p:nvSpPr>
+        <p:spPr>
+          <a:xfrm>
+            <a:off x="822960" y="5943600"/>
+            <a:ext cx="3657600" cy="365760"/>
+          </a:xfrm>
+          <a:prstGeom prst="rect">
+            <a:avLst/>
+          </a:prstGeom>
+          <a:noFill/>
+        </p:spPr>
+        <p:txBody>
+          <a:bodyPr wrap="square" anchor="ctr" lIns="0" rIns="0" tIns="0" bIns="0">
+            <a:spAutoFit/>
+          </a:bodyPr>
+          <a:lstStyle/>
+          <a:p>
+            <a:r>
+              <a:rPr sz="1500" b="1" i="0">
+                <a:solidFill>
+                  <a:srgbClr val="2A2929"/>
+                </a:solidFill>
+                <a:latin typeface="Roboto"/>
+              </a:rPr>
+              <a:t>⏱  ~20 min</a:t>
+            </a:r>
+          </a:p>
+        </p:txBody>
+      </p:sp>
+      <p:sp>
+        <p:nvSpPr>
+          <p:cNvPr id="8" name="Rectangle 7"/>
           <p:cNvSpPr/>
           <p:nvPr/>
         </p:nvSpPr>
@@ -6445,6 +9107,912 @@
           <a:xfrm>
             <a:off x="0" y="6565392"/>
             <a:ext cx="12191695" cy="38100"/>
+          </a:xfrm>
+          <a:prstGeom prst="rect">
+            <a:avLst/>
+          </a:prstGeom>
+          <a:solidFill>
+            <a:srgbClr val="004488"/>
+          </a:solidFill>
+          <a:ln>
+            <a:noFill/>
+          </a:ln>
+          <a:effectLst/>
+        </p:spPr>
+        <p:style>
+          <a:lnRef idx="1">
+            <a:schemeClr val="accent1"/>
+          </a:lnRef>
+          <a:fillRef idx="3">
+            <a:schemeClr val="accent1"/>
+          </a:fillRef>
+          <a:effectRef idx="2">
+            <a:schemeClr val="accent1"/>
+          </a:effectRef>
+          <a:fontRef idx="minor">
+            <a:schemeClr val="lt1"/>
+          </a:fontRef>
+        </p:style>
+        <p:txBody>
+          <a:bodyPr rtlCol="0" anchor="ctr"/>
+          <a:lstStyle/>
+          <a:p>
+            <a:pPr algn="ctr"/>
+          </a:p>
+        </p:txBody>
+      </p:sp>
+      <p:sp>
+        <p:nvSpPr>
+          <p:cNvPr id="9" name="TextBox 8"/>
+          <p:cNvSpPr txBox="1"/>
+          <p:nvPr/>
+        </p:nvSpPr>
+        <p:spPr>
+          <a:xfrm>
+            <a:off x="502920" y="6400800"/>
+            <a:ext cx="5486400" cy="320040"/>
+          </a:xfrm>
+          <a:prstGeom prst="rect">
+            <a:avLst/>
+          </a:prstGeom>
+          <a:noFill/>
+        </p:spPr>
+        <p:txBody>
+          <a:bodyPr wrap="square" anchor="t" lIns="0" rIns="0" tIns="0" bIns="0">
+            <a:spAutoFit/>
+          </a:bodyPr>
+          <a:lstStyle/>
+          <a:p>
+            <a:r>
+              <a:rPr sz="1100" b="1" i="0">
+                <a:solidFill>
+                  <a:srgbClr val="2A2929"/>
+                </a:solidFill>
+                <a:latin typeface="Roboto"/>
+              </a:rPr>
+              <a:t>Kangan </a:t>
+            </a:r>
+            <a:r>
+              <a:rPr sz="1100" b="1" i="0">
+                <a:solidFill>
+                  <a:srgbClr val="D68E10"/>
+                </a:solidFill>
+                <a:latin typeface="Roboto"/>
+              </a:rPr>
+              <a:t>Institute</a:t>
+            </a:r>
+          </a:p>
+        </p:txBody>
+      </p:sp>
+      <p:sp>
+        <p:nvSpPr>
+          <p:cNvPr id="10" name="TextBox 9"/>
+          <p:cNvSpPr txBox="1"/>
+          <p:nvPr/>
+        </p:nvSpPr>
+        <p:spPr>
+          <a:xfrm>
+            <a:off x="10515600" y="6400800"/>
+            <a:ext cx="1188720" cy="320040"/>
+          </a:xfrm>
+          <a:prstGeom prst="rect">
+            <a:avLst/>
+          </a:prstGeom>
+          <a:noFill/>
+        </p:spPr>
+        <p:txBody>
+          <a:bodyPr wrap="square" anchor="t" lIns="0" rIns="0" tIns="0" bIns="0">
+            <a:spAutoFit/>
+          </a:bodyPr>
+          <a:lstStyle/>
+          <a:p>
+            <a:pPr algn="r"/>
+            <a:r>
+              <a:rPr sz="1100" b="0" i="0">
+                <a:solidFill>
+                  <a:srgbClr val="7A7A7A"/>
+                </a:solidFill>
+                <a:latin typeface="Roboto"/>
+              </a:rPr>
+              <a:t>15</a:t>
+            </a:r>
+          </a:p>
+        </p:txBody>
+      </p:sp>
+    </p:spTree>
+  </p:cSld>
+  <p:clrMapOvr>
+    <a:masterClrMapping/>
+  </p:clrMapOvr>
+</p:sld>
+</file>
+
+<file path=ppt/slides/slide21.xml><?xml version="1.0" encoding="utf-8"?>
+<p:sld xmlns:a="http://schemas.openxmlformats.org/drawingml/2006/main" xmlns:p="http://schemas.openxmlformats.org/presentationml/2006/main" xmlns:r="http://schemas.openxmlformats.org/officeDocument/2006/relationships">
+  <p:cSld>
+    <p:bg>
+      <p:bgPr>
+        <a:solidFill>
+          <a:srgbClr val="F9F9F9"/>
+        </a:solidFill>
+        <a:effectLst/>
+      </p:bgPr>
+    </p:bg>
+    <p:spTree>
+      <p:nvGrpSpPr>
+        <p:cNvPr id="1" name=""/>
+        <p:cNvGrpSpPr/>
+        <p:nvPr/>
+      </p:nvGrpSpPr>
+      <p:grpSpPr/>
+      <p:sp>
+        <p:nvSpPr>
+          <p:cNvPr id="2" name="TextBox 1"/>
+          <p:cNvSpPr txBox="1"/>
+          <p:nvPr/>
+        </p:nvSpPr>
+        <p:spPr>
+          <a:xfrm>
+            <a:off x="640080" y="548640"/>
+            <a:ext cx="10881360" cy="1097280"/>
+          </a:xfrm>
+          <a:prstGeom prst="rect">
+            <a:avLst/>
+          </a:prstGeom>
+          <a:noFill/>
+        </p:spPr>
+        <p:txBody>
+          <a:bodyPr wrap="square" anchor="t" lIns="0" rIns="0" tIns="0" bIns="0">
+            <a:spAutoFit/>
+          </a:bodyPr>
+          <a:lstStyle/>
+          <a:p>
+            <a:r>
+              <a:rPr sz="3200" b="1" i="0">
+                <a:solidFill>
+                  <a:srgbClr val="2A2929"/>
+                </a:solidFill>
+                <a:latin typeface="Roboto"/>
+              </a:rPr>
+              <a:t>Key takeaways</a:t>
+            </a:r>
+          </a:p>
+          <a:p>
+            <a:pPr>
+              <a:spcBef>
+                <a:spcPts val="200"/>
+              </a:spcBef>
+            </a:pPr>
+            <a:r>
+              <a:rPr sz="1800" b="1" i="0">
+                <a:solidFill>
+                  <a:srgbClr val="004488"/>
+                </a:solidFill>
+                <a:latin typeface="Roboto"/>
+              </a:rPr>
+              <a:t>Topic 4 · Key takeaways</a:t>
+            </a:r>
+          </a:p>
+        </p:txBody>
+      </p:sp>
+      <p:sp>
+        <p:nvSpPr>
+          <p:cNvPr id="3" name="Rectangle 2"/>
+          <p:cNvSpPr/>
+          <p:nvPr/>
+        </p:nvSpPr>
+        <p:spPr>
+          <a:xfrm>
+            <a:off x="658368" y="1600200"/>
+            <a:ext cx="1463040" cy="50800"/>
+          </a:xfrm>
+          <a:prstGeom prst="rect">
+            <a:avLst/>
+          </a:prstGeom>
+          <a:solidFill>
+            <a:srgbClr val="004488"/>
+          </a:solidFill>
+          <a:ln>
+            <a:noFill/>
+          </a:ln>
+          <a:effectLst/>
+        </p:spPr>
+        <p:style>
+          <a:lnRef idx="1">
+            <a:schemeClr val="accent1"/>
+          </a:lnRef>
+          <a:fillRef idx="3">
+            <a:schemeClr val="accent1"/>
+          </a:fillRef>
+          <a:effectRef idx="2">
+            <a:schemeClr val="accent1"/>
+          </a:effectRef>
+          <a:fontRef idx="minor">
+            <a:schemeClr val="lt1"/>
+          </a:fontRef>
+        </p:style>
+        <p:txBody>
+          <a:bodyPr rtlCol="0" anchor="ctr"/>
+          <a:lstStyle/>
+          <a:p>
+            <a:pPr algn="ctr"/>
+          </a:p>
+        </p:txBody>
+      </p:sp>
+      <p:sp>
+        <p:nvSpPr>
+          <p:cNvPr id="4" name="Rectangle 3"/>
+          <p:cNvSpPr/>
+          <p:nvPr/>
+        </p:nvSpPr>
+        <p:spPr>
+          <a:xfrm>
+            <a:off x="640080" y="1965960"/>
+            <a:ext cx="10927080" cy="841248"/>
+          </a:xfrm>
+          <a:prstGeom prst="rect">
+            <a:avLst/>
+          </a:prstGeom>
+          <a:solidFill>
+            <a:srgbClr val="FFFFFF"/>
+          </a:solidFill>
+          <a:ln w="12700">
+            <a:solidFill>
+              <a:srgbClr val="CCCCCC"/>
+            </a:solidFill>
+          </a:ln>
+          <a:effectLst/>
+        </p:spPr>
+        <p:style>
+          <a:lnRef idx="1">
+            <a:schemeClr val="accent1"/>
+          </a:lnRef>
+          <a:fillRef idx="3">
+            <a:schemeClr val="accent1"/>
+          </a:fillRef>
+          <a:effectRef idx="2">
+            <a:schemeClr val="accent1"/>
+          </a:effectRef>
+          <a:fontRef idx="minor">
+            <a:schemeClr val="lt1"/>
+          </a:fontRef>
+        </p:style>
+        <p:txBody>
+          <a:bodyPr rtlCol="0" anchor="ctr"/>
+          <a:lstStyle/>
+          <a:p>
+            <a:pPr algn="ctr"/>
+          </a:p>
+        </p:txBody>
+      </p:sp>
+      <p:sp>
+        <p:nvSpPr>
+          <p:cNvPr id="5" name="Rectangle 4"/>
+          <p:cNvSpPr/>
+          <p:nvPr/>
+        </p:nvSpPr>
+        <p:spPr>
+          <a:xfrm>
+            <a:off x="640080" y="1965960"/>
+            <a:ext cx="109728" cy="841248"/>
+          </a:xfrm>
+          <a:prstGeom prst="rect">
+            <a:avLst/>
+          </a:prstGeom>
+          <a:solidFill>
+            <a:srgbClr val="004488"/>
+          </a:solidFill>
+          <a:ln>
+            <a:noFill/>
+          </a:ln>
+          <a:effectLst/>
+        </p:spPr>
+        <p:style>
+          <a:lnRef idx="1">
+            <a:schemeClr val="accent1"/>
+          </a:lnRef>
+          <a:fillRef idx="3">
+            <a:schemeClr val="accent1"/>
+          </a:fillRef>
+          <a:effectRef idx="2">
+            <a:schemeClr val="accent1"/>
+          </a:effectRef>
+          <a:fontRef idx="minor">
+            <a:schemeClr val="lt1"/>
+          </a:fontRef>
+        </p:style>
+        <p:txBody>
+          <a:bodyPr rtlCol="0" anchor="ctr"/>
+          <a:lstStyle/>
+          <a:p>
+            <a:pPr algn="ctr"/>
+          </a:p>
+        </p:txBody>
+      </p:sp>
+      <p:sp>
+        <p:nvSpPr>
+          <p:cNvPr id="6" name="TextBox 5"/>
+          <p:cNvSpPr txBox="1"/>
+          <p:nvPr/>
+        </p:nvSpPr>
+        <p:spPr>
+          <a:xfrm>
+            <a:off x="960120" y="1965960"/>
+            <a:ext cx="10424160" cy="841248"/>
+          </a:xfrm>
+          <a:prstGeom prst="rect">
+            <a:avLst/>
+          </a:prstGeom>
+          <a:noFill/>
+        </p:spPr>
+        <p:txBody>
+          <a:bodyPr wrap="square" anchor="ctr" lIns="0" rIns="0" tIns="0" bIns="0">
+            <a:spAutoFit/>
+          </a:bodyPr>
+          <a:lstStyle/>
+          <a:p>
+            <a:pPr>
+              <a:lnSpc>
+                <a:spcPct val="100000"/>
+              </a:lnSpc>
+            </a:pPr>
+            <a:r>
+              <a:rPr sz="1700" b="0" i="0">
+                <a:solidFill>
+                  <a:srgbClr val="2A2929"/>
+                </a:solidFill>
+                <a:latin typeface="Roboto"/>
+              </a:rPr>
+              <a:t>Drawn, documented, presented, approved — one proposal, internally consistent.</a:t>
+            </a:r>
+          </a:p>
+        </p:txBody>
+      </p:sp>
+      <p:sp>
+        <p:nvSpPr>
+          <p:cNvPr id="7" name="Rectangle 6"/>
+          <p:cNvSpPr/>
+          <p:nvPr/>
+        </p:nvSpPr>
+        <p:spPr>
+          <a:xfrm>
+            <a:off x="640080" y="2916936"/>
+            <a:ext cx="10927080" cy="841248"/>
+          </a:xfrm>
+          <a:prstGeom prst="rect">
+            <a:avLst/>
+          </a:prstGeom>
+          <a:solidFill>
+            <a:srgbClr val="FFFFFF"/>
+          </a:solidFill>
+          <a:ln w="12700">
+            <a:solidFill>
+              <a:srgbClr val="CCCCCC"/>
+            </a:solidFill>
+          </a:ln>
+          <a:effectLst/>
+        </p:spPr>
+        <p:style>
+          <a:lnRef idx="1">
+            <a:schemeClr val="accent1"/>
+          </a:lnRef>
+          <a:fillRef idx="3">
+            <a:schemeClr val="accent1"/>
+          </a:fillRef>
+          <a:effectRef idx="2">
+            <a:schemeClr val="accent1"/>
+          </a:effectRef>
+          <a:fontRef idx="minor">
+            <a:schemeClr val="lt1"/>
+          </a:fontRef>
+        </p:style>
+        <p:txBody>
+          <a:bodyPr rtlCol="0" anchor="ctr"/>
+          <a:lstStyle/>
+          <a:p>
+            <a:pPr algn="ctr"/>
+          </a:p>
+        </p:txBody>
+      </p:sp>
+      <p:sp>
+        <p:nvSpPr>
+          <p:cNvPr id="8" name="Rectangle 7"/>
+          <p:cNvSpPr/>
+          <p:nvPr/>
+        </p:nvSpPr>
+        <p:spPr>
+          <a:xfrm>
+            <a:off x="640080" y="2916936"/>
+            <a:ext cx="109728" cy="841248"/>
+          </a:xfrm>
+          <a:prstGeom prst="rect">
+            <a:avLst/>
+          </a:prstGeom>
+          <a:solidFill>
+            <a:srgbClr val="004488"/>
+          </a:solidFill>
+          <a:ln>
+            <a:noFill/>
+          </a:ln>
+          <a:effectLst/>
+        </p:spPr>
+        <p:style>
+          <a:lnRef idx="1">
+            <a:schemeClr val="accent1"/>
+          </a:lnRef>
+          <a:fillRef idx="3">
+            <a:schemeClr val="accent1"/>
+          </a:fillRef>
+          <a:effectRef idx="2">
+            <a:schemeClr val="accent1"/>
+          </a:effectRef>
+          <a:fontRef idx="minor">
+            <a:schemeClr val="lt1"/>
+          </a:fontRef>
+        </p:style>
+        <p:txBody>
+          <a:bodyPr rtlCol="0" anchor="ctr"/>
+          <a:lstStyle/>
+          <a:p>
+            <a:pPr algn="ctr"/>
+          </a:p>
+        </p:txBody>
+      </p:sp>
+      <p:sp>
+        <p:nvSpPr>
+          <p:cNvPr id="9" name="TextBox 8"/>
+          <p:cNvSpPr txBox="1"/>
+          <p:nvPr/>
+        </p:nvSpPr>
+        <p:spPr>
+          <a:xfrm>
+            <a:off x="960120" y="2916936"/>
+            <a:ext cx="10424160" cy="841248"/>
+          </a:xfrm>
+          <a:prstGeom prst="rect">
+            <a:avLst/>
+          </a:prstGeom>
+          <a:noFill/>
+        </p:spPr>
+        <p:txBody>
+          <a:bodyPr wrap="square" anchor="ctr" lIns="0" rIns="0" tIns="0" bIns="0">
+            <a:spAutoFit/>
+          </a:bodyPr>
+          <a:lstStyle/>
+          <a:p>
+            <a:pPr>
+              <a:lnSpc>
+                <a:spcPct val="100000"/>
+              </a:lnSpc>
+            </a:pPr>
+            <a:r>
+              <a:rPr sz="1700" b="0" i="0">
+                <a:solidFill>
+                  <a:srgbClr val="2A2929"/>
+                </a:solidFill>
+                <a:latin typeface="Roboto"/>
+              </a:rPr>
+              <a:t>The rejection argued is the strongest section.</a:t>
+            </a:r>
+          </a:p>
+        </p:txBody>
+      </p:sp>
+      <p:sp>
+        <p:nvSpPr>
+          <p:cNvPr id="10" name="Rectangle 9"/>
+          <p:cNvSpPr/>
+          <p:nvPr/>
+        </p:nvSpPr>
+        <p:spPr>
+          <a:xfrm>
+            <a:off x="640080" y="3867912"/>
+            <a:ext cx="10927080" cy="841248"/>
+          </a:xfrm>
+          <a:prstGeom prst="rect">
+            <a:avLst/>
+          </a:prstGeom>
+          <a:solidFill>
+            <a:srgbClr val="FFFFFF"/>
+          </a:solidFill>
+          <a:ln w="12700">
+            <a:solidFill>
+              <a:srgbClr val="CCCCCC"/>
+            </a:solidFill>
+          </a:ln>
+          <a:effectLst/>
+        </p:spPr>
+        <p:style>
+          <a:lnRef idx="1">
+            <a:schemeClr val="accent1"/>
+          </a:lnRef>
+          <a:fillRef idx="3">
+            <a:schemeClr val="accent1"/>
+          </a:fillRef>
+          <a:effectRef idx="2">
+            <a:schemeClr val="accent1"/>
+          </a:effectRef>
+          <a:fontRef idx="minor">
+            <a:schemeClr val="lt1"/>
+          </a:fontRef>
+        </p:style>
+        <p:txBody>
+          <a:bodyPr rtlCol="0" anchor="ctr"/>
+          <a:lstStyle/>
+          <a:p>
+            <a:pPr algn="ctr"/>
+          </a:p>
+        </p:txBody>
+      </p:sp>
+      <p:sp>
+        <p:nvSpPr>
+          <p:cNvPr id="11" name="Rectangle 10"/>
+          <p:cNvSpPr/>
+          <p:nvPr/>
+        </p:nvSpPr>
+        <p:spPr>
+          <a:xfrm>
+            <a:off x="640080" y="3867912"/>
+            <a:ext cx="109728" cy="841248"/>
+          </a:xfrm>
+          <a:prstGeom prst="rect">
+            <a:avLst/>
+          </a:prstGeom>
+          <a:solidFill>
+            <a:srgbClr val="004488"/>
+          </a:solidFill>
+          <a:ln>
+            <a:noFill/>
+          </a:ln>
+          <a:effectLst/>
+        </p:spPr>
+        <p:style>
+          <a:lnRef idx="1">
+            <a:schemeClr val="accent1"/>
+          </a:lnRef>
+          <a:fillRef idx="3">
+            <a:schemeClr val="accent1"/>
+          </a:fillRef>
+          <a:effectRef idx="2">
+            <a:schemeClr val="accent1"/>
+          </a:effectRef>
+          <a:fontRef idx="minor">
+            <a:schemeClr val="lt1"/>
+          </a:fontRef>
+        </p:style>
+        <p:txBody>
+          <a:bodyPr rtlCol="0" anchor="ctr"/>
+          <a:lstStyle/>
+          <a:p>
+            <a:pPr algn="ctr"/>
+          </a:p>
+        </p:txBody>
+      </p:sp>
+      <p:sp>
+        <p:nvSpPr>
+          <p:cNvPr id="12" name="TextBox 11"/>
+          <p:cNvSpPr txBox="1"/>
+          <p:nvPr/>
+        </p:nvSpPr>
+        <p:spPr>
+          <a:xfrm>
+            <a:off x="960120" y="3867912"/>
+            <a:ext cx="10424160" cy="841248"/>
+          </a:xfrm>
+          <a:prstGeom prst="rect">
+            <a:avLst/>
+          </a:prstGeom>
+          <a:noFill/>
+        </p:spPr>
+        <p:txBody>
+          <a:bodyPr wrap="square" anchor="ctr" lIns="0" rIns="0" tIns="0" bIns="0">
+            <a:spAutoFit/>
+          </a:bodyPr>
+          <a:lstStyle/>
+          <a:p>
+            <a:pPr>
+              <a:lnSpc>
+                <a:spcPct val="100000"/>
+              </a:lnSpc>
+            </a:pPr>
+            <a:r>
+              <a:rPr sz="1700" b="0" i="0">
+                <a:solidFill>
+                  <a:srgbClr val="2A2929"/>
+                </a:solidFill>
+                <a:latin typeface="Roboto"/>
+              </a:rPr>
+              <a:t>Approval recorded; the build is authorised.</a:t>
+            </a:r>
+          </a:p>
+        </p:txBody>
+      </p:sp>
+      <p:sp>
+        <p:nvSpPr>
+          <p:cNvPr id="13" name="Rectangle 12"/>
+          <p:cNvSpPr/>
+          <p:nvPr/>
+        </p:nvSpPr>
+        <p:spPr>
+          <a:xfrm>
+            <a:off x="640080" y="4818888"/>
+            <a:ext cx="10927080" cy="841248"/>
+          </a:xfrm>
+          <a:prstGeom prst="rect">
+            <a:avLst/>
+          </a:prstGeom>
+          <a:solidFill>
+            <a:srgbClr val="FFFFFF"/>
+          </a:solidFill>
+          <a:ln w="12700">
+            <a:solidFill>
+              <a:srgbClr val="CCCCCC"/>
+            </a:solidFill>
+          </a:ln>
+          <a:effectLst/>
+        </p:spPr>
+        <p:style>
+          <a:lnRef idx="1">
+            <a:schemeClr val="accent1"/>
+          </a:lnRef>
+          <a:fillRef idx="3">
+            <a:schemeClr val="accent1"/>
+          </a:fillRef>
+          <a:effectRef idx="2">
+            <a:schemeClr val="accent1"/>
+          </a:effectRef>
+          <a:fontRef idx="minor">
+            <a:schemeClr val="lt1"/>
+          </a:fontRef>
+        </p:style>
+        <p:txBody>
+          <a:bodyPr rtlCol="0" anchor="ctr"/>
+          <a:lstStyle/>
+          <a:p>
+            <a:pPr algn="ctr"/>
+          </a:p>
+        </p:txBody>
+      </p:sp>
+      <p:sp>
+        <p:nvSpPr>
+          <p:cNvPr id="14" name="Rectangle 13"/>
+          <p:cNvSpPr/>
+          <p:nvPr/>
+        </p:nvSpPr>
+        <p:spPr>
+          <a:xfrm>
+            <a:off x="640080" y="4818888"/>
+            <a:ext cx="109728" cy="841248"/>
+          </a:xfrm>
+          <a:prstGeom prst="rect">
+            <a:avLst/>
+          </a:prstGeom>
+          <a:solidFill>
+            <a:srgbClr val="004488"/>
+          </a:solidFill>
+          <a:ln>
+            <a:noFill/>
+          </a:ln>
+          <a:effectLst/>
+        </p:spPr>
+        <p:style>
+          <a:lnRef idx="1">
+            <a:schemeClr val="accent1"/>
+          </a:lnRef>
+          <a:fillRef idx="3">
+            <a:schemeClr val="accent1"/>
+          </a:fillRef>
+          <a:effectRef idx="2">
+            <a:schemeClr val="accent1"/>
+          </a:effectRef>
+          <a:fontRef idx="minor">
+            <a:schemeClr val="lt1"/>
+          </a:fontRef>
+        </p:style>
+        <p:txBody>
+          <a:bodyPr rtlCol="0" anchor="ctr"/>
+          <a:lstStyle/>
+          <a:p>
+            <a:pPr algn="ctr"/>
+          </a:p>
+        </p:txBody>
+      </p:sp>
+      <p:sp>
+        <p:nvSpPr>
+          <p:cNvPr id="15" name="TextBox 14"/>
+          <p:cNvSpPr txBox="1"/>
+          <p:nvPr/>
+        </p:nvSpPr>
+        <p:spPr>
+          <a:xfrm>
+            <a:off x="960120" y="4818888"/>
+            <a:ext cx="10424160" cy="841248"/>
+          </a:xfrm>
+          <a:prstGeom prst="rect">
+            <a:avLst/>
+          </a:prstGeom>
+          <a:noFill/>
+        </p:spPr>
+        <p:txBody>
+          <a:bodyPr wrap="square" anchor="ctr" lIns="0" rIns="0" tIns="0" bIns="0">
+            <a:spAutoFit/>
+          </a:bodyPr>
+          <a:lstStyle/>
+          <a:p>
+            <a:pPr>
+              <a:lnSpc>
+                <a:spcPct val="100000"/>
+              </a:lnSpc>
+            </a:pPr>
+            <a:r>
+              <a:rPr sz="1700" b="0" i="0">
+                <a:solidFill>
+                  <a:srgbClr val="2A2929"/>
+                </a:solidFill>
+                <a:latin typeface="Roboto"/>
+              </a:rPr>
+              <a:t>Written answers cite your own design.</a:t>
+            </a:r>
+          </a:p>
+        </p:txBody>
+      </p:sp>
+      <p:sp>
+        <p:nvSpPr>
+          <p:cNvPr id="16" name="Rectangle 15"/>
+          <p:cNvSpPr/>
+          <p:nvPr/>
+        </p:nvSpPr>
+        <p:spPr>
+          <a:xfrm>
+            <a:off x="0" y="6565392"/>
+            <a:ext cx="12191695" cy="38100"/>
+          </a:xfrm>
+          <a:prstGeom prst="rect">
+            <a:avLst/>
+          </a:prstGeom>
+          <a:solidFill>
+            <a:srgbClr val="004488"/>
+          </a:solidFill>
+          <a:ln>
+            <a:noFill/>
+          </a:ln>
+          <a:effectLst/>
+        </p:spPr>
+        <p:style>
+          <a:lnRef idx="1">
+            <a:schemeClr val="accent1"/>
+          </a:lnRef>
+          <a:fillRef idx="3">
+            <a:schemeClr val="accent1"/>
+          </a:fillRef>
+          <a:effectRef idx="2">
+            <a:schemeClr val="accent1"/>
+          </a:effectRef>
+          <a:fontRef idx="minor">
+            <a:schemeClr val="lt1"/>
+          </a:fontRef>
+        </p:style>
+        <p:txBody>
+          <a:bodyPr rtlCol="0" anchor="ctr"/>
+          <a:lstStyle/>
+          <a:p>
+            <a:pPr algn="ctr"/>
+          </a:p>
+        </p:txBody>
+      </p:sp>
+      <p:sp>
+        <p:nvSpPr>
+          <p:cNvPr id="17" name="TextBox 16"/>
+          <p:cNvSpPr txBox="1"/>
+          <p:nvPr/>
+        </p:nvSpPr>
+        <p:spPr>
+          <a:xfrm>
+            <a:off x="502920" y="6400800"/>
+            <a:ext cx="5486400" cy="320040"/>
+          </a:xfrm>
+          <a:prstGeom prst="rect">
+            <a:avLst/>
+          </a:prstGeom>
+          <a:noFill/>
+        </p:spPr>
+        <p:txBody>
+          <a:bodyPr wrap="square" anchor="t" lIns="0" rIns="0" tIns="0" bIns="0">
+            <a:spAutoFit/>
+          </a:bodyPr>
+          <a:lstStyle/>
+          <a:p>
+            <a:r>
+              <a:rPr sz="1100" b="1" i="0">
+                <a:solidFill>
+                  <a:srgbClr val="2A2929"/>
+                </a:solidFill>
+                <a:latin typeface="Roboto"/>
+              </a:rPr>
+              <a:t>Kangan </a:t>
+            </a:r>
+            <a:r>
+              <a:rPr sz="1100" b="1" i="0">
+                <a:solidFill>
+                  <a:srgbClr val="D68E10"/>
+                </a:solidFill>
+                <a:latin typeface="Roboto"/>
+              </a:rPr>
+              <a:t>Institute</a:t>
+            </a:r>
+          </a:p>
+        </p:txBody>
+      </p:sp>
+      <p:sp>
+        <p:nvSpPr>
+          <p:cNvPr id="18" name="TextBox 17"/>
+          <p:cNvSpPr txBox="1"/>
+          <p:nvPr/>
+        </p:nvSpPr>
+        <p:spPr>
+          <a:xfrm>
+            <a:off x="10515600" y="6400800"/>
+            <a:ext cx="1188720" cy="320040"/>
+          </a:xfrm>
+          <a:prstGeom prst="rect">
+            <a:avLst/>
+          </a:prstGeom>
+          <a:noFill/>
+        </p:spPr>
+        <p:txBody>
+          <a:bodyPr wrap="square" anchor="t" lIns="0" rIns="0" tIns="0" bIns="0">
+            <a:spAutoFit/>
+          </a:bodyPr>
+          <a:lstStyle/>
+          <a:p>
+            <a:pPr algn="r"/>
+            <a:r>
+              <a:rPr sz="1100" b="0" i="0">
+                <a:solidFill>
+                  <a:srgbClr val="7A7A7A"/>
+                </a:solidFill>
+                <a:latin typeface="Roboto"/>
+              </a:rPr>
+              <a:t>16</a:t>
+            </a:r>
+          </a:p>
+        </p:txBody>
+      </p:sp>
+    </p:spTree>
+  </p:cSld>
+  <p:clrMapOvr>
+    <a:masterClrMapping/>
+  </p:clrMapOvr>
+</p:sld>
+</file>
+
+<file path=ppt/slides/slide22.xml><?xml version="1.0" encoding="utf-8"?>
+<p:sld xmlns:a="http://schemas.openxmlformats.org/drawingml/2006/main" xmlns:p="http://schemas.openxmlformats.org/presentationml/2006/main" xmlns:r="http://schemas.openxmlformats.org/officeDocument/2006/relationships">
+  <p:cSld>
+    <p:bg>
+      <p:bgPr>
+        <a:solidFill>
+          <a:srgbClr val="2A2929"/>
+        </a:solidFill>
+        <a:effectLst/>
+      </p:bgPr>
+    </p:bg>
+    <p:spTree>
+      <p:nvGrpSpPr>
+        <p:cNvPr id="1" name=""/>
+        <p:cNvGrpSpPr/>
+        <p:nvPr/>
+      </p:nvGrpSpPr>
+      <p:grpSpPr/>
+      <p:sp>
+        <p:nvSpPr>
+          <p:cNvPr id="2" name="Rectangle 1"/>
+          <p:cNvSpPr/>
+          <p:nvPr/>
+        </p:nvSpPr>
+        <p:spPr>
+          <a:xfrm>
+            <a:off x="0" y="0"/>
+            <a:ext cx="411480" cy="6858000"/>
           </a:xfrm>
           <a:prstGeom prst="rect">
             <a:avLst/>
@@ -6481,14 +10049,14 @@
       </p:sp>
       <p:sp>
         <p:nvSpPr>
-          <p:cNvPr id="7" name="TextBox 6"/>
+          <p:cNvPr id="3" name="TextBox 2"/>
           <p:cNvSpPr txBox="1"/>
           <p:nvPr/>
         </p:nvSpPr>
         <p:spPr>
           <a:xfrm>
-            <a:off x="502920" y="6400800"/>
-            <a:ext cx="5486400" cy="320040"/>
+            <a:off x="914400" y="1463040"/>
+            <a:ext cx="10515600" cy="4023360"/>
           </a:xfrm>
           <a:prstGeom prst="rect">
             <a:avLst/>
@@ -6502,57 +10070,51 @@
           <a:lstStyle/>
           <a:p>
             <a:r>
-              <a:rPr sz="1100" b="1" i="0">
-                <a:solidFill>
-                  <a:srgbClr val="2A2929"/>
-                </a:solidFill>
-                <a:latin typeface="Roboto"/>
-              </a:rPr>
-              <a:t>Kangan </a:t>
-            </a:r>
-            <a:r>
-              <a:rPr sz="1100" b="1" i="0">
-                <a:solidFill>
-                  <a:srgbClr val="D68E10"/>
-                </a:solidFill>
-                <a:latin typeface="Roboto"/>
-              </a:rPr>
-              <a:t>Institute</a:t>
-            </a:r>
-          </a:p>
-        </p:txBody>
-      </p:sp>
-      <p:sp>
-        <p:nvSpPr>
-          <p:cNvPr id="8" name="TextBox 7"/>
-          <p:cNvSpPr txBox="1"/>
-          <p:nvPr/>
-        </p:nvSpPr>
-        <p:spPr>
-          <a:xfrm>
-            <a:off x="10515600" y="6400800"/>
-            <a:ext cx="1188720" cy="320040"/>
-          </a:xfrm>
-          <a:prstGeom prst="rect">
-            <a:avLst/>
-          </a:prstGeom>
-          <a:noFill/>
-        </p:spPr>
-        <p:txBody>
-          <a:bodyPr wrap="square" anchor="t" lIns="0" rIns="0" tIns="0" bIns="0">
-            <a:spAutoFit/>
-          </a:bodyPr>
-          <a:lstStyle/>
-          <a:p>
-            <a:pPr algn="r"/>
-            <a:r>
-              <a:rPr sz="1100" b="0" i="0">
-                <a:solidFill>
-                  <a:srgbClr val="7A7A7A"/>
-                </a:solidFill>
-                <a:latin typeface="Roboto"/>
-              </a:rPr>
-              <a:t>1</a:t>
+              <a:rPr sz="4000" b="1" i="0">
+                <a:solidFill>
+                  <a:srgbClr val="FFFFFF"/>
+                </a:solidFill>
+                <a:latin typeface="Roboto"/>
+              </a:rPr>
+              <a:t>Next: Topic 5 — leading the build team</a:t>
+            </a:r>
+          </a:p>
+          <a:p>
+            <a:pPr>
+              <a:lnSpc>
+                <a:spcPct val="105000"/>
+              </a:lnSpc>
+              <a:spcBef>
+                <a:spcPts val="1200"/>
+              </a:spcBef>
+            </a:pPr>
+            <a:r>
+              <a:rPr sz="1900" b="0" i="0">
+                <a:solidFill>
+                  <a:srgbClr val="E8E8E8"/>
+                </a:solidFill>
+                <a:latin typeface="Roboto Light"/>
+              </a:rPr>
+              <a:t>AT1 is closed: designed, justified, presented, signed off to proceed.</a:t>
+            </a:r>
+          </a:p>
+          <a:p>
+            <a:pPr>
+              <a:lnSpc>
+                <a:spcPct val="105000"/>
+              </a:lnSpc>
+              <a:spcBef>
+                <a:spcPts val="1200"/>
+              </a:spcBef>
+            </a:pPr>
+            <a:r>
+              <a:rPr sz="1900" b="0" i="0">
+                <a:solidFill>
+                  <a:srgbClr val="E8E8E8"/>
+                </a:solidFill>
+                <a:latin typeface="Roboto Light"/>
+              </a:rPr>
+              <a:t>Next you switch from designing to leading — the team that builds the approved design.</a:t>
             </a:r>
           </a:p>
         </p:txBody>
@@ -6706,7 +10268,7 @@
                 </a:solidFill>
                 <a:latin typeface="Roboto"/>
               </a:rPr>
-              <a:t>Documenting &amp; presenting</a:t>
+              <a:t>Draw the improved architecture</a:t>
             </a:r>
           </a:p>
           <a:p>
@@ -6722,7 +10284,7 @@
                 </a:solidFill>
                 <a:latin typeface="Roboto Light"/>
               </a:rPr>
-              <a:t>assemble it, then walk them through it</a:t>
+              <a:t>one picture of the whole design</a:t>
             </a:r>
           </a:p>
         </p:txBody>
@@ -6904,7 +10466,7 @@
                 </a:solidFill>
                 <a:latin typeface="Roboto"/>
               </a:rPr>
-              <a:t>What a Solution Design document is</a:t>
+              <a:t>Draw what you designed</a:t>
             </a:r>
           </a:p>
         </p:txBody>
@@ -7002,7 +10564,7 @@
                 </a:solidFill>
                 <a:latin typeface="Roboto"/>
               </a:rPr>
-              <a:t>A Solution Design is a professional artefact: the proposed architecture, the rationale, and the trade-offs — complete and readable by a reviewer who wasn't in the room.</a:t>
+              <a:t>One diagram of the whole improved architecture: every tier, every improvement, and where the users come in.</a:t>
             </a:r>
           </a:p>
           <a:p>
@@ -7033,7 +10595,7 @@
                 </a:solidFill>
                 <a:latin typeface="Roboto"/>
               </a:rPr>
-              <a:t>It documents the improved architecture with clear diagrams, decision rationale, and the metrics behind each call.</a:t>
+              <a:t>Label what each component is for, not just what product it uses — a reader sees the job of every box.</a:t>
             </a:r>
           </a:p>
           <a:p>
@@ -7064,7 +10626,7 @@
                 </a:solidFill>
                 <a:latin typeface="Roboto"/>
               </a:rPr>
-              <a:t>Pitched for a review audience: the required personnel who decide whether to proceed.</a:t>
+              <a:t>The diagram must agree with the design tables that produced it; a mismatch here is what reviewers catch first.</a:t>
             </a:r>
           </a:p>
         </p:txBody>
@@ -7219,48 +10781,14 @@
       <p:grpSpPr/>
       <p:sp>
         <p:nvSpPr>
-          <p:cNvPr id="2" name="TextBox 1"/>
-          <p:cNvSpPr txBox="1"/>
-          <p:nvPr/>
-        </p:nvSpPr>
-        <p:spPr>
-          <a:xfrm>
-            <a:off x="640080" y="457200"/>
-            <a:ext cx="10881360" cy="960120"/>
-          </a:xfrm>
-          <a:prstGeom prst="rect">
-            <a:avLst/>
-          </a:prstGeom>
-          <a:noFill/>
-        </p:spPr>
-        <p:txBody>
-          <a:bodyPr wrap="square" anchor="t" lIns="0" rIns="0" tIns="0" bIns="0">
-            <a:spAutoFit/>
-          </a:bodyPr>
-          <a:lstStyle/>
-          <a:p>
-            <a:r>
-              <a:rPr sz="2800" b="1" i="0">
-                <a:solidFill>
-                  <a:srgbClr val="2A2929"/>
-                </a:solidFill>
-                <a:latin typeface="Roboto"/>
-              </a:rPr>
-              <a:t>Assemble the whole design</a:t>
-            </a:r>
-          </a:p>
-        </p:txBody>
-      </p:sp>
-      <p:sp>
-        <p:nvSpPr>
-          <p:cNvPr id="3" name="Rectangle 2"/>
+          <p:cNvPr id="2" name="Rectangle 1"/>
           <p:cNvSpPr/>
           <p:nvPr/>
         </p:nvSpPr>
         <p:spPr>
           <a:xfrm>
-            <a:off x="658368" y="1371600"/>
-            <a:ext cx="1463040" cy="50800"/>
+            <a:off x="0" y="0"/>
+            <a:ext cx="12191695" cy="1234440"/>
           </a:xfrm>
           <a:prstGeom prst="rect">
             <a:avLst/>
@@ -7297,14 +10825,67 @@
       </p:sp>
       <p:sp>
         <p:nvSpPr>
+          <p:cNvPr id="3" name="Rounded Rectangle 2"/>
+          <p:cNvSpPr/>
+          <p:nvPr/>
+        </p:nvSpPr>
+        <p:spPr>
+          <a:xfrm>
+            <a:off x="640080" y="384048"/>
+            <a:ext cx="1691640" cy="457200"/>
+          </a:xfrm>
+          <a:prstGeom prst="roundRect">
+            <a:avLst/>
+          </a:prstGeom>
+          <a:solidFill>
+            <a:srgbClr val="2A2929"/>
+          </a:solidFill>
+          <a:ln>
+            <a:noFill/>
+          </a:ln>
+          <a:effectLst/>
+        </p:spPr>
+        <p:style>
+          <a:lnRef idx="1">
+            <a:schemeClr val="accent1"/>
+          </a:lnRef>
+          <a:fillRef idx="3">
+            <a:schemeClr val="accent1"/>
+          </a:fillRef>
+          <a:effectRef idx="2">
+            <a:schemeClr val="accent1"/>
+          </a:effectRef>
+          <a:fontRef idx="minor">
+            <a:schemeClr val="lt1"/>
+          </a:fontRef>
+        </p:style>
+        <p:txBody>
+          <a:bodyPr rtlCol="0" anchor="ctr"/>
+          <a:lstStyle/>
+          <a:p>
+            <a:pPr algn="ctr"/>
+            <a:r>
+              <a:rPr sz="1400" b="1" i="0">
+                <a:solidFill>
+                  <a:srgbClr val="FBB900"/>
+                </a:solidFill>
+                <a:latin typeface="Roboto"/>
+              </a:rPr>
+              <a:t>ACTIVITY</a:t>
+            </a:r>
+          </a:p>
+        </p:txBody>
+      </p:sp>
+      <p:sp>
+        <p:nvSpPr>
           <p:cNvPr id="4" name="TextBox 3"/>
           <p:cNvSpPr txBox="1"/>
           <p:nvPr/>
         </p:nvSpPr>
         <p:spPr>
           <a:xfrm>
-            <a:off x="658368" y="1691640"/>
-            <a:ext cx="10881360" cy="4480560"/>
+            <a:off x="2560320" y="310896"/>
+            <a:ext cx="8961120" cy="685800"/>
           </a:xfrm>
           <a:prstGeom prst="rect">
             <a:avLst/>
@@ -7313,6 +10894,40 @@
         </p:spPr>
         <p:txBody>
           <a:bodyPr wrap="square" anchor="ctr" lIns="0" rIns="0" tIns="0" bIns="0">
+            <a:spAutoFit/>
+          </a:bodyPr>
+          <a:lstStyle/>
+          <a:p>
+            <a:r>
+              <a:rPr sz="2600" b="1" i="0">
+                <a:solidFill>
+                  <a:srgbClr val="FFFFFF"/>
+                </a:solidFill>
+                <a:latin typeface="Roboto"/>
+              </a:rPr>
+              <a:t>Draw the architecture</a:t>
+            </a:r>
+          </a:p>
+        </p:txBody>
+      </p:sp>
+      <p:sp>
+        <p:nvSpPr>
+          <p:cNvPr id="5" name="TextBox 4"/>
+          <p:cNvSpPr txBox="1"/>
+          <p:nvPr/>
+        </p:nvSpPr>
+        <p:spPr>
+          <a:xfrm>
+            <a:off x="658368" y="1554480"/>
+            <a:ext cx="10881360" cy="4297680"/>
+          </a:xfrm>
+          <a:prstGeom prst="rect">
+            <a:avLst/>
+          </a:prstGeom>
+          <a:noFill/>
+        </p:spPr>
+        <p:txBody>
+          <a:bodyPr wrap="square" anchor="t" lIns="0" rIns="0" tIns="0" bIns="0">
             <a:spAutoFit/>
           </a:bodyPr>
           <a:lstStyle/>
@@ -7329,7 +10944,7 @@
               </a:spcAft>
             </a:pPr>
             <a:r>
-              <a:rPr sz="2400" b="1" i="0">
+              <a:rPr sz="1700" b="1" i="0">
                 <a:solidFill>
                   <a:srgbClr val="EDAB0C"/>
                 </a:solidFill>
@@ -7338,13 +10953,13 @@
               <a:t>■  </a:t>
             </a:r>
             <a:r>
-              <a:rPr sz="2400" b="0" i="0">
+              <a:rPr sz="1700" b="0" i="0">
                 <a:solidFill>
                   <a:srgbClr val="2A2929"/>
                 </a:solidFill>
                 <a:latin typeface="Roboto"/>
               </a:rPr>
-              <a:t>Bring together the baseline analysis (Topic 1) and the four design concerns — reliability and scalability (Topics 2–3) — into one document.</a:t>
+              <a:t>Workbook — task 14.</a:t>
             </a:r>
           </a:p>
           <a:p>
@@ -7360,7 +10975,7 @@
               </a:spcAft>
             </a:pPr>
             <a:r>
-              <a:rPr sz="2400" b="1" i="0">
+              <a:rPr sz="1700" b="1" i="0">
                 <a:solidFill>
                   <a:srgbClr val="EDAB0C"/>
                 </a:solidFill>
@@ -7369,51 +10984,100 @@
               <a:t>■  </a:t>
             </a:r>
             <a:r>
-              <a:rPr sz="2400" b="0" i="0">
+              <a:rPr sz="1700" b="0" i="0">
                 <a:solidFill>
                   <a:srgbClr val="2A2929"/>
                 </a:solidFill>
                 <a:latin typeface="Roboto"/>
               </a:rPr>
-              <a:t>Each proposed change traces back to a named requirement or gap; the diagrams, tables and prose agree.</a:t>
-            </a:r>
-          </a:p>
-          <a:p>
-            <a:pPr marL="0" indent="0">
-              <a:lnSpc>
-                <a:spcPct val="105000"/>
-              </a:lnSpc>
-              <a:spcBef>
-                <a:spcPts val="0"/>
-              </a:spcBef>
-              <a:spcAft>
-                <a:spcPts val="1000"/>
-              </a:spcAft>
-            </a:pPr>
-            <a:r>
-              <a:rPr sz="2400" b="1" i="0">
-                <a:solidFill>
-                  <a:srgbClr val="EDAB0C"/>
-                </a:solidFill>
-                <a:latin typeface="Roboto"/>
-              </a:rPr>
-              <a:t>■  </a:t>
-            </a:r>
-            <a:r>
-              <a:rPr sz="2400" b="0" i="0">
+              <a:t>Draw the full improved architecture for the practice engagement, agreeing with every design decision you recorded.</a:t>
+            </a:r>
+          </a:p>
+        </p:txBody>
+      </p:sp>
+      <p:sp>
+        <p:nvSpPr>
+          <p:cNvPr id="6" name="Rounded Rectangle 5"/>
+          <p:cNvSpPr/>
+          <p:nvPr/>
+        </p:nvSpPr>
+        <p:spPr>
+          <a:xfrm>
+            <a:off x="640080" y="5897880"/>
+            <a:ext cx="4023360" cy="457200"/>
+          </a:xfrm>
+          <a:prstGeom prst="roundRect">
+            <a:avLst/>
+          </a:prstGeom>
+          <a:solidFill>
+            <a:srgbClr val="F9F9F9"/>
+          </a:solidFill>
+          <a:ln w="12700">
+            <a:solidFill>
+              <a:srgbClr val="CCCCCC"/>
+            </a:solidFill>
+          </a:ln>
+          <a:effectLst/>
+        </p:spPr>
+        <p:style>
+          <a:lnRef idx="1">
+            <a:schemeClr val="accent1"/>
+          </a:lnRef>
+          <a:fillRef idx="3">
+            <a:schemeClr val="accent1"/>
+          </a:fillRef>
+          <a:effectRef idx="2">
+            <a:schemeClr val="accent1"/>
+          </a:effectRef>
+          <a:fontRef idx="minor">
+            <a:schemeClr val="lt1"/>
+          </a:fontRef>
+        </p:style>
+        <p:txBody>
+          <a:bodyPr rtlCol="0" anchor="ctr"/>
+          <a:lstStyle/>
+          <a:p>
+            <a:pPr algn="ctr"/>
+          </a:p>
+        </p:txBody>
+      </p:sp>
+      <p:sp>
+        <p:nvSpPr>
+          <p:cNvPr id="7" name="TextBox 6"/>
+          <p:cNvSpPr txBox="1"/>
+          <p:nvPr/>
+        </p:nvSpPr>
+        <p:spPr>
+          <a:xfrm>
+            <a:off x="822960" y="5943600"/>
+            <a:ext cx="3657600" cy="365760"/>
+          </a:xfrm>
+          <a:prstGeom prst="rect">
+            <a:avLst/>
+          </a:prstGeom>
+          <a:noFill/>
+        </p:spPr>
+        <p:txBody>
+          <a:bodyPr wrap="square" anchor="ctr" lIns="0" rIns="0" tIns="0" bIns="0">
+            <a:spAutoFit/>
+          </a:bodyPr>
+          <a:lstStyle/>
+          <a:p>
+            <a:r>
+              <a:rPr sz="1500" b="1" i="0">
                 <a:solidFill>
                   <a:srgbClr val="2A2929"/>
                 </a:solidFill>
                 <a:latin typeface="Roboto"/>
               </a:rPr>
-              <a:t>Fold in the cost-benefit reasoning: what each change costs and the improvement it buys.</a:t>
-            </a:r>
-          </a:p>
-        </p:txBody>
-      </p:sp>
-      <p:sp>
-        <p:nvSpPr>
-          <p:cNvPr id="5" name="Rectangle 4"/>
+              <a:t>⏱  ~30 min</a:t>
+            </a:r>
+          </a:p>
+        </p:txBody>
+      </p:sp>
+      <p:sp>
+        <p:nvSpPr>
+          <p:cNvPr id="8" name="Rectangle 7"/>
           <p:cNvSpPr/>
           <p:nvPr/>
         </p:nvSpPr>
@@ -7457,7 +11121,7 @@
       </p:sp>
       <p:sp>
         <p:nvSpPr>
-          <p:cNvPr id="6" name="TextBox 5"/>
+          <p:cNvPr id="9" name="TextBox 8"/>
           <p:cNvSpPr txBox="1"/>
           <p:nvPr/>
         </p:nvSpPr>
@@ -7500,7 +11164,7 @@
       </p:sp>
       <p:sp>
         <p:nvSpPr>
-          <p:cNvPr id="7" name="TextBox 6"/>
+          <p:cNvPr id="10" name="TextBox 9"/>
           <p:cNvSpPr txBox="1"/>
           <p:nvPr/>
         </p:nvSpPr>
@@ -7542,6 +11206,506 @@
 </file>
 
 <file path=ppt/slides/slide6.xml><?xml version="1.0" encoding="utf-8"?>
+<p:sld xmlns:a="http://schemas.openxmlformats.org/drawingml/2006/main" xmlns:p="http://schemas.openxmlformats.org/presentationml/2006/main" xmlns:r="http://schemas.openxmlformats.org/officeDocument/2006/relationships">
+  <p:cSld>
+    <p:bg>
+      <p:bgPr>
+        <a:solidFill>
+          <a:srgbClr val="F9F9F9"/>
+        </a:solidFill>
+        <a:effectLst/>
+      </p:bgPr>
+    </p:bg>
+    <p:spTree>
+      <p:nvGrpSpPr>
+        <p:cNvPr id="1" name=""/>
+        <p:cNvGrpSpPr/>
+        <p:nvPr/>
+      </p:nvGrpSpPr>
+      <p:grpSpPr/>
+      <p:sp>
+        <p:nvSpPr>
+          <p:cNvPr id="2" name="TextBox 1"/>
+          <p:cNvSpPr txBox="1"/>
+          <p:nvPr/>
+        </p:nvSpPr>
+        <p:spPr>
+          <a:xfrm>
+            <a:off x="640080" y="548640"/>
+            <a:ext cx="10881360" cy="1097280"/>
+          </a:xfrm>
+          <a:prstGeom prst="rect">
+            <a:avLst/>
+          </a:prstGeom>
+          <a:noFill/>
+        </p:spPr>
+        <p:txBody>
+          <a:bodyPr wrap="square" anchor="t" lIns="0" rIns="0" tIns="0" bIns="0">
+            <a:spAutoFit/>
+          </a:bodyPr>
+          <a:lstStyle/>
+          <a:p>
+            <a:r>
+              <a:rPr sz="3200" b="1" i="0">
+                <a:solidFill>
+                  <a:srgbClr val="2A2929"/>
+                </a:solidFill>
+                <a:latin typeface="Roboto"/>
+              </a:rPr>
+              <a:t>Key takeaways</a:t>
+            </a:r>
+          </a:p>
+          <a:p>
+            <a:pPr>
+              <a:spcBef>
+                <a:spcPts val="200"/>
+              </a:spcBef>
+            </a:pPr>
+            <a:r>
+              <a:rPr sz="1800" b="1" i="0">
+                <a:solidFill>
+                  <a:srgbClr val="92268F"/>
+                </a:solidFill>
+                <a:latin typeface="Roboto"/>
+              </a:rPr>
+              <a:t>Section 1 · The drawing</a:t>
+            </a:r>
+          </a:p>
+        </p:txBody>
+      </p:sp>
+      <p:sp>
+        <p:nvSpPr>
+          <p:cNvPr id="3" name="Rectangle 2"/>
+          <p:cNvSpPr/>
+          <p:nvPr/>
+        </p:nvSpPr>
+        <p:spPr>
+          <a:xfrm>
+            <a:off x="658368" y="1600200"/>
+            <a:ext cx="1463040" cy="50800"/>
+          </a:xfrm>
+          <a:prstGeom prst="rect">
+            <a:avLst/>
+          </a:prstGeom>
+          <a:solidFill>
+            <a:srgbClr val="92268F"/>
+          </a:solidFill>
+          <a:ln>
+            <a:noFill/>
+          </a:ln>
+          <a:effectLst/>
+        </p:spPr>
+        <p:style>
+          <a:lnRef idx="1">
+            <a:schemeClr val="accent1"/>
+          </a:lnRef>
+          <a:fillRef idx="3">
+            <a:schemeClr val="accent1"/>
+          </a:fillRef>
+          <a:effectRef idx="2">
+            <a:schemeClr val="accent1"/>
+          </a:effectRef>
+          <a:fontRef idx="minor">
+            <a:schemeClr val="lt1"/>
+          </a:fontRef>
+        </p:style>
+        <p:txBody>
+          <a:bodyPr rtlCol="0" anchor="ctr"/>
+          <a:lstStyle/>
+          <a:p>
+            <a:pPr algn="ctr"/>
+          </a:p>
+        </p:txBody>
+      </p:sp>
+      <p:sp>
+        <p:nvSpPr>
+          <p:cNvPr id="4" name="Rectangle 3"/>
+          <p:cNvSpPr/>
+          <p:nvPr/>
+        </p:nvSpPr>
+        <p:spPr>
+          <a:xfrm>
+            <a:off x="640080" y="1965960"/>
+            <a:ext cx="10927080" cy="841248"/>
+          </a:xfrm>
+          <a:prstGeom prst="rect">
+            <a:avLst/>
+          </a:prstGeom>
+          <a:solidFill>
+            <a:srgbClr val="FFFFFF"/>
+          </a:solidFill>
+          <a:ln w="12700">
+            <a:solidFill>
+              <a:srgbClr val="CCCCCC"/>
+            </a:solidFill>
+          </a:ln>
+          <a:effectLst/>
+        </p:spPr>
+        <p:style>
+          <a:lnRef idx="1">
+            <a:schemeClr val="accent1"/>
+          </a:lnRef>
+          <a:fillRef idx="3">
+            <a:schemeClr val="accent1"/>
+          </a:fillRef>
+          <a:effectRef idx="2">
+            <a:schemeClr val="accent1"/>
+          </a:effectRef>
+          <a:fontRef idx="minor">
+            <a:schemeClr val="lt1"/>
+          </a:fontRef>
+        </p:style>
+        <p:txBody>
+          <a:bodyPr rtlCol="0" anchor="ctr"/>
+          <a:lstStyle/>
+          <a:p>
+            <a:pPr algn="ctr"/>
+          </a:p>
+        </p:txBody>
+      </p:sp>
+      <p:sp>
+        <p:nvSpPr>
+          <p:cNvPr id="5" name="Rectangle 4"/>
+          <p:cNvSpPr/>
+          <p:nvPr/>
+        </p:nvSpPr>
+        <p:spPr>
+          <a:xfrm>
+            <a:off x="640080" y="1965960"/>
+            <a:ext cx="109728" cy="841248"/>
+          </a:xfrm>
+          <a:prstGeom prst="rect">
+            <a:avLst/>
+          </a:prstGeom>
+          <a:solidFill>
+            <a:srgbClr val="92268F"/>
+          </a:solidFill>
+          <a:ln>
+            <a:noFill/>
+          </a:ln>
+          <a:effectLst/>
+        </p:spPr>
+        <p:style>
+          <a:lnRef idx="1">
+            <a:schemeClr val="accent1"/>
+          </a:lnRef>
+          <a:fillRef idx="3">
+            <a:schemeClr val="accent1"/>
+          </a:fillRef>
+          <a:effectRef idx="2">
+            <a:schemeClr val="accent1"/>
+          </a:effectRef>
+          <a:fontRef idx="minor">
+            <a:schemeClr val="lt1"/>
+          </a:fontRef>
+        </p:style>
+        <p:txBody>
+          <a:bodyPr rtlCol="0" anchor="ctr"/>
+          <a:lstStyle/>
+          <a:p>
+            <a:pPr algn="ctr"/>
+          </a:p>
+        </p:txBody>
+      </p:sp>
+      <p:sp>
+        <p:nvSpPr>
+          <p:cNvPr id="6" name="TextBox 5"/>
+          <p:cNvSpPr txBox="1"/>
+          <p:nvPr/>
+        </p:nvSpPr>
+        <p:spPr>
+          <a:xfrm>
+            <a:off x="960120" y="1965960"/>
+            <a:ext cx="10424160" cy="841248"/>
+          </a:xfrm>
+          <a:prstGeom prst="rect">
+            <a:avLst/>
+          </a:prstGeom>
+          <a:noFill/>
+        </p:spPr>
+        <p:txBody>
+          <a:bodyPr wrap="square" anchor="ctr" lIns="0" rIns="0" tIns="0" bIns="0">
+            <a:spAutoFit/>
+          </a:bodyPr>
+          <a:lstStyle/>
+          <a:p>
+            <a:pPr>
+              <a:lnSpc>
+                <a:spcPct val="100000"/>
+              </a:lnSpc>
+            </a:pPr>
+            <a:r>
+              <a:rPr sz="1700" b="0" i="0">
+                <a:solidFill>
+                  <a:srgbClr val="2A2929"/>
+                </a:solidFill>
+                <a:latin typeface="Roboto"/>
+              </a:rPr>
+              <a:t>Every tier, every improvement, one picture.</a:t>
+            </a:r>
+          </a:p>
+        </p:txBody>
+      </p:sp>
+      <p:sp>
+        <p:nvSpPr>
+          <p:cNvPr id="7" name="Rectangle 6"/>
+          <p:cNvSpPr/>
+          <p:nvPr/>
+        </p:nvSpPr>
+        <p:spPr>
+          <a:xfrm>
+            <a:off x="640080" y="2916936"/>
+            <a:ext cx="10927080" cy="841248"/>
+          </a:xfrm>
+          <a:prstGeom prst="rect">
+            <a:avLst/>
+          </a:prstGeom>
+          <a:solidFill>
+            <a:srgbClr val="FFFFFF"/>
+          </a:solidFill>
+          <a:ln w="12700">
+            <a:solidFill>
+              <a:srgbClr val="CCCCCC"/>
+            </a:solidFill>
+          </a:ln>
+          <a:effectLst/>
+        </p:spPr>
+        <p:style>
+          <a:lnRef idx="1">
+            <a:schemeClr val="accent1"/>
+          </a:lnRef>
+          <a:fillRef idx="3">
+            <a:schemeClr val="accent1"/>
+          </a:fillRef>
+          <a:effectRef idx="2">
+            <a:schemeClr val="accent1"/>
+          </a:effectRef>
+          <a:fontRef idx="minor">
+            <a:schemeClr val="lt1"/>
+          </a:fontRef>
+        </p:style>
+        <p:txBody>
+          <a:bodyPr rtlCol="0" anchor="ctr"/>
+          <a:lstStyle/>
+          <a:p>
+            <a:pPr algn="ctr"/>
+          </a:p>
+        </p:txBody>
+      </p:sp>
+      <p:sp>
+        <p:nvSpPr>
+          <p:cNvPr id="8" name="Rectangle 7"/>
+          <p:cNvSpPr/>
+          <p:nvPr/>
+        </p:nvSpPr>
+        <p:spPr>
+          <a:xfrm>
+            <a:off x="640080" y="2916936"/>
+            <a:ext cx="109728" cy="841248"/>
+          </a:xfrm>
+          <a:prstGeom prst="rect">
+            <a:avLst/>
+          </a:prstGeom>
+          <a:solidFill>
+            <a:srgbClr val="92268F"/>
+          </a:solidFill>
+          <a:ln>
+            <a:noFill/>
+          </a:ln>
+          <a:effectLst/>
+        </p:spPr>
+        <p:style>
+          <a:lnRef idx="1">
+            <a:schemeClr val="accent1"/>
+          </a:lnRef>
+          <a:fillRef idx="3">
+            <a:schemeClr val="accent1"/>
+          </a:fillRef>
+          <a:effectRef idx="2">
+            <a:schemeClr val="accent1"/>
+          </a:effectRef>
+          <a:fontRef idx="minor">
+            <a:schemeClr val="lt1"/>
+          </a:fontRef>
+        </p:style>
+        <p:txBody>
+          <a:bodyPr rtlCol="0" anchor="ctr"/>
+          <a:lstStyle/>
+          <a:p>
+            <a:pPr algn="ctr"/>
+          </a:p>
+        </p:txBody>
+      </p:sp>
+      <p:sp>
+        <p:nvSpPr>
+          <p:cNvPr id="9" name="TextBox 8"/>
+          <p:cNvSpPr txBox="1"/>
+          <p:nvPr/>
+        </p:nvSpPr>
+        <p:spPr>
+          <a:xfrm>
+            <a:off x="960120" y="2916936"/>
+            <a:ext cx="10424160" cy="841248"/>
+          </a:xfrm>
+          <a:prstGeom prst="rect">
+            <a:avLst/>
+          </a:prstGeom>
+          <a:noFill/>
+        </p:spPr>
+        <p:txBody>
+          <a:bodyPr wrap="square" anchor="ctr" lIns="0" rIns="0" tIns="0" bIns="0">
+            <a:spAutoFit/>
+          </a:bodyPr>
+          <a:lstStyle/>
+          <a:p>
+            <a:pPr>
+              <a:lnSpc>
+                <a:spcPct val="100000"/>
+              </a:lnSpc>
+            </a:pPr>
+            <a:r>
+              <a:rPr sz="1700" b="0" i="0">
+                <a:solidFill>
+                  <a:srgbClr val="2A2929"/>
+                </a:solidFill>
+                <a:latin typeface="Roboto"/>
+              </a:rPr>
+              <a:t>Labels say the job; the drawing agrees with the tables.</a:t>
+            </a:r>
+          </a:p>
+        </p:txBody>
+      </p:sp>
+      <p:sp>
+        <p:nvSpPr>
+          <p:cNvPr id="10" name="Rectangle 9"/>
+          <p:cNvSpPr/>
+          <p:nvPr/>
+        </p:nvSpPr>
+        <p:spPr>
+          <a:xfrm>
+            <a:off x="0" y="6565392"/>
+            <a:ext cx="12191695" cy="38100"/>
+          </a:xfrm>
+          <a:prstGeom prst="rect">
+            <a:avLst/>
+          </a:prstGeom>
+          <a:solidFill>
+            <a:srgbClr val="92268F"/>
+          </a:solidFill>
+          <a:ln>
+            <a:noFill/>
+          </a:ln>
+          <a:effectLst/>
+        </p:spPr>
+        <p:style>
+          <a:lnRef idx="1">
+            <a:schemeClr val="accent1"/>
+          </a:lnRef>
+          <a:fillRef idx="3">
+            <a:schemeClr val="accent1"/>
+          </a:fillRef>
+          <a:effectRef idx="2">
+            <a:schemeClr val="accent1"/>
+          </a:effectRef>
+          <a:fontRef idx="minor">
+            <a:schemeClr val="lt1"/>
+          </a:fontRef>
+        </p:style>
+        <p:txBody>
+          <a:bodyPr rtlCol="0" anchor="ctr"/>
+          <a:lstStyle/>
+          <a:p>
+            <a:pPr algn="ctr"/>
+          </a:p>
+        </p:txBody>
+      </p:sp>
+      <p:sp>
+        <p:nvSpPr>
+          <p:cNvPr id="11" name="TextBox 10"/>
+          <p:cNvSpPr txBox="1"/>
+          <p:nvPr/>
+        </p:nvSpPr>
+        <p:spPr>
+          <a:xfrm>
+            <a:off x="502920" y="6400800"/>
+            <a:ext cx="5486400" cy="320040"/>
+          </a:xfrm>
+          <a:prstGeom prst="rect">
+            <a:avLst/>
+          </a:prstGeom>
+          <a:noFill/>
+        </p:spPr>
+        <p:txBody>
+          <a:bodyPr wrap="square" anchor="t" lIns="0" rIns="0" tIns="0" bIns="0">
+            <a:spAutoFit/>
+          </a:bodyPr>
+          <a:lstStyle/>
+          <a:p>
+            <a:r>
+              <a:rPr sz="1100" b="1" i="0">
+                <a:solidFill>
+                  <a:srgbClr val="2A2929"/>
+                </a:solidFill>
+                <a:latin typeface="Roboto"/>
+              </a:rPr>
+              <a:t>Kangan </a:t>
+            </a:r>
+            <a:r>
+              <a:rPr sz="1100" b="1" i="0">
+                <a:solidFill>
+                  <a:srgbClr val="D68E10"/>
+                </a:solidFill>
+                <a:latin typeface="Roboto"/>
+              </a:rPr>
+              <a:t>Institute</a:t>
+            </a:r>
+          </a:p>
+        </p:txBody>
+      </p:sp>
+      <p:sp>
+        <p:nvSpPr>
+          <p:cNvPr id="12" name="TextBox 11"/>
+          <p:cNvSpPr txBox="1"/>
+          <p:nvPr/>
+        </p:nvSpPr>
+        <p:spPr>
+          <a:xfrm>
+            <a:off x="10515600" y="6400800"/>
+            <a:ext cx="1188720" cy="320040"/>
+          </a:xfrm>
+          <a:prstGeom prst="rect">
+            <a:avLst/>
+          </a:prstGeom>
+          <a:noFill/>
+        </p:spPr>
+        <p:txBody>
+          <a:bodyPr wrap="square" anchor="t" lIns="0" rIns="0" tIns="0" bIns="0">
+            <a:spAutoFit/>
+          </a:bodyPr>
+          <a:lstStyle/>
+          <a:p>
+            <a:pPr algn="r"/>
+            <a:r>
+              <a:rPr sz="1100" b="0" i="0">
+                <a:solidFill>
+                  <a:srgbClr val="7A7A7A"/>
+                </a:solidFill>
+                <a:latin typeface="Roboto"/>
+              </a:rPr>
+              <a:t>4</a:t>
+            </a:r>
+          </a:p>
+        </p:txBody>
+      </p:sp>
+    </p:spTree>
+  </p:cSld>
+  <p:clrMapOvr>
+    <a:masterClrMapping/>
+  </p:clrMapOvr>
+</p:sld>
+</file>
+
+<file path=ppt/slides/slide7.xml><?xml version="1.0" encoding="utf-8"?>
 <p:sld xmlns:a="http://schemas.openxmlformats.org/drawingml/2006/main" xmlns:p="http://schemas.openxmlformats.org/presentationml/2006/main" xmlns:r="http://schemas.openxmlformats.org/officeDocument/2006/relationships">
   <p:cSld>
     <p:bg>
@@ -7561,14 +11725,58 @@
       <p:grpSpPr/>
       <p:sp>
         <p:nvSpPr>
-          <p:cNvPr id="2" name="TextBox 1"/>
+          <p:cNvPr id="2" name="Rectangle 1"/>
+          <p:cNvSpPr/>
+          <p:nvPr/>
+        </p:nvSpPr>
+        <p:spPr>
+          <a:xfrm>
+            <a:off x="0" y="0"/>
+            <a:ext cx="3931920" cy="6858000"/>
+          </a:xfrm>
+          <a:prstGeom prst="rect">
+            <a:avLst/>
+          </a:prstGeom>
+          <a:solidFill>
+            <a:srgbClr val="27B5CE"/>
+          </a:solidFill>
+          <a:ln>
+            <a:noFill/>
+          </a:ln>
+          <a:effectLst/>
+        </p:spPr>
+        <p:style>
+          <a:lnRef idx="1">
+            <a:schemeClr val="accent1"/>
+          </a:lnRef>
+          <a:fillRef idx="3">
+            <a:schemeClr val="accent1"/>
+          </a:fillRef>
+          <a:effectRef idx="2">
+            <a:schemeClr val="accent1"/>
+          </a:effectRef>
+          <a:fontRef idx="minor">
+            <a:schemeClr val="lt1"/>
+          </a:fontRef>
+        </p:style>
+        <p:txBody>
+          <a:bodyPr rtlCol="0" anchor="ctr"/>
+          <a:lstStyle/>
+          <a:p>
+            <a:pPr algn="ctr"/>
+          </a:p>
+        </p:txBody>
+      </p:sp>
+      <p:sp>
+        <p:nvSpPr>
+          <p:cNvPr id="3" name="TextBox 2"/>
           <p:cNvSpPr txBox="1"/>
           <p:nvPr/>
         </p:nvSpPr>
         <p:spPr>
           <a:xfrm>
-            <a:off x="640080" y="457200"/>
-            <a:ext cx="10881360" cy="960120"/>
+            <a:off x="365760" y="2103120"/>
+            <a:ext cx="3291840" cy="2194560"/>
           </a:xfrm>
           <a:prstGeom prst="rect">
             <a:avLst/>
@@ -7582,13 +11790,261 @@
           <a:lstStyle/>
           <a:p>
             <a:r>
+              <a:rPr sz="13000" b="1" i="0">
+                <a:solidFill>
+                  <a:srgbClr val="FFFFFF"/>
+                </a:solidFill>
+                <a:latin typeface="Roboto"/>
+              </a:rPr>
+              <a:t>02</a:t>
+            </a:r>
+          </a:p>
+        </p:txBody>
+      </p:sp>
+      <p:sp>
+        <p:nvSpPr>
+          <p:cNvPr id="4" name="TextBox 3"/>
+          <p:cNvSpPr txBox="1"/>
+          <p:nvPr/>
+        </p:nvSpPr>
+        <p:spPr>
+          <a:xfrm>
+            <a:off x="4480560" y="2468880"/>
+            <a:ext cx="7132320" cy="2194560"/>
+          </a:xfrm>
+          <a:prstGeom prst="rect">
+            <a:avLst/>
+          </a:prstGeom>
+          <a:noFill/>
+        </p:spPr>
+        <p:txBody>
+          <a:bodyPr wrap="square" anchor="t" lIns="0" rIns="0" tIns="0" bIns="0">
+            <a:spAutoFit/>
+          </a:bodyPr>
+          <a:lstStyle/>
+          <a:p>
+            <a:r>
+              <a:rPr sz="1600" b="1" i="0">
+                <a:solidFill>
+                  <a:srgbClr val="27B5CE"/>
+                </a:solidFill>
+                <a:latin typeface="Roboto"/>
+              </a:rPr>
+              <a:t>SECTION</a:t>
+            </a:r>
+          </a:p>
+          <a:p>
+            <a:pPr>
+              <a:spcBef>
+                <a:spcPts val="600"/>
+              </a:spcBef>
+            </a:pPr>
+            <a:r>
+              <a:rPr sz="3800" b="1" i="0">
+                <a:solidFill>
+                  <a:srgbClr val="2A2929"/>
+                </a:solidFill>
+                <a:latin typeface="Roboto"/>
+              </a:rPr>
+              <a:t>Document and justify the proposal</a:t>
+            </a:r>
+          </a:p>
+          <a:p>
+            <a:pPr>
+              <a:spcBef>
+                <a:spcPts val="1000"/>
+              </a:spcBef>
+            </a:pPr>
+            <a:r>
+              <a:rPr sz="2000" b="0" i="1">
+                <a:solidFill>
+                  <a:srgbClr val="484848"/>
+                </a:solidFill>
+                <a:latin typeface="Roboto Light"/>
+              </a:rPr>
+              <a:t>readable cold, defensible line by line</a:t>
+            </a:r>
+          </a:p>
+        </p:txBody>
+      </p:sp>
+      <p:sp>
+        <p:nvSpPr>
+          <p:cNvPr id="5" name="Rectangle 4"/>
+          <p:cNvSpPr/>
+          <p:nvPr/>
+        </p:nvSpPr>
+        <p:spPr>
+          <a:xfrm>
+            <a:off x="0" y="6565392"/>
+            <a:ext cx="12191695" cy="38100"/>
+          </a:xfrm>
+          <a:prstGeom prst="rect">
+            <a:avLst/>
+          </a:prstGeom>
+          <a:solidFill>
+            <a:srgbClr val="27B5CE"/>
+          </a:solidFill>
+          <a:ln>
+            <a:noFill/>
+          </a:ln>
+          <a:effectLst/>
+        </p:spPr>
+        <p:style>
+          <a:lnRef idx="1">
+            <a:schemeClr val="accent1"/>
+          </a:lnRef>
+          <a:fillRef idx="3">
+            <a:schemeClr val="accent1"/>
+          </a:fillRef>
+          <a:effectRef idx="2">
+            <a:schemeClr val="accent1"/>
+          </a:effectRef>
+          <a:fontRef idx="minor">
+            <a:schemeClr val="lt1"/>
+          </a:fontRef>
+        </p:style>
+        <p:txBody>
+          <a:bodyPr rtlCol="0" anchor="ctr"/>
+          <a:lstStyle/>
+          <a:p>
+            <a:pPr algn="ctr"/>
+          </a:p>
+        </p:txBody>
+      </p:sp>
+      <p:sp>
+        <p:nvSpPr>
+          <p:cNvPr id="6" name="TextBox 5"/>
+          <p:cNvSpPr txBox="1"/>
+          <p:nvPr/>
+        </p:nvSpPr>
+        <p:spPr>
+          <a:xfrm>
+            <a:off x="502920" y="6400800"/>
+            <a:ext cx="5486400" cy="320040"/>
+          </a:xfrm>
+          <a:prstGeom prst="rect">
+            <a:avLst/>
+          </a:prstGeom>
+          <a:noFill/>
+        </p:spPr>
+        <p:txBody>
+          <a:bodyPr wrap="square" anchor="t" lIns="0" rIns="0" tIns="0" bIns="0">
+            <a:spAutoFit/>
+          </a:bodyPr>
+          <a:lstStyle/>
+          <a:p>
+            <a:r>
+              <a:rPr sz="1100" b="1" i="0">
+                <a:solidFill>
+                  <a:srgbClr val="2A2929"/>
+                </a:solidFill>
+                <a:latin typeface="Roboto"/>
+              </a:rPr>
+              <a:t>Kangan </a:t>
+            </a:r>
+            <a:r>
+              <a:rPr sz="1100" b="1" i="0">
+                <a:solidFill>
+                  <a:srgbClr val="D68E10"/>
+                </a:solidFill>
+                <a:latin typeface="Roboto"/>
+              </a:rPr>
+              <a:t>Institute</a:t>
+            </a:r>
+          </a:p>
+        </p:txBody>
+      </p:sp>
+      <p:sp>
+        <p:nvSpPr>
+          <p:cNvPr id="7" name="TextBox 6"/>
+          <p:cNvSpPr txBox="1"/>
+          <p:nvPr/>
+        </p:nvSpPr>
+        <p:spPr>
+          <a:xfrm>
+            <a:off x="10515600" y="6400800"/>
+            <a:ext cx="1188720" cy="320040"/>
+          </a:xfrm>
+          <a:prstGeom prst="rect">
+            <a:avLst/>
+          </a:prstGeom>
+          <a:noFill/>
+        </p:spPr>
+        <p:txBody>
+          <a:bodyPr wrap="square" anchor="t" lIns="0" rIns="0" tIns="0" bIns="0">
+            <a:spAutoFit/>
+          </a:bodyPr>
+          <a:lstStyle/>
+          <a:p>
+            <a:pPr algn="r"/>
+            <a:r>
+              <a:rPr sz="1100" b="0" i="0">
+                <a:solidFill>
+                  <a:srgbClr val="7A7A7A"/>
+                </a:solidFill>
+                <a:latin typeface="Roboto"/>
+              </a:rPr>
+              <a:t/>
+            </a:r>
+          </a:p>
+        </p:txBody>
+      </p:sp>
+    </p:spTree>
+  </p:cSld>
+  <p:clrMapOvr>
+    <a:masterClrMapping/>
+  </p:clrMapOvr>
+</p:sld>
+</file>
+
+<file path=ppt/slides/slide8.xml><?xml version="1.0" encoding="utf-8"?>
+<p:sld xmlns:a="http://schemas.openxmlformats.org/drawingml/2006/main" xmlns:p="http://schemas.openxmlformats.org/presentationml/2006/main" xmlns:r="http://schemas.openxmlformats.org/officeDocument/2006/relationships">
+  <p:cSld>
+    <p:bg>
+      <p:bgPr>
+        <a:solidFill>
+          <a:srgbClr val="FFFFFF"/>
+        </a:solidFill>
+        <a:effectLst/>
+      </p:bgPr>
+    </p:bg>
+    <p:spTree>
+      <p:nvGrpSpPr>
+        <p:cNvPr id="1" name=""/>
+        <p:cNvGrpSpPr/>
+        <p:nvPr/>
+      </p:nvGrpSpPr>
+      <p:grpSpPr/>
+      <p:sp>
+        <p:nvSpPr>
+          <p:cNvPr id="2" name="TextBox 1"/>
+          <p:cNvSpPr txBox="1"/>
+          <p:nvPr/>
+        </p:nvSpPr>
+        <p:spPr>
+          <a:xfrm>
+            <a:off x="640080" y="457200"/>
+            <a:ext cx="10881360" cy="960120"/>
+          </a:xfrm>
+          <a:prstGeom prst="rect">
+            <a:avLst/>
+          </a:prstGeom>
+          <a:noFill/>
+        </p:spPr>
+        <p:txBody>
+          <a:bodyPr wrap="square" anchor="t" lIns="0" rIns="0" tIns="0" bIns="0">
+            <a:spAutoFit/>
+          </a:bodyPr>
+          <a:lstStyle/>
+          <a:p>
+            <a:r>
               <a:rPr sz="2800" b="1" i="0">
                 <a:solidFill>
                   <a:srgbClr val="2A2929"/>
                 </a:solidFill>
                 <a:latin typeface="Roboto"/>
               </a:rPr>
-              <a:t>Solution Design document structure</a:t>
+              <a:t>What the proposal document is</a:t>
             </a:r>
           </a:p>
         </p:txBody>
@@ -7608,7 +12064,349 @@
             <a:avLst/>
           </a:prstGeom>
           <a:solidFill>
-            <a:srgbClr val="92268F"/>
+            <a:srgbClr val="27B5CE"/>
+          </a:solidFill>
+          <a:ln>
+            <a:noFill/>
+          </a:ln>
+          <a:effectLst/>
+        </p:spPr>
+        <p:style>
+          <a:lnRef idx="1">
+            <a:schemeClr val="accent1"/>
+          </a:lnRef>
+          <a:fillRef idx="3">
+            <a:schemeClr val="accent1"/>
+          </a:fillRef>
+          <a:effectRef idx="2">
+            <a:schemeClr val="accent1"/>
+          </a:effectRef>
+          <a:fontRef idx="minor">
+            <a:schemeClr val="lt1"/>
+          </a:fontRef>
+        </p:style>
+        <p:txBody>
+          <a:bodyPr rtlCol="0" anchor="ctr"/>
+          <a:lstStyle/>
+          <a:p>
+            <a:pPr algn="ctr"/>
+          </a:p>
+        </p:txBody>
+      </p:sp>
+      <p:sp>
+        <p:nvSpPr>
+          <p:cNvPr id="4" name="TextBox 3"/>
+          <p:cNvSpPr txBox="1"/>
+          <p:nvPr/>
+        </p:nvSpPr>
+        <p:spPr>
+          <a:xfrm>
+            <a:off x="658368" y="1691640"/>
+            <a:ext cx="10881360" cy="4480560"/>
+          </a:xfrm>
+          <a:prstGeom prst="rect">
+            <a:avLst/>
+          </a:prstGeom>
+          <a:noFill/>
+        </p:spPr>
+        <p:txBody>
+          <a:bodyPr wrap="square" anchor="ctr" lIns="0" rIns="0" tIns="0" bIns="0">
+            <a:spAutoFit/>
+          </a:bodyPr>
+          <a:lstStyle/>
+          <a:p>
+            <a:pPr marL="0" indent="0">
+              <a:lnSpc>
+                <a:spcPct val="105000"/>
+              </a:lnSpc>
+              <a:spcBef>
+                <a:spcPts val="0"/>
+              </a:spcBef>
+              <a:spcAft>
+                <a:spcPts val="1000"/>
+              </a:spcAft>
+            </a:pPr>
+            <a:r>
+              <a:rPr sz="2400" b="1" i="0">
+                <a:solidFill>
+                  <a:srgbClr val="EDAB0C"/>
+                </a:solidFill>
+                <a:latin typeface="Roboto"/>
+              </a:rPr>
+              <a:t>■  </a:t>
+            </a:r>
+            <a:r>
+              <a:rPr sz="2400" b="0" i="0">
+                <a:solidFill>
+                  <a:srgbClr val="2A2929"/>
+                </a:solidFill>
+                <a:latin typeface="Roboto"/>
+              </a:rPr>
+              <a:t>A professional artefact: the proposed architecture, the rationale, and the trade-offs — readable by a reviewer who wasn't in the room.</a:t>
+            </a:r>
+          </a:p>
+          <a:p>
+            <a:pPr marL="0" indent="0">
+              <a:lnSpc>
+                <a:spcPct val="105000"/>
+              </a:lnSpc>
+              <a:spcBef>
+                <a:spcPts val="0"/>
+              </a:spcBef>
+              <a:spcAft>
+                <a:spcPts val="1000"/>
+              </a:spcAft>
+            </a:pPr>
+            <a:r>
+              <a:rPr sz="2400" b="1" i="0">
+                <a:solidFill>
+                  <a:srgbClr val="EDAB0C"/>
+                </a:solidFill>
+                <a:latin typeface="Roboto"/>
+              </a:rPr>
+              <a:t>■  </a:t>
+            </a:r>
+            <a:r>
+              <a:rPr sz="2400" b="0" i="0">
+                <a:solidFill>
+                  <a:srgbClr val="2A2929"/>
+                </a:solidFill>
+                <a:latin typeface="Roboto"/>
+              </a:rPr>
+              <a:t>Diagrams, decision rationale, and the metrics behind each call — all three, not just the pictures.</a:t>
+            </a:r>
+          </a:p>
+          <a:p>
+            <a:pPr marL="0" indent="0">
+              <a:lnSpc>
+                <a:spcPct val="105000"/>
+              </a:lnSpc>
+              <a:spcBef>
+                <a:spcPts val="0"/>
+              </a:spcBef>
+              <a:spcAft>
+                <a:spcPts val="1000"/>
+              </a:spcAft>
+            </a:pPr>
+            <a:r>
+              <a:rPr sz="2400" b="1" i="0">
+                <a:solidFill>
+                  <a:srgbClr val="EDAB0C"/>
+                </a:solidFill>
+                <a:latin typeface="Roboto"/>
+              </a:rPr>
+              <a:t>■  </a:t>
+            </a:r>
+            <a:r>
+              <a:rPr sz="2400" b="0" i="0">
+                <a:solidFill>
+                  <a:srgbClr val="2A2929"/>
+                </a:solidFill>
+                <a:latin typeface="Roboto"/>
+              </a:rPr>
+              <a:t>Written for the decider, not the builder.</a:t>
+            </a:r>
+          </a:p>
+        </p:txBody>
+      </p:sp>
+      <p:sp>
+        <p:nvSpPr>
+          <p:cNvPr id="5" name="Rectangle 4"/>
+          <p:cNvSpPr/>
+          <p:nvPr/>
+        </p:nvSpPr>
+        <p:spPr>
+          <a:xfrm>
+            <a:off x="0" y="6565392"/>
+            <a:ext cx="12191695" cy="38100"/>
+          </a:xfrm>
+          <a:prstGeom prst="rect">
+            <a:avLst/>
+          </a:prstGeom>
+          <a:solidFill>
+            <a:srgbClr val="27B5CE"/>
+          </a:solidFill>
+          <a:ln>
+            <a:noFill/>
+          </a:ln>
+          <a:effectLst/>
+        </p:spPr>
+        <p:style>
+          <a:lnRef idx="1">
+            <a:schemeClr val="accent1"/>
+          </a:lnRef>
+          <a:fillRef idx="3">
+            <a:schemeClr val="accent1"/>
+          </a:fillRef>
+          <a:effectRef idx="2">
+            <a:schemeClr val="accent1"/>
+          </a:effectRef>
+          <a:fontRef idx="minor">
+            <a:schemeClr val="lt1"/>
+          </a:fontRef>
+        </p:style>
+        <p:txBody>
+          <a:bodyPr rtlCol="0" anchor="ctr"/>
+          <a:lstStyle/>
+          <a:p>
+            <a:pPr algn="ctr"/>
+          </a:p>
+        </p:txBody>
+      </p:sp>
+      <p:sp>
+        <p:nvSpPr>
+          <p:cNvPr id="6" name="TextBox 5"/>
+          <p:cNvSpPr txBox="1"/>
+          <p:nvPr/>
+        </p:nvSpPr>
+        <p:spPr>
+          <a:xfrm>
+            <a:off x="502920" y="6400800"/>
+            <a:ext cx="5486400" cy="320040"/>
+          </a:xfrm>
+          <a:prstGeom prst="rect">
+            <a:avLst/>
+          </a:prstGeom>
+          <a:noFill/>
+        </p:spPr>
+        <p:txBody>
+          <a:bodyPr wrap="square" anchor="t" lIns="0" rIns="0" tIns="0" bIns="0">
+            <a:spAutoFit/>
+          </a:bodyPr>
+          <a:lstStyle/>
+          <a:p>
+            <a:r>
+              <a:rPr sz="1100" b="1" i="0">
+                <a:solidFill>
+                  <a:srgbClr val="2A2929"/>
+                </a:solidFill>
+                <a:latin typeface="Roboto"/>
+              </a:rPr>
+              <a:t>Kangan </a:t>
+            </a:r>
+            <a:r>
+              <a:rPr sz="1100" b="1" i="0">
+                <a:solidFill>
+                  <a:srgbClr val="D68E10"/>
+                </a:solidFill>
+                <a:latin typeface="Roboto"/>
+              </a:rPr>
+              <a:t>Institute</a:t>
+            </a:r>
+          </a:p>
+        </p:txBody>
+      </p:sp>
+      <p:sp>
+        <p:nvSpPr>
+          <p:cNvPr id="7" name="TextBox 6"/>
+          <p:cNvSpPr txBox="1"/>
+          <p:nvPr/>
+        </p:nvSpPr>
+        <p:spPr>
+          <a:xfrm>
+            <a:off x="10515600" y="6400800"/>
+            <a:ext cx="1188720" cy="320040"/>
+          </a:xfrm>
+          <a:prstGeom prst="rect">
+            <a:avLst/>
+          </a:prstGeom>
+          <a:noFill/>
+        </p:spPr>
+        <p:txBody>
+          <a:bodyPr wrap="square" anchor="t" lIns="0" rIns="0" tIns="0" bIns="0">
+            <a:spAutoFit/>
+          </a:bodyPr>
+          <a:lstStyle/>
+          <a:p>
+            <a:pPr algn="r"/>
+            <a:r>
+              <a:rPr sz="1100" b="0" i="0">
+                <a:solidFill>
+                  <a:srgbClr val="7A7A7A"/>
+                </a:solidFill>
+                <a:latin typeface="Roboto"/>
+              </a:rPr>
+              <a:t>5</a:t>
+            </a:r>
+          </a:p>
+        </p:txBody>
+      </p:sp>
+    </p:spTree>
+  </p:cSld>
+  <p:clrMapOvr>
+    <a:masterClrMapping/>
+  </p:clrMapOvr>
+</p:sld>
+</file>
+
+<file path=ppt/slides/slide9.xml><?xml version="1.0" encoding="utf-8"?>
+<p:sld xmlns:a="http://schemas.openxmlformats.org/drawingml/2006/main" xmlns:p="http://schemas.openxmlformats.org/presentationml/2006/main" xmlns:r="http://schemas.openxmlformats.org/officeDocument/2006/relationships">
+  <p:cSld>
+    <p:bg>
+      <p:bgPr>
+        <a:solidFill>
+          <a:srgbClr val="FFFFFF"/>
+        </a:solidFill>
+        <a:effectLst/>
+      </p:bgPr>
+    </p:bg>
+    <p:spTree>
+      <p:nvGrpSpPr>
+        <p:cNvPr id="1" name=""/>
+        <p:cNvGrpSpPr/>
+        <p:nvPr/>
+      </p:nvGrpSpPr>
+      <p:grpSpPr/>
+      <p:sp>
+        <p:nvSpPr>
+          <p:cNvPr id="2" name="TextBox 1"/>
+          <p:cNvSpPr txBox="1"/>
+          <p:nvPr/>
+        </p:nvSpPr>
+        <p:spPr>
+          <a:xfrm>
+            <a:off x="640080" y="457200"/>
+            <a:ext cx="10881360" cy="960120"/>
+          </a:xfrm>
+          <a:prstGeom prst="rect">
+            <a:avLst/>
+          </a:prstGeom>
+          <a:noFill/>
+        </p:spPr>
+        <p:txBody>
+          <a:bodyPr wrap="square" anchor="t" lIns="0" rIns="0" tIns="0" bIns="0">
+            <a:spAutoFit/>
+          </a:bodyPr>
+          <a:lstStyle/>
+          <a:p>
+            <a:r>
+              <a:rPr sz="2800" b="1" i="0">
+                <a:solidFill>
+                  <a:srgbClr val="2A2929"/>
+                </a:solidFill>
+                <a:latin typeface="Roboto"/>
+              </a:rPr>
+              <a:t>Proposal structure</a:t>
+            </a:r>
+          </a:p>
+        </p:txBody>
+      </p:sp>
+      <p:sp>
+        <p:nvSpPr>
+          <p:cNvPr id="3" name="Rectangle 2"/>
+          <p:cNvSpPr/>
+          <p:nvPr/>
+        </p:nvSpPr>
+        <p:spPr>
+          <a:xfrm>
+            <a:off x="658368" y="1371600"/>
+            <a:ext cx="1463040" cy="50800"/>
+          </a:xfrm>
+          <a:prstGeom prst="rect">
+            <a:avLst/>
+          </a:prstGeom>
+          <a:solidFill>
+            <a:srgbClr val="27B5CE"/>
           </a:solidFill>
           <a:ln>
             <a:noFill/>
@@ -7678,7 +12476,7 @@
                   </a:txBody>
                   <a:tcPr marL="76200" marR="76200">
                     <a:solidFill>
-                      <a:srgbClr val="92268F"/>
+                      <a:srgbClr val="27B5CE"/>
                     </a:solidFill>
                   </a:tcPr>
                 </a:tc>
@@ -7700,7 +12498,7 @@
                   </a:txBody>
                   <a:tcPr marL="76200" marR="76200">
                     <a:solidFill>
-                      <a:srgbClr val="92268F"/>
+                      <a:srgbClr val="27B5CE"/>
                     </a:solidFill>
                   </a:tcPr>
                 </a:tc>
@@ -7740,7 +12538,7 @@
                           </a:solidFill>
                           <a:latin typeface="Roboto"/>
                         </a:rPr>
-                        <a:t>Current Ledgerline architecture and the improvement needs (Topic 1)</a:t>
+                        <a:t>The current architecture and the improvement needs</a:t>
                       </a:r>
                     </a:p>
                   </a:txBody>
@@ -7786,7 +12584,7 @@
                           </a:solidFill>
                           <a:latin typeface="Roboto"/>
                         </a:rPr>
-                        <a:t>The improved design + diagrams (reliability + scalability, Topics 2–3)</a:t>
+                        <a:t>The improved design and its diagram</a:t>
                       </a:r>
                     </a:p>
                   </a:txBody>
@@ -7878,7 +12676,7 @@
                           </a:solidFill>
                           <a:latin typeface="Roboto"/>
                         </a:rPr>
-                        <a:t>The trade-offs — including why the database is not Multi-AZ</a:t>
+                        <a:t>The trade-offs — including what was rejected and why</a:t>
                       </a:r>
                     </a:p>
                   </a:txBody>
@@ -7968,7 +12766,7 @@
                 </a:solidFill>
                 <a:latin typeface="Roboto Light"/>
               </a:rPr>
-              <a:t>The cost-benefit is a section here, not a separate business case; the sign-off record closes the document.</a:t>
+              <a:t>The cost-benefit is a section here, not a separate business case.</a:t>
             </a:r>
           </a:p>
         </p:txBody>
@@ -7983,940 +12781,6 @@
           <a:xfrm>
             <a:off x="0" y="6565392"/>
             <a:ext cx="12191695" cy="38100"/>
-          </a:xfrm>
-          <a:prstGeom prst="rect">
-            <a:avLst/>
-          </a:prstGeom>
-          <a:solidFill>
-            <a:srgbClr val="92268F"/>
-          </a:solidFill>
-          <a:ln>
-            <a:noFill/>
-          </a:ln>
-          <a:effectLst/>
-        </p:spPr>
-        <p:style>
-          <a:lnRef idx="1">
-            <a:schemeClr val="accent1"/>
-          </a:lnRef>
-          <a:fillRef idx="3">
-            <a:schemeClr val="accent1"/>
-          </a:fillRef>
-          <a:effectRef idx="2">
-            <a:schemeClr val="accent1"/>
-          </a:effectRef>
-          <a:fontRef idx="minor">
-            <a:schemeClr val="lt1"/>
-          </a:fontRef>
-        </p:style>
-        <p:txBody>
-          <a:bodyPr rtlCol="0" anchor="ctr"/>
-          <a:lstStyle/>
-          <a:p>
-            <a:pPr algn="ctr"/>
-          </a:p>
-        </p:txBody>
-      </p:sp>
-      <p:sp>
-        <p:nvSpPr>
-          <p:cNvPr id="7" name="TextBox 6"/>
-          <p:cNvSpPr txBox="1"/>
-          <p:nvPr/>
-        </p:nvSpPr>
-        <p:spPr>
-          <a:xfrm>
-            <a:off x="502920" y="6400800"/>
-            <a:ext cx="5486400" cy="320040"/>
-          </a:xfrm>
-          <a:prstGeom prst="rect">
-            <a:avLst/>
-          </a:prstGeom>
-          <a:noFill/>
-        </p:spPr>
-        <p:txBody>
-          <a:bodyPr wrap="square" anchor="t" lIns="0" rIns="0" tIns="0" bIns="0">
-            <a:spAutoFit/>
-          </a:bodyPr>
-          <a:lstStyle/>
-          <a:p>
-            <a:r>
-              <a:rPr sz="1100" b="1" i="0">
-                <a:solidFill>
-                  <a:srgbClr val="2A2929"/>
-                </a:solidFill>
-                <a:latin typeface="Roboto"/>
-              </a:rPr>
-              <a:t>Kangan </a:t>
-            </a:r>
-            <a:r>
-              <a:rPr sz="1100" b="1" i="0">
-                <a:solidFill>
-                  <a:srgbClr val="D68E10"/>
-                </a:solidFill>
-                <a:latin typeface="Roboto"/>
-              </a:rPr>
-              <a:t>Institute</a:t>
-            </a:r>
-          </a:p>
-        </p:txBody>
-      </p:sp>
-      <p:sp>
-        <p:nvSpPr>
-          <p:cNvPr id="8" name="TextBox 7"/>
-          <p:cNvSpPr txBox="1"/>
-          <p:nvPr/>
-        </p:nvSpPr>
-        <p:spPr>
-          <a:xfrm>
-            <a:off x="10515600" y="6400800"/>
-            <a:ext cx="1188720" cy="320040"/>
-          </a:xfrm>
-          <a:prstGeom prst="rect">
-            <a:avLst/>
-          </a:prstGeom>
-          <a:noFill/>
-        </p:spPr>
-        <p:txBody>
-          <a:bodyPr wrap="square" anchor="t" lIns="0" rIns="0" tIns="0" bIns="0">
-            <a:spAutoFit/>
-          </a:bodyPr>
-          <a:lstStyle/>
-          <a:p>
-            <a:pPr algn="r"/>
-            <a:r>
-              <a:rPr sz="1100" b="0" i="0">
-                <a:solidFill>
-                  <a:srgbClr val="7A7A7A"/>
-                </a:solidFill>
-                <a:latin typeface="Roboto"/>
-              </a:rPr>
-              <a:t>4</a:t>
-            </a:r>
-          </a:p>
-        </p:txBody>
-      </p:sp>
-    </p:spTree>
-  </p:cSld>
-  <p:clrMapOvr>
-    <a:masterClrMapping/>
-  </p:clrMapOvr>
-</p:sld>
-</file>
-
-<file path=ppt/slides/slide7.xml><?xml version="1.0" encoding="utf-8"?>
-<p:sld xmlns:a="http://schemas.openxmlformats.org/drawingml/2006/main" xmlns:p="http://schemas.openxmlformats.org/presentationml/2006/main" xmlns:r="http://schemas.openxmlformats.org/officeDocument/2006/relationships">
-  <p:cSld>
-    <p:bg>
-      <p:bgPr>
-        <a:solidFill>
-          <a:srgbClr val="FFFFFF"/>
-        </a:solidFill>
-        <a:effectLst/>
-      </p:bgPr>
-    </p:bg>
-    <p:spTree>
-      <p:nvGrpSpPr>
-        <p:cNvPr id="1" name=""/>
-        <p:cNvGrpSpPr/>
-        <p:nvPr/>
-      </p:nvGrpSpPr>
-      <p:grpSpPr/>
-      <p:sp>
-        <p:nvSpPr>
-          <p:cNvPr id="2" name="TextBox 1"/>
-          <p:cNvSpPr txBox="1"/>
-          <p:nvPr/>
-        </p:nvSpPr>
-        <p:spPr>
-          <a:xfrm>
-            <a:off x="640080" y="457200"/>
-            <a:ext cx="10881360" cy="960120"/>
-          </a:xfrm>
-          <a:prstGeom prst="rect">
-            <a:avLst/>
-          </a:prstGeom>
-          <a:noFill/>
-        </p:spPr>
-        <p:txBody>
-          <a:bodyPr wrap="square" anchor="t" lIns="0" rIns="0" tIns="0" bIns="0">
-            <a:spAutoFit/>
-          </a:bodyPr>
-          <a:lstStyle/>
-          <a:p>
-            <a:r>
-              <a:rPr sz="2800" b="1" i="0">
-                <a:solidFill>
-                  <a:srgbClr val="2A2929"/>
-                </a:solidFill>
-                <a:latin typeface="Roboto"/>
-              </a:rPr>
-              <a:t>Present it for review</a:t>
-            </a:r>
-          </a:p>
-        </p:txBody>
-      </p:sp>
-      <p:sp>
-        <p:nvSpPr>
-          <p:cNvPr id="3" name="Rectangle 2"/>
-          <p:cNvSpPr/>
-          <p:nvPr/>
-        </p:nvSpPr>
-        <p:spPr>
-          <a:xfrm>
-            <a:off x="658368" y="1371600"/>
-            <a:ext cx="1463040" cy="50800"/>
-          </a:xfrm>
-          <a:prstGeom prst="rect">
-            <a:avLst/>
-          </a:prstGeom>
-          <a:solidFill>
-            <a:srgbClr val="92268F"/>
-          </a:solidFill>
-          <a:ln>
-            <a:noFill/>
-          </a:ln>
-          <a:effectLst/>
-        </p:spPr>
-        <p:style>
-          <a:lnRef idx="1">
-            <a:schemeClr val="accent1"/>
-          </a:lnRef>
-          <a:fillRef idx="3">
-            <a:schemeClr val="accent1"/>
-          </a:fillRef>
-          <a:effectRef idx="2">
-            <a:schemeClr val="accent1"/>
-          </a:effectRef>
-          <a:fontRef idx="minor">
-            <a:schemeClr val="lt1"/>
-          </a:fontRef>
-        </p:style>
-        <p:txBody>
-          <a:bodyPr rtlCol="0" anchor="ctr"/>
-          <a:lstStyle/>
-          <a:p>
-            <a:pPr algn="ctr"/>
-          </a:p>
-        </p:txBody>
-      </p:sp>
-      <p:sp>
-        <p:nvSpPr>
-          <p:cNvPr id="4" name="TextBox 3"/>
-          <p:cNvSpPr txBox="1"/>
-          <p:nvPr/>
-        </p:nvSpPr>
-        <p:spPr>
-          <a:xfrm>
-            <a:off x="658368" y="1691640"/>
-            <a:ext cx="10881360" cy="4480560"/>
-          </a:xfrm>
-          <a:prstGeom prst="rect">
-            <a:avLst/>
-          </a:prstGeom>
-          <a:noFill/>
-        </p:spPr>
-        <p:txBody>
-          <a:bodyPr wrap="square" anchor="ctr" lIns="0" rIns="0" tIns="0" bIns="0">
-            <a:spAutoFit/>
-          </a:bodyPr>
-          <a:lstStyle/>
-          <a:p>
-            <a:pPr marL="0" indent="0">
-              <a:lnSpc>
-                <a:spcPct val="105000"/>
-              </a:lnSpc>
-              <a:spcBef>
-                <a:spcPts val="0"/>
-              </a:spcBef>
-              <a:spcAft>
-                <a:spcPts val="1000"/>
-              </a:spcAft>
-            </a:pPr>
-            <a:r>
-              <a:rPr sz="2400" b="1" i="0">
-                <a:solidFill>
-                  <a:srgbClr val="EDAB0C"/>
-                </a:solidFill>
-                <a:latin typeface="Roboto"/>
-              </a:rPr>
-              <a:t>■  </a:t>
-            </a:r>
-            <a:r>
-              <a:rPr sz="2400" b="0" i="0">
-                <a:solidFill>
-                  <a:srgbClr val="2A2929"/>
-                </a:solidFill>
-                <a:latin typeface="Roboto"/>
-              </a:rPr>
-              <a:t>Present the proposed architecture to the required personnel for review — walk the decisions that matter, not every line.</a:t>
-            </a:r>
-          </a:p>
-          <a:p>
-            <a:pPr marL="0" indent="0">
-              <a:lnSpc>
-                <a:spcPct val="105000"/>
-              </a:lnSpc>
-              <a:spcBef>
-                <a:spcPts val="0"/>
-              </a:spcBef>
-              <a:spcAft>
-                <a:spcPts val="1000"/>
-              </a:spcAft>
-            </a:pPr>
-            <a:r>
-              <a:rPr sz="2400" b="1" i="0">
-                <a:solidFill>
-                  <a:srgbClr val="EDAB0C"/>
-                </a:solidFill>
-                <a:latin typeface="Roboto"/>
-              </a:rPr>
-              <a:t>■  </a:t>
-            </a:r>
-            <a:r>
-              <a:rPr sz="2400" b="0" i="0">
-                <a:solidFill>
-                  <a:srgbClr val="2A2929"/>
-                </a:solidFill>
-                <a:latin typeface="Roboto"/>
-              </a:rPr>
-              <a:t>Be ready to defend the reliability cost-benefit call: why the database stays single-AZ rather than Multi-AZ.</a:t>
-            </a:r>
-          </a:p>
-          <a:p>
-            <a:pPr marL="0" indent="0">
-              <a:lnSpc>
-                <a:spcPct val="105000"/>
-              </a:lnSpc>
-              <a:spcBef>
-                <a:spcPts val="0"/>
-              </a:spcBef>
-              <a:spcAft>
-                <a:spcPts val="1000"/>
-              </a:spcAft>
-            </a:pPr>
-            <a:r>
-              <a:rPr sz="2400" b="1" i="0">
-                <a:solidFill>
-                  <a:srgbClr val="EDAB0C"/>
-                </a:solidFill>
-                <a:latin typeface="Roboto"/>
-              </a:rPr>
-              <a:t>■  </a:t>
-            </a:r>
-            <a:r>
-              <a:rPr sz="2400" b="0" i="0">
-                <a:solidFill>
-                  <a:srgbClr val="2A2929"/>
-                </a:solidFill>
-                <a:latin typeface="Roboto"/>
-              </a:rPr>
-              <a:t>Seek feedback and respond — accept, adjust, or defend with reasons; this is an observed individual oral in AT1 Part B.</a:t>
-            </a:r>
-          </a:p>
-        </p:txBody>
-      </p:sp>
-      <p:sp>
-        <p:nvSpPr>
-          <p:cNvPr id="5" name="Rectangle 4"/>
-          <p:cNvSpPr/>
-          <p:nvPr/>
-        </p:nvSpPr>
-        <p:spPr>
-          <a:xfrm>
-            <a:off x="0" y="6565392"/>
-            <a:ext cx="12191695" cy="38100"/>
-          </a:xfrm>
-          <a:prstGeom prst="rect">
-            <a:avLst/>
-          </a:prstGeom>
-          <a:solidFill>
-            <a:srgbClr val="92268F"/>
-          </a:solidFill>
-          <a:ln>
-            <a:noFill/>
-          </a:ln>
-          <a:effectLst/>
-        </p:spPr>
-        <p:style>
-          <a:lnRef idx="1">
-            <a:schemeClr val="accent1"/>
-          </a:lnRef>
-          <a:fillRef idx="3">
-            <a:schemeClr val="accent1"/>
-          </a:fillRef>
-          <a:effectRef idx="2">
-            <a:schemeClr val="accent1"/>
-          </a:effectRef>
-          <a:fontRef idx="minor">
-            <a:schemeClr val="lt1"/>
-          </a:fontRef>
-        </p:style>
-        <p:txBody>
-          <a:bodyPr rtlCol="0" anchor="ctr"/>
-          <a:lstStyle/>
-          <a:p>
-            <a:pPr algn="ctr"/>
-          </a:p>
-        </p:txBody>
-      </p:sp>
-      <p:sp>
-        <p:nvSpPr>
-          <p:cNvPr id="6" name="TextBox 5"/>
-          <p:cNvSpPr txBox="1"/>
-          <p:nvPr/>
-        </p:nvSpPr>
-        <p:spPr>
-          <a:xfrm>
-            <a:off x="502920" y="6400800"/>
-            <a:ext cx="5486400" cy="320040"/>
-          </a:xfrm>
-          <a:prstGeom prst="rect">
-            <a:avLst/>
-          </a:prstGeom>
-          <a:noFill/>
-        </p:spPr>
-        <p:txBody>
-          <a:bodyPr wrap="square" anchor="t" lIns="0" rIns="0" tIns="0" bIns="0">
-            <a:spAutoFit/>
-          </a:bodyPr>
-          <a:lstStyle/>
-          <a:p>
-            <a:r>
-              <a:rPr sz="1100" b="1" i="0">
-                <a:solidFill>
-                  <a:srgbClr val="2A2929"/>
-                </a:solidFill>
-                <a:latin typeface="Roboto"/>
-              </a:rPr>
-              <a:t>Kangan </a:t>
-            </a:r>
-            <a:r>
-              <a:rPr sz="1100" b="1" i="0">
-                <a:solidFill>
-                  <a:srgbClr val="D68E10"/>
-                </a:solidFill>
-                <a:latin typeface="Roboto"/>
-              </a:rPr>
-              <a:t>Institute</a:t>
-            </a:r>
-          </a:p>
-        </p:txBody>
-      </p:sp>
-      <p:sp>
-        <p:nvSpPr>
-          <p:cNvPr id="7" name="TextBox 6"/>
-          <p:cNvSpPr txBox="1"/>
-          <p:nvPr/>
-        </p:nvSpPr>
-        <p:spPr>
-          <a:xfrm>
-            <a:off x="10515600" y="6400800"/>
-            <a:ext cx="1188720" cy="320040"/>
-          </a:xfrm>
-          <a:prstGeom prst="rect">
-            <a:avLst/>
-          </a:prstGeom>
-          <a:noFill/>
-        </p:spPr>
-        <p:txBody>
-          <a:bodyPr wrap="square" anchor="t" lIns="0" rIns="0" tIns="0" bIns="0">
-            <a:spAutoFit/>
-          </a:bodyPr>
-          <a:lstStyle/>
-          <a:p>
-            <a:pPr algn="r"/>
-            <a:r>
-              <a:rPr sz="1100" b="0" i="0">
-                <a:solidFill>
-                  <a:srgbClr val="7A7A7A"/>
-                </a:solidFill>
-                <a:latin typeface="Roboto"/>
-              </a:rPr>
-              <a:t>5</a:t>
-            </a:r>
-          </a:p>
-        </p:txBody>
-      </p:sp>
-    </p:spTree>
-  </p:cSld>
-  <p:clrMapOvr>
-    <a:masterClrMapping/>
-  </p:clrMapOvr>
-</p:sld>
-</file>
-
-<file path=ppt/slides/slide8.xml><?xml version="1.0" encoding="utf-8"?>
-<p:sld xmlns:a="http://schemas.openxmlformats.org/drawingml/2006/main" xmlns:p="http://schemas.openxmlformats.org/presentationml/2006/main" xmlns:r="http://schemas.openxmlformats.org/officeDocument/2006/relationships">
-  <p:cSld>
-    <p:bg>
-      <p:bgPr>
-        <a:solidFill>
-          <a:srgbClr val="FFFFFF"/>
-        </a:solidFill>
-        <a:effectLst/>
-      </p:bgPr>
-    </p:bg>
-    <p:spTree>
-      <p:nvGrpSpPr>
-        <p:cNvPr id="1" name=""/>
-        <p:cNvGrpSpPr/>
-        <p:nvPr/>
-      </p:nvGrpSpPr>
-      <p:grpSpPr/>
-      <p:sp>
-        <p:nvSpPr>
-          <p:cNvPr id="2" name="Rectangle 1"/>
-          <p:cNvSpPr/>
-          <p:nvPr/>
-        </p:nvSpPr>
-        <p:spPr>
-          <a:xfrm>
-            <a:off x="0" y="0"/>
-            <a:ext cx="12191695" cy="1234440"/>
-          </a:xfrm>
-          <a:prstGeom prst="rect">
-            <a:avLst/>
-          </a:prstGeom>
-          <a:solidFill>
-            <a:srgbClr val="92268F"/>
-          </a:solidFill>
-          <a:ln>
-            <a:noFill/>
-          </a:ln>
-          <a:effectLst/>
-        </p:spPr>
-        <p:style>
-          <a:lnRef idx="1">
-            <a:schemeClr val="accent1"/>
-          </a:lnRef>
-          <a:fillRef idx="3">
-            <a:schemeClr val="accent1"/>
-          </a:fillRef>
-          <a:effectRef idx="2">
-            <a:schemeClr val="accent1"/>
-          </a:effectRef>
-          <a:fontRef idx="minor">
-            <a:schemeClr val="lt1"/>
-          </a:fontRef>
-        </p:style>
-        <p:txBody>
-          <a:bodyPr rtlCol="0" anchor="ctr"/>
-          <a:lstStyle/>
-          <a:p>
-            <a:pPr algn="ctr"/>
-          </a:p>
-        </p:txBody>
-      </p:sp>
-      <p:sp>
-        <p:nvSpPr>
-          <p:cNvPr id="3" name="Rounded Rectangle 2"/>
-          <p:cNvSpPr/>
-          <p:nvPr/>
-        </p:nvSpPr>
-        <p:spPr>
-          <a:xfrm>
-            <a:off x="640080" y="384048"/>
-            <a:ext cx="1691640" cy="457200"/>
-          </a:xfrm>
-          <a:prstGeom prst="roundRect">
-            <a:avLst/>
-          </a:prstGeom>
-          <a:solidFill>
-            <a:srgbClr val="2A2929"/>
-          </a:solidFill>
-          <a:ln>
-            <a:noFill/>
-          </a:ln>
-          <a:effectLst/>
-        </p:spPr>
-        <p:style>
-          <a:lnRef idx="1">
-            <a:schemeClr val="accent1"/>
-          </a:lnRef>
-          <a:fillRef idx="3">
-            <a:schemeClr val="accent1"/>
-          </a:fillRef>
-          <a:effectRef idx="2">
-            <a:schemeClr val="accent1"/>
-          </a:effectRef>
-          <a:fontRef idx="minor">
-            <a:schemeClr val="lt1"/>
-          </a:fontRef>
-        </p:style>
-        <p:txBody>
-          <a:bodyPr rtlCol="0" anchor="ctr"/>
-          <a:lstStyle/>
-          <a:p>
-            <a:pPr algn="ctr"/>
-            <a:r>
-              <a:rPr sz="1400" b="1" i="0">
-                <a:solidFill>
-                  <a:srgbClr val="FBB900"/>
-                </a:solidFill>
-                <a:latin typeface="Roboto"/>
-              </a:rPr>
-              <a:t>ACTIVITY</a:t>
-            </a:r>
-          </a:p>
-        </p:txBody>
-      </p:sp>
-      <p:sp>
-        <p:nvSpPr>
-          <p:cNvPr id="4" name="TextBox 3"/>
-          <p:cNvSpPr txBox="1"/>
-          <p:nvPr/>
-        </p:nvSpPr>
-        <p:spPr>
-          <a:xfrm>
-            <a:off x="2560320" y="310896"/>
-            <a:ext cx="8961120" cy="685800"/>
-          </a:xfrm>
-          <a:prstGeom prst="rect">
-            <a:avLst/>
-          </a:prstGeom>
-          <a:noFill/>
-        </p:spPr>
-        <p:txBody>
-          <a:bodyPr wrap="square" anchor="ctr" lIns="0" rIns="0" tIns="0" bIns="0">
-            <a:spAutoFit/>
-          </a:bodyPr>
-          <a:lstStyle/>
-          <a:p>
-            <a:r>
-              <a:rPr sz="2600" b="1" i="0">
-                <a:solidFill>
-                  <a:srgbClr val="FFFFFF"/>
-                </a:solidFill>
-                <a:latin typeface="Roboto"/>
-              </a:rPr>
-              <a:t>Rehearse the design walkthrough</a:t>
-            </a:r>
-          </a:p>
-        </p:txBody>
-      </p:sp>
-      <p:sp>
-        <p:nvSpPr>
-          <p:cNvPr id="5" name="TextBox 4"/>
-          <p:cNvSpPr txBox="1"/>
-          <p:nvPr/>
-        </p:nvSpPr>
-        <p:spPr>
-          <a:xfrm>
-            <a:off x="658368" y="1554480"/>
-            <a:ext cx="10881360" cy="4297680"/>
-          </a:xfrm>
-          <a:prstGeom prst="rect">
-            <a:avLst/>
-          </a:prstGeom>
-          <a:noFill/>
-        </p:spPr>
-        <p:txBody>
-          <a:bodyPr wrap="square" anchor="t" lIns="0" rIns="0" tIns="0" bIns="0">
-            <a:spAutoFit/>
-          </a:bodyPr>
-          <a:lstStyle/>
-          <a:p>
-            <a:pPr marL="0" indent="0">
-              <a:lnSpc>
-                <a:spcPct val="105000"/>
-              </a:lnSpc>
-              <a:spcBef>
-                <a:spcPts val="0"/>
-              </a:spcBef>
-              <a:spcAft>
-                <a:spcPts val="1000"/>
-              </a:spcAft>
-            </a:pPr>
-            <a:r>
-              <a:rPr sz="1700" b="1" i="0">
-                <a:solidFill>
-                  <a:srgbClr val="EDAB0C"/>
-                </a:solidFill>
-                <a:latin typeface="Roboto"/>
-              </a:rPr>
-              <a:t>■  </a:t>
-            </a:r>
-            <a:r>
-              <a:rPr sz="1700" b="0" i="0">
-                <a:solidFill>
-                  <a:srgbClr val="2A2929"/>
-                </a:solidFill>
-                <a:latin typeface="Roboto"/>
-              </a:rPr>
-              <a:t>For the practice engagement (the website vehicle), present your assembled Solution Design to a mock review panel.</a:t>
-            </a:r>
-          </a:p>
-          <a:p>
-            <a:pPr marL="0" indent="0">
-              <a:lnSpc>
-                <a:spcPct val="105000"/>
-              </a:lnSpc>
-              <a:spcBef>
-                <a:spcPts val="0"/>
-              </a:spcBef>
-              <a:spcAft>
-                <a:spcPts val="1000"/>
-              </a:spcAft>
-            </a:pPr>
-            <a:r>
-              <a:rPr sz="1700" b="1" i="0">
-                <a:solidFill>
-                  <a:srgbClr val="EDAB0C"/>
-                </a:solidFill>
-                <a:latin typeface="Roboto"/>
-              </a:rPr>
-              <a:t>■  </a:t>
-            </a:r>
-            <a:r>
-              <a:rPr sz="1700" b="0" i="0">
-                <a:solidFill>
-                  <a:srgbClr val="2A2929"/>
-                </a:solidFill>
-                <a:latin typeface="Roboto"/>
-              </a:rPr>
-              <a:t>Walk the key decisions and defend the cost-benefit trade-offs; seek and respond to feedback.</a:t>
-            </a:r>
-          </a:p>
-        </p:txBody>
-      </p:sp>
-      <p:sp>
-        <p:nvSpPr>
-          <p:cNvPr id="6" name="Rounded Rectangle 5"/>
-          <p:cNvSpPr/>
-          <p:nvPr/>
-        </p:nvSpPr>
-        <p:spPr>
-          <a:xfrm>
-            <a:off x="640080" y="5897880"/>
-            <a:ext cx="4023360" cy="457200"/>
-          </a:xfrm>
-          <a:prstGeom prst="roundRect">
-            <a:avLst/>
-          </a:prstGeom>
-          <a:solidFill>
-            <a:srgbClr val="F9F9F9"/>
-          </a:solidFill>
-          <a:ln w="12700">
-            <a:solidFill>
-              <a:srgbClr val="CCCCCC"/>
-            </a:solidFill>
-          </a:ln>
-          <a:effectLst/>
-        </p:spPr>
-        <p:style>
-          <a:lnRef idx="1">
-            <a:schemeClr val="accent1"/>
-          </a:lnRef>
-          <a:fillRef idx="3">
-            <a:schemeClr val="accent1"/>
-          </a:fillRef>
-          <a:effectRef idx="2">
-            <a:schemeClr val="accent1"/>
-          </a:effectRef>
-          <a:fontRef idx="minor">
-            <a:schemeClr val="lt1"/>
-          </a:fontRef>
-        </p:style>
-        <p:txBody>
-          <a:bodyPr rtlCol="0" anchor="ctr"/>
-          <a:lstStyle/>
-          <a:p>
-            <a:pPr algn="ctr"/>
-          </a:p>
-        </p:txBody>
-      </p:sp>
-      <p:sp>
-        <p:nvSpPr>
-          <p:cNvPr id="7" name="TextBox 6"/>
-          <p:cNvSpPr txBox="1"/>
-          <p:nvPr/>
-        </p:nvSpPr>
-        <p:spPr>
-          <a:xfrm>
-            <a:off x="822960" y="5943600"/>
-            <a:ext cx="3657600" cy="365760"/>
-          </a:xfrm>
-          <a:prstGeom prst="rect">
-            <a:avLst/>
-          </a:prstGeom>
-          <a:noFill/>
-        </p:spPr>
-        <p:txBody>
-          <a:bodyPr wrap="square" anchor="ctr" lIns="0" rIns="0" tIns="0" bIns="0">
-            <a:spAutoFit/>
-          </a:bodyPr>
-          <a:lstStyle/>
-          <a:p>
-            <a:r>
-              <a:rPr sz="1500" b="1" i="0">
-                <a:solidFill>
-                  <a:srgbClr val="2A2929"/>
-                </a:solidFill>
-                <a:latin typeface="Roboto"/>
-              </a:rPr>
-              <a:t>⏱  ~25 min</a:t>
-            </a:r>
-          </a:p>
-        </p:txBody>
-      </p:sp>
-      <p:sp>
-        <p:nvSpPr>
-          <p:cNvPr id="8" name="Rectangle 7"/>
-          <p:cNvSpPr/>
-          <p:nvPr/>
-        </p:nvSpPr>
-        <p:spPr>
-          <a:xfrm>
-            <a:off x="0" y="6565392"/>
-            <a:ext cx="12191695" cy="38100"/>
-          </a:xfrm>
-          <a:prstGeom prst="rect">
-            <a:avLst/>
-          </a:prstGeom>
-          <a:solidFill>
-            <a:srgbClr val="92268F"/>
-          </a:solidFill>
-          <a:ln>
-            <a:noFill/>
-          </a:ln>
-          <a:effectLst/>
-        </p:spPr>
-        <p:style>
-          <a:lnRef idx="1">
-            <a:schemeClr val="accent1"/>
-          </a:lnRef>
-          <a:fillRef idx="3">
-            <a:schemeClr val="accent1"/>
-          </a:fillRef>
-          <a:effectRef idx="2">
-            <a:schemeClr val="accent1"/>
-          </a:effectRef>
-          <a:fontRef idx="minor">
-            <a:schemeClr val="lt1"/>
-          </a:fontRef>
-        </p:style>
-        <p:txBody>
-          <a:bodyPr rtlCol="0" anchor="ctr"/>
-          <a:lstStyle/>
-          <a:p>
-            <a:pPr algn="ctr"/>
-          </a:p>
-        </p:txBody>
-      </p:sp>
-      <p:sp>
-        <p:nvSpPr>
-          <p:cNvPr id="9" name="TextBox 8"/>
-          <p:cNvSpPr txBox="1"/>
-          <p:nvPr/>
-        </p:nvSpPr>
-        <p:spPr>
-          <a:xfrm>
-            <a:off x="502920" y="6400800"/>
-            <a:ext cx="5486400" cy="320040"/>
-          </a:xfrm>
-          <a:prstGeom prst="rect">
-            <a:avLst/>
-          </a:prstGeom>
-          <a:noFill/>
-        </p:spPr>
-        <p:txBody>
-          <a:bodyPr wrap="square" anchor="t" lIns="0" rIns="0" tIns="0" bIns="0">
-            <a:spAutoFit/>
-          </a:bodyPr>
-          <a:lstStyle/>
-          <a:p>
-            <a:r>
-              <a:rPr sz="1100" b="1" i="0">
-                <a:solidFill>
-                  <a:srgbClr val="2A2929"/>
-                </a:solidFill>
-                <a:latin typeface="Roboto"/>
-              </a:rPr>
-              <a:t>Kangan </a:t>
-            </a:r>
-            <a:r>
-              <a:rPr sz="1100" b="1" i="0">
-                <a:solidFill>
-                  <a:srgbClr val="D68E10"/>
-                </a:solidFill>
-                <a:latin typeface="Roboto"/>
-              </a:rPr>
-              <a:t>Institute</a:t>
-            </a:r>
-          </a:p>
-        </p:txBody>
-      </p:sp>
-      <p:sp>
-        <p:nvSpPr>
-          <p:cNvPr id="10" name="TextBox 9"/>
-          <p:cNvSpPr txBox="1"/>
-          <p:nvPr/>
-        </p:nvSpPr>
-        <p:spPr>
-          <a:xfrm>
-            <a:off x="10515600" y="6400800"/>
-            <a:ext cx="1188720" cy="320040"/>
-          </a:xfrm>
-          <a:prstGeom prst="rect">
-            <a:avLst/>
-          </a:prstGeom>
-          <a:noFill/>
-        </p:spPr>
-        <p:txBody>
-          <a:bodyPr wrap="square" anchor="t" lIns="0" rIns="0" tIns="0" bIns="0">
-            <a:spAutoFit/>
-          </a:bodyPr>
-          <a:lstStyle/>
-          <a:p>
-            <a:pPr algn="r"/>
-            <a:r>
-              <a:rPr sz="1100" b="0" i="0">
-                <a:solidFill>
-                  <a:srgbClr val="7A7A7A"/>
-                </a:solidFill>
-                <a:latin typeface="Roboto"/>
-              </a:rPr>
-              <a:t>6</a:t>
-            </a:r>
-          </a:p>
-        </p:txBody>
-      </p:sp>
-    </p:spTree>
-  </p:cSld>
-  <p:clrMapOvr>
-    <a:masterClrMapping/>
-  </p:clrMapOvr>
-</p:sld>
-</file>
-
-<file path=ppt/slides/slide9.xml><?xml version="1.0" encoding="utf-8"?>
-<p:sld xmlns:a="http://schemas.openxmlformats.org/drawingml/2006/main" xmlns:p="http://schemas.openxmlformats.org/presentationml/2006/main" xmlns:r="http://schemas.openxmlformats.org/officeDocument/2006/relationships">
-  <p:cSld>
-    <p:bg>
-      <p:bgPr>
-        <a:solidFill>
-          <a:srgbClr val="FFFFFF"/>
-        </a:solidFill>
-        <a:effectLst/>
-      </p:bgPr>
-    </p:bg>
-    <p:spTree>
-      <p:nvGrpSpPr>
-        <p:cNvPr id="1" name=""/>
-        <p:cNvGrpSpPr/>
-        <p:nvPr/>
-      </p:nvGrpSpPr>
-      <p:grpSpPr/>
-      <p:sp>
-        <p:nvSpPr>
-          <p:cNvPr id="2" name="Rectangle 1"/>
-          <p:cNvSpPr/>
-          <p:nvPr/>
-        </p:nvSpPr>
-        <p:spPr>
-          <a:xfrm>
-            <a:off x="0" y="0"/>
-            <a:ext cx="3931920" cy="6858000"/>
           </a:xfrm>
           <a:prstGeom prst="rect">
             <a:avLst/>
@@ -8953,14 +12817,14 @@
       </p:sp>
       <p:sp>
         <p:nvSpPr>
-          <p:cNvPr id="3" name="TextBox 2"/>
+          <p:cNvPr id="7" name="TextBox 6"/>
           <p:cNvSpPr txBox="1"/>
           <p:nvPr/>
         </p:nvSpPr>
         <p:spPr>
           <a:xfrm>
-            <a:off x="365760" y="2103120"/>
-            <a:ext cx="3291840" cy="2194560"/>
+            <a:off x="502920" y="6400800"/>
+            <a:ext cx="5486400" cy="320040"/>
           </a:xfrm>
           <a:prstGeom prst="rect">
             <a:avLst/>
@@ -8974,27 +12838,36 @@
           <a:lstStyle/>
           <a:p>
             <a:r>
-              <a:rPr sz="13000" b="1" i="0">
-                <a:solidFill>
-                  <a:srgbClr val="FFFFFF"/>
-                </a:solidFill>
-                <a:latin typeface="Roboto"/>
-              </a:rPr>
-              <a:t>02</a:t>
-            </a:r>
-          </a:p>
-        </p:txBody>
-      </p:sp>
-      <p:sp>
-        <p:nvSpPr>
-          <p:cNvPr id="4" name="TextBox 3"/>
+              <a:rPr sz="1100" b="1" i="0">
+                <a:solidFill>
+                  <a:srgbClr val="2A2929"/>
+                </a:solidFill>
+                <a:latin typeface="Roboto"/>
+              </a:rPr>
+              <a:t>Kangan </a:t>
+            </a:r>
+            <a:r>
+              <a:rPr sz="1100" b="1" i="0">
+                <a:solidFill>
+                  <a:srgbClr val="D68E10"/>
+                </a:solidFill>
+                <a:latin typeface="Roboto"/>
+              </a:rPr>
+              <a:t>Institute</a:t>
+            </a:r>
+          </a:p>
+        </p:txBody>
+      </p:sp>
+      <p:sp>
+        <p:nvSpPr>
+          <p:cNvPr id="8" name="TextBox 7"/>
           <p:cNvSpPr txBox="1"/>
           <p:nvPr/>
         </p:nvSpPr>
         <p:spPr>
           <a:xfrm>
-            <a:off x="4480560" y="2468880"/>
-            <a:ext cx="7132320" cy="2194560"/>
+            <a:off x="10515600" y="6400800"/>
+            <a:ext cx="1188720" cy="320040"/>
           </a:xfrm>
           <a:prstGeom prst="rect">
             <a:avLst/>
@@ -9007,159 +12880,6 @@
           </a:bodyPr>
           <a:lstStyle/>
           <a:p>
-            <a:r>
-              <a:rPr sz="1600" b="1" i="0">
-                <a:solidFill>
-                  <a:srgbClr val="27B5CE"/>
-                </a:solidFill>
-                <a:latin typeface="Roboto"/>
-              </a:rPr>
-              <a:t>SECTION</a:t>
-            </a:r>
-          </a:p>
-          <a:p>
-            <a:pPr>
-              <a:spcBef>
-                <a:spcPts val="600"/>
-              </a:spcBef>
-            </a:pPr>
-            <a:r>
-              <a:rPr sz="3800" b="1" i="0">
-                <a:solidFill>
-                  <a:srgbClr val="2A2929"/>
-                </a:solidFill>
-                <a:latin typeface="Roboto"/>
-              </a:rPr>
-              <a:t>Obtaining sign-off</a:t>
-            </a:r>
-          </a:p>
-          <a:p>
-            <a:pPr>
-              <a:spcBef>
-                <a:spcPts val="1000"/>
-              </a:spcBef>
-            </a:pPr>
-            <a:r>
-              <a:rPr sz="2000" b="0" i="1">
-                <a:solidFill>
-                  <a:srgbClr val="484848"/>
-                </a:solidFill>
-                <a:latin typeface="Roboto Light"/>
-              </a:rPr>
-              <a:t>get the deploy authorised</a:t>
-            </a:r>
-          </a:p>
-        </p:txBody>
-      </p:sp>
-      <p:sp>
-        <p:nvSpPr>
-          <p:cNvPr id="5" name="Rectangle 4"/>
-          <p:cNvSpPr/>
-          <p:nvPr/>
-        </p:nvSpPr>
-        <p:spPr>
-          <a:xfrm>
-            <a:off x="0" y="6565392"/>
-            <a:ext cx="12191695" cy="38100"/>
-          </a:xfrm>
-          <a:prstGeom prst="rect">
-            <a:avLst/>
-          </a:prstGeom>
-          <a:solidFill>
-            <a:srgbClr val="27B5CE"/>
-          </a:solidFill>
-          <a:ln>
-            <a:noFill/>
-          </a:ln>
-          <a:effectLst/>
-        </p:spPr>
-        <p:style>
-          <a:lnRef idx="1">
-            <a:schemeClr val="accent1"/>
-          </a:lnRef>
-          <a:fillRef idx="3">
-            <a:schemeClr val="accent1"/>
-          </a:fillRef>
-          <a:effectRef idx="2">
-            <a:schemeClr val="accent1"/>
-          </a:effectRef>
-          <a:fontRef idx="minor">
-            <a:schemeClr val="lt1"/>
-          </a:fontRef>
-        </p:style>
-        <p:txBody>
-          <a:bodyPr rtlCol="0" anchor="ctr"/>
-          <a:lstStyle/>
-          <a:p>
-            <a:pPr algn="ctr"/>
-          </a:p>
-        </p:txBody>
-      </p:sp>
-      <p:sp>
-        <p:nvSpPr>
-          <p:cNvPr id="6" name="TextBox 5"/>
-          <p:cNvSpPr txBox="1"/>
-          <p:nvPr/>
-        </p:nvSpPr>
-        <p:spPr>
-          <a:xfrm>
-            <a:off x="502920" y="6400800"/>
-            <a:ext cx="5486400" cy="320040"/>
-          </a:xfrm>
-          <a:prstGeom prst="rect">
-            <a:avLst/>
-          </a:prstGeom>
-          <a:noFill/>
-        </p:spPr>
-        <p:txBody>
-          <a:bodyPr wrap="square" anchor="t" lIns="0" rIns="0" tIns="0" bIns="0">
-            <a:spAutoFit/>
-          </a:bodyPr>
-          <a:lstStyle/>
-          <a:p>
-            <a:r>
-              <a:rPr sz="1100" b="1" i="0">
-                <a:solidFill>
-                  <a:srgbClr val="2A2929"/>
-                </a:solidFill>
-                <a:latin typeface="Roboto"/>
-              </a:rPr>
-              <a:t>Kangan </a:t>
-            </a:r>
-            <a:r>
-              <a:rPr sz="1100" b="1" i="0">
-                <a:solidFill>
-                  <a:srgbClr val="D68E10"/>
-                </a:solidFill>
-                <a:latin typeface="Roboto"/>
-              </a:rPr>
-              <a:t>Institute</a:t>
-            </a:r>
-          </a:p>
-        </p:txBody>
-      </p:sp>
-      <p:sp>
-        <p:nvSpPr>
-          <p:cNvPr id="7" name="TextBox 6"/>
-          <p:cNvSpPr txBox="1"/>
-          <p:nvPr/>
-        </p:nvSpPr>
-        <p:spPr>
-          <a:xfrm>
-            <a:off x="10515600" y="6400800"/>
-            <a:ext cx="1188720" cy="320040"/>
-          </a:xfrm>
-          <a:prstGeom prst="rect">
-            <a:avLst/>
-          </a:prstGeom>
-          <a:noFill/>
-        </p:spPr>
-        <p:txBody>
-          <a:bodyPr wrap="square" anchor="t" lIns="0" rIns="0" tIns="0" bIns="0">
-            <a:spAutoFit/>
-          </a:bodyPr>
-          <a:lstStyle/>
-          <a:p>
             <a:pPr algn="r"/>
             <a:r>
               <a:rPr sz="1100" b="0" i="0">
@@ -9168,7 +12888,7 @@
                 </a:solidFill>
                 <a:latin typeface="Roboto"/>
               </a:rPr>
-              <a:t/>
+              <a:t>6</a:t>
             </a:r>
           </a:p>
         </p:txBody>
